--- a/Artificial Intelligence for Enterprises/Assessment3/_fixed.pptx
+++ b/Artificial Intelligence for Enterprises/Assessment3/_fixed.pptx
@@ -1083,6 +1083,21 @@
           </a:p>
           <a:p>
             <a:r>
+              <a:t>【matrix-cell】感測器故障;人工標註本身就會錯 - 而標註錯誤足以改變模型的評比結論(Northcutt et al., 2021);跨系統重複記錄</a:t>
+            </a:r>
+          </a:p>
+          <a:p>
+            <a:r>
+              <a:t>【matrix-cell】目前不一致:同一段影片,不同複核者會給不同標籤(低頭 vs 閉眼、保溫瓶 vs 手機),而這個不一致從來沒有被量測過</a:t>
+            </a:r>
+          </a:p>
+          <a:p>
+            <a:r>
+              <a:t>【matrix】{'name': '處理', 'cells': ['感測器故障;人工標註本身就會錯 - 而標註錯誤足以改變模型的評比結論(Northcutt et …', '準確性 · 一致性', 'W3-10 標註品質:誤報的操作型定義 + 判準手冊 + 黃金題'], 'hot': False}</a:t>
+            </a:r>
+          </a:p>
+          <a:p>
+            <a:r>
               <a:t>【這一頁的作用】這一頁把「為什麼第一筆錢要買量測,而不是買模型」變成委員會看得見的東西:左邊誤報有母體、有比例、有根因,右邊漏放只有一份 39 筆、自註為下限、還有四分之一無法歸類 - 兩側證據強度的落差本身就是提案的理由。同時它用真實案例數據(1,647 筆樣本、103/124、39 筆測試、6/12)證明痛點不是修辭,再用 Ensign 的回饋迴路說明「沒有人回看的那一流」為什麼會讓錯誤永久留下,把痛點從『這次判錯了』升級成『這個錯誤系統性地不會被發現』。最後主動把最強的線索降級成假說並綁到 G1,誠實度因此是被證明的而不是被宣稱的。</a:t>
             </a:r>
           </a:p>
@@ -1153,12 +1168,67 @@
           <a:lstStyle/>
           <a:p>
             <a:r>
-              <a:t>【matrix】{'name': '選項 1\n規則式脈絡融合(不用機器學習)', 'cells': ['定位 + 地圖速限硬規則比對,把畫面外的脈絡接到事件上', '一次性建置,之後整段下移一階、後續仍線性', '可逐條檢查、可回退到規則本身', '先做 - 某小型車隊單月樣本中 103 / 124 = 83% 的誤報同一根因,而速限資料自有;高風險決策場景應優先使用可逐條檢查的可解釋方法,而不是對黑箱做事後解釋(Rudin, 2019)。它同時是選項 2 的對照基線'], 'hot': False}</a:t>
-            </a:r>
-          </a:p>
-          <a:p>
-            <a:r>
-              <a:t>【matrix】{'name': '選項 3\n公司既有的雲端判讀規劃', 'cells': ['仍在研擬中的雲端判讀', '尚未開始,曲線未定', '不在本案範圍,由技術長辦公室決定', '前置條件,不是競爭關係 - 雲端判定真假,誰判定雲端?本案提供它需要的可稽核量測與乾淨標註'], 'hot': False}</a:t>
+              <a:t>【matrix-cell】線性:量幾倍,人就要幾倍 → 需 17-24 人(現有 5 人)〔提案推算,非核定編制〕</a:t>
+            </a:r>
+          </a:p>
+          <a:p>
+            <a:r>
+              <a:t>【matrix-cell】拒絕 - 加人只是沿著同一條成本曲線移動,不是把曲線整條外推(完整算式與迴路見下方卡片)</a:t>
+            </a:r>
+          </a:p>
+          <a:p>
+            <a:r>
+              <a:t>【matrix-cell】重排班表,把尖峰徵調的 7 位研發工程師從臨時支援變成有編組、有訓練的正式安排(尖峰徵調是現在就在跑的簡易版)</a:t>
+            </a:r>
+          </a:p>
+          <a:p>
+            <a:r>
+              <a:t>【matrix-cell】仍線性,但斜率略低;削得掉尖峰,削不掉每日底量。⚠️ 斜率與削峰幅度目前沒有量測</a:t>
+            </a:r>
+          </a:p>
+          <a:p>
+            <a:r>
+              <a:t>【matrix-cell】待 G1 判定,本案不預先否決它 - 它是最便宜的解。營運端三個限制〔第一手經驗,不是量測〕:新人約三個月才判得準 · 影像有隱私限制不能外包 · 過去擴大人力判準反而更亂;另一項:排班只動得了排隊那 0-1 天</a:t>
+            </a:r>
+          </a:p>
+          <a:p>
+            <a:r>
+              <a:t>【matrix-cell】先做 - 某小型車隊單月樣本中 103 / 124 = 83% 的誤報同一根因,而速限資料自有;高風險決策場景應優先使用可逐條檢查的可解釋方法,而不是對黑箱做事後解釋(Rudin, 2019)。它同時是選項 2 的對照基線</a:t>
+            </a:r>
+          </a:p>
+          <a:p>
+            <a:r>
+              <a:t>【matrix-cell】讓機器讀懂一次事件的完整脈絡(影片 + 客戶問題 + 規則),產出可交付的描述與證據包</a:t>
+            </a:r>
+          </a:p>
+          <a:p>
+            <a:r>
+              <a:t>【matrix-cell】前期一次性投入,之後次線性 - 事件量繼續長,人時不跟著等比長。這是五條裡唯一不是線性的形狀</a:t>
+            </a:r>
+          </a:p>
+          <a:p>
+            <a:r>
+              <a:t>【matrix-cell】採用 - 前三包不是流程改善,是評估它的必要前置:量測底座 = 評估基準(沒有它不知道模型判得對不對)· 判準統一 = 驗證資料(判準不一致的標註餵給模型就是垃圾進垃圾出)· 規則式 = 對照基線(要證明模型有增量,得先有一個不用它的基準)</a:t>
+            </a:r>
+          </a:p>
+          <a:p>
+            <a:r>
+              <a:t>【matrix-cell】前置條件,不是競爭關係 - 雲端判定真假,誰判定雲端?本案提供它需要的可稽核量測與乾淨標註</a:t>
+            </a:r>
+          </a:p>
+          <a:p>
+            <a:r>
+              <a:t>【matrix】{'name': '選項 0b\n調班 + 尖峰人力池', 'cells': ['重排班表,把尖峰徵調的 7 位研發工程師從臨時支援變成有編組、有訓練…', '仍線性,但斜率略低;削得掉尖峰,削不掉每日底量。⚠️ 斜率與削峰幅度目…', '隨時可停、可退回原班表 - 五條路裡反悔成本最低的一條', '待 G1 判定,本案不預先否決它 - 它是最便宜的解。營運端三個限制〔第…'], 'hot': False}</a:t>
+            </a:r>
+          </a:p>
+          <a:p>
+            <a:r>
+              <a:t>【matrix】{'name': '選項 1\n規則式脈絡融合(不用機器學習)', 'cells': ['定位 + 地圖速限硬規則比對,把畫面外的脈絡接到事件上', '一次性建置,之後整段下移一階、後續仍線性', '可逐條檢查、可回退到規則本身', '先做 - 某小型車隊單月樣本中 103 / 124 = 83% 的誤報同一根因,而速…'], 'hot': False}</a:t>
+            </a:r>
+          </a:p>
+          <a:p>
+            <a:r>
+              <a:t>【matrix】{'name': '選項 3\n公司既有的雲端判讀規劃', 'cells': ['仍在研擬中的雲端判讀', '尚未開始,曲線未定', '不在本案範圍,由技術長辦公室決定', '前置條件,不是競爭關係 - 雲端判定真假,誰判定雲端?本案提供它需要的…'], 'hot': False}</a:t>
             </a:r>
           </a:p>
           <a:p>
@@ -1383,7 +1453,17 @@
           <a:lstStyle/>
           <a:p>
             <a:r>
-              <a:t>【matrix】{'name': 'R3 數據｜自動化偏差 · 成功 中\n(Parasuraman &amp; Manzey, 2010)', 'cells': ['教育・介面 (Goddard et al., 2012)\n介面不顯示信心 (Guo et al., 2017)', '不顯示信心使複核變慢,\n與時效缺口相衝', '盲測組與對照組判定差異\n超過設計書所訂容忍值'], 'hot': False}</a:t>
+              <a:t>【matrix-cell】教育・介面 (Goddard et al., 2012)</a:t>
+            </a:r>
+          </a:p>
+          <a:p>
+            <a:r>
+              <a:t>介面不顯示信心 (Guo et al., 2017)</a:t>
+            </a:r>
+          </a:p>
+          <a:p>
+            <a:r>
+              <a:t>【matrix】{'name': 'R3 數據｜自動化偏差 · 成功 中\n(Parasuraman &amp; Manzey, 2010)', 'cells': ['教育・介面 (Goddard et al., 2012)\n介面不顯示信心 (Guo et al., 2017)…', '不顯示信心使複核變慢,\n與時效缺口相衝', '盲測組與對照組判定差異\n超過設計書所訂容忍值'], 'hot': False}</a:t>
             </a:r>
           </a:p>
           <a:p>
@@ -1573,12 +1653,27 @@
           </a:p>
           <a:p>
             <a:r>
+              <a:t>【matrix-cell】本案期內維持 100%(影子模式,機器不對外結案)。移交後開到天花板時會降到約 15% —— 那是本案造成的,不是本案要解的;移交後目標值須與自動結案的放行門一起訂</a:t>
+            </a:r>
+          </a:p>
+          <a:p>
+            <a:r>
+              <a:t>【matrix-cell】批次複核約 20 秒/筆(全量;營運端實務估計,尚未以計時量測驗證)· 深入判讀約 5.25 分鐘/筆(5 人 × 3.6 個分析日 = 144 人時 ÷ 1,647 筆反推,單一批次的實際節奏,不是長期平均)</a:t>
+            </a:r>
+          </a:p>
+          <a:p>
+            <a:r>
+              <a:t>【matrix】{'name': '業務② 獲得人工驗證判定的客戶涵蓋率', 'cells': ['現況為配給制,依購買量與問題嚴重性排序;涵蓋率無紀錄,W6 建立', '本案期內維持 100%(影子模式,機器不對外結案)。移交後開到天花板時會降到約 15% —— 那是本案造成的,不是本案要解的;移交後目標值須與自動結案的放行門…']}</a:t>
+            </a:r>
+          </a:p>
+          <a:p>
+            <a:r>
               <a:t>【matrix】{'name': '業務③ 可服務的每日事件量上限', 'cells': ['現況撐一個大型車隊約 3,000 筆/天', '支撐全客戶 13,000+ 筆/天〔提案目標;所需人力由 G2 後依實測單位工時重估〕。驅動因子不在我方控制內 —— 由客戶的開通時點決定']}</a:t>
             </a:r>
           </a:p>
           <a:p>
             <a:r>
-              <a:t>【matrix】{'name': '營運⑤⑥ 兩條工作流的每筆人工工時', 'cells': ['批次複核約 20 秒/筆(全量;營運端實務估計,尚未以計時量測驗證)· 深入判讀約 5.25 分鐘/筆(5 人 × 3.6 個分析日 = 144 人時 ÷ 1,647 筆反推,單一批次的實際節奏,不是長期平均)', '兩者的正式量測都提前到 W6,與時間拆解同批交出;目標值於 G1 訂定 —— 全客戶人力推算與可避免成本都掛在這兩個單價上']}</a:t>
+              <a:t>【matrix】{'name': '營運⑤⑥ 兩條工作流的每筆人工工時', 'cells': ['批次複核約 20 秒/筆(全量;營運端實務估計,尚未以計時量測驗證)· 深入判讀約 5.25 分鐘/筆(5 人 × 3.6 個分析日 = 144 人時 ÷ 1,647 筆反推,單一批…', '兩者的正式量測都提前到 W6,與時間拆解同批交出;目標值於 G1 訂定 —— 全客戶人力推算與可避免成本都掛在這兩個單價上']}</a:t>
             </a:r>
           </a:p>
           <a:p>
@@ -1594,6 +1689,26 @@
           <a:p>
             <a:r>
               <a:t>【matrix】{'name': '營運⑨ 尖峰徵調研發人時', 'cells': ['尖峰徵調 7 位研發工程師(離開本職 · 非常態編制 · 非專職)', '期內建立峰值徵調人時的量測基準,目標值於 G2 訂定;歸零列為移交後目標']}</a:t>
+            </a:r>
+          </a:p>
+          <a:p>
+            <a:r>
+              <a:t>【matrix-cell】定義:被分到「有把握、可直接結案」桶,但描述錯誤且該錯誤足以改變判定結論的比例。基準不存在 —— 自動結案機制尚未建立</a:t>
+            </a:r>
+          </a:p>
+          <a:p>
+            <a:r>
+              <a:t>【matrix-cell】W12 由影子模式軌交出「自動結案桶與人工桶的漏放率差值」的 95% 信賴區間;非劣性邊際 δ 由委員會於 G1(W6)事前預註冊 —— 資料 W12 才交,判準必須寫在跑實驗之前</a:t>
+            </a:r>
+          </a:p>
+          <a:p>
+            <a:r>
+              <a:t>【matrix-cell】否決自動結案能不能對外生效 —— 沒有它,分流率就等於把那部分風險藏進「機器有把握」那一桶 · 技術負責人</a:t>
+            </a:r>
+          </a:p>
+          <a:p>
+            <a:r>
+              <a:t>【matrix】{'name': '⑪ 複核者一致性', 'cells': ['現況未量測', 'W10 前建立基線,目標值於 G2 訂定', '否決 G2 准不准開放對照重訓 · 複核營運主管']}</a:t>
             </a:r>
           </a:p>
           <a:p>
@@ -1814,6 +1929,16 @@
           <a:p>
             <a:r>
               <a:t>【card:G3 · 第 24 週｜部署決定門】對照實驗的設計(hold-out 怎麼凍 · 因子…</a:t>
+            </a:r>
+          </a:p>
+          <a:p>
+            <a:r>
+              <a:t>【matrix-cell】🔴 自動結案桶與人工桶的漏放率差值(95% 信賴區間),對照 G1 事前預註冊的非劣性邊際 δ;另計冤枉率(該翻案而未翻案)。前三臂全部含人,而要部署的是無人系統 —— 只有這一臂算得出自動結案的漏放率。🚫 判準是比差值、比事前邊際,不是兩條信賴區間的端點互比</a:t>
+            </a:r>
+          </a:p>
+          <a:p>
+            <a:r>
+              <a:t>【matrix】{'name': '② 規則式脈絡基線', 'cells': ['規則式脈絡層 + 人全數複核', '不含模型能解掉多少誤報。它是地端 VLM 的對照基線 —— 如果它就夠,本案的模型端該縮']}</a:t>
             </a:r>
           </a:p>
           <a:p>
@@ -6327,7 +6452,7 @@
         </p:nvGraphicFramePr>
         <p:xfrm>
           <a:off x="658368" y="4975352"/>
-          <a:ext cx="9658805" cy="1498599"/>
+          <a:ext cx="9658806" cy="1724787"/>
         </p:xfrm>
         <a:graphic>
           <a:graphicData uri="http://schemas.openxmlformats.org/drawingml/2006/table">
@@ -6337,9 +6462,8 @@
               </a:tblPr>
               <a:tblGrid>
                 <a:gridCol w="2897642"/>
-                <a:gridCol w="2253721"/>
-                <a:gridCol w="2253721"/>
-                <a:gridCol w="2253721"/>
+                <a:gridCol w="3380582"/>
+                <a:gridCol w="3380582"/>
               </a:tblGrid>
               <a:tr h="329184">
                 <a:tc>
@@ -6411,31 +6535,8 @@
                     </a:solidFill>
                   </a:tcPr>
                 </a:tc>
-                <a:tc>
-                  <a:txBody>
-                    <a:bodyPr/>
-                    <a:lstStyle/>
-                    <a:p>
-                      <a:pPr algn="ctr"/>
-                      <a:r>
-                        <a:rPr sz="1200" b="1">
-                          <a:solidFill>
-                            <a:srgbClr val="FFFFFF"/>
-                          </a:solidFill>
-                          <a:latin typeface="Microsoft JhengHei"/>
-                        </a:rPr>
-                        <a:t>它算得出什麼 —— 以及為什麼少不了</a:t>
-                      </a:r>
-                    </a:p>
-                  </a:txBody>
-                  <a:tcPr marL="45720" marR="45720" marT="18288" marB="18288" anchor="ctr">
-                    <a:solidFill>
-                      <a:srgbClr val="1F4E79"/>
-                    </a:solidFill>
-                  </a:tcPr>
-                </a:tc>
               </a:tr>
-              <a:tr h="389805">
+              <a:tr h="569214">
                 <a:tc>
                   <a:txBody>
                     <a:bodyPr/>
@@ -6505,95 +6606,8 @@
                     </a:solidFill>
                   </a:tcPr>
                 </a:tc>
-                <a:tc>
-                  <a:txBody>
-                    <a:bodyPr/>
-                    <a:lstStyle/>
-                    <a:p/>
-                  </a:txBody>
-                  <a:tcPr/>
-                </a:tc>
               </a:tr>
-              <a:tr h="389805">
-                <a:tc>
-                  <a:txBody>
-                    <a:bodyPr/>
-                    <a:lstStyle/>
-                    <a:p>
-                      <a:pPr algn="l"/>
-                      <a:r>
-                        <a:rPr sz="1200" b="0">
-                          <a:solidFill>
-                            <a:srgbClr val="16212E"/>
-                          </a:solidFill>
-                          <a:latin typeface="Microsoft JhengHei"/>
-                        </a:rPr>
-                        <a:t>② 規則式脈絡基線</a:t>
-                      </a:r>
-                    </a:p>
-                  </a:txBody>
-                  <a:tcPr marL="45720" marR="45720" marT="18288" marB="18288" anchor="ctr">
-                    <a:solidFill>
-                      <a:srgbClr val="FFFFFF"/>
-                    </a:solidFill>
-                  </a:tcPr>
-                </a:tc>
-                <a:tc>
-                  <a:txBody>
-                    <a:bodyPr/>
-                    <a:lstStyle/>
-                    <a:p>
-                      <a:pPr algn="ctr"/>
-                      <a:r>
-                        <a:rPr sz="1200" b="0">
-                          <a:solidFill>
-                            <a:srgbClr val="6B7885"/>
-                          </a:solidFill>
-                          <a:latin typeface="Microsoft JhengHei"/>
-                        </a:rPr>
-                        <a:t>規則式脈絡層 + 人全數複核</a:t>
-                      </a:r>
-                    </a:p>
-                  </a:txBody>
-                  <a:tcPr marL="45720" marR="45720" marT="18288" marB="18288" anchor="ctr">
-                    <a:solidFill>
-                      <a:srgbClr val="FFFFFF"/>
-                    </a:solidFill>
-                  </a:tcPr>
-                </a:tc>
-                <a:tc>
-                  <a:txBody>
-                    <a:bodyPr/>
-                    <a:lstStyle/>
-                    <a:p>
-                      <a:pPr algn="ctr"/>
-                      <a:r>
-                        <a:rPr sz="1200" b="0">
-                          <a:solidFill>
-                            <a:srgbClr val="6B7885"/>
-                          </a:solidFill>
-                          <a:latin typeface="Microsoft JhengHei"/>
-                        </a:rPr>
-                        <a:t>不含模型能解掉多少誤報。它是地端 VLM 的對照基線 —— 如果它就夠,本案的模型端該縮</a:t>
-                      </a:r>
-                    </a:p>
-                  </a:txBody>
-                  <a:tcPr marL="45720" marR="45720" marT="18288" marB="18288" anchor="ctr">
-                    <a:solidFill>
-                      <a:srgbClr val="FFFFFF"/>
-                    </a:solidFill>
-                  </a:tcPr>
-                </a:tc>
-                <a:tc>
-                  <a:txBody>
-                    <a:bodyPr/>
-                    <a:lstStyle/>
-                    <a:p/>
-                  </a:txBody>
-                  <a:tcPr/>
-                </a:tc>
-              </a:tr>
-              <a:tr h="389805">
+              <a:tr h="826389">
                 <a:tc>
                   <a:txBody>
                     <a:bodyPr/>
@@ -6653,7 +6667,7 @@
                           </a:solidFill>
                           <a:latin typeface="Microsoft JhengHei"/>
                         </a:rPr>
-                        <a:t>🔴 自動結案桶與人工桶的漏放率差值(95% 信賴區間),對照 G1 事前預註冊的非劣性邊際 δ;另計冤枉率(該翻案而未翻案)。前三臂全部含人,而要部署的是無人系統 —— 只有這一臂算得出自動結案的漏放率。🚫 判準是比差值、比事前邊際,不是兩條信賴區間的端點互比</a:t>
+                        <a:t>🔴 自動結案桶與人工桶的漏放率差值(95% 信賴區間),對照 G1 事前預註冊的非劣性邊際 δ;另計冤枉率(該翻案而未翻案)。前三臂全部含人…</a:t>
                       </a:r>
                     </a:p>
                   </a:txBody>
@@ -6662,14 +6676,6 @@
                       <a:srgbClr val="FBEFEF"/>
                     </a:solidFill>
                   </a:tcPr>
-                </a:tc>
-                <a:tc>
-                  <a:txBody>
-                    <a:bodyPr/>
-                    <a:lstStyle/>
-                    <a:p/>
-                  </a:txBody>
-                  <a:tcPr/>
                 </a:tc>
               </a:tr>
             </a:tbl>
@@ -11585,7 +11591,7 @@
         </p:nvGraphicFramePr>
         <p:xfrm>
           <a:off x="658368" y="2360855"/>
-          <a:ext cx="10874957" cy="2173289"/>
+          <a:ext cx="10874957" cy="2146554"/>
         </p:xfrm>
         <a:graphic>
           <a:graphicData uri="http://schemas.openxmlformats.org/drawingml/2006/table">
@@ -11669,7 +11675,7 @@
                   </a:tcPr>
                 </a:tc>
               </a:tr>
-              <a:tr h="368821">
+              <a:tr h="312039">
                 <a:tc>
                   <a:txBody>
                     <a:bodyPr/>
@@ -11740,7 +11746,7 @@
                   </a:tcPr>
                 </a:tc>
               </a:tr>
-              <a:tr h="368821">
+              <a:tr h="312039">
                 <a:tc>
                   <a:txBody>
                     <a:bodyPr/>
@@ -11811,7 +11817,7 @@
                   </a:tcPr>
                 </a:tc>
               </a:tr>
-              <a:tr h="368821">
+              <a:tr h="312039">
                 <a:tc>
                   <a:txBody>
                     <a:bodyPr/>
@@ -11882,7 +11888,7 @@
                   </a:tcPr>
                 </a:tc>
               </a:tr>
-              <a:tr h="368821">
+              <a:tr h="569214">
                 <a:tc>
                   <a:txBody>
                     <a:bodyPr/>
@@ -11953,7 +11959,7 @@
                   </a:tcPr>
                 </a:tc>
               </a:tr>
-              <a:tr h="368821">
+              <a:tr h="312039">
                 <a:tc>
                   <a:txBody>
                     <a:bodyPr/>
@@ -13152,7 +13158,7 @@
         </p:nvGraphicFramePr>
         <p:xfrm>
           <a:off x="658368" y="4910195"/>
-          <a:ext cx="9658805" cy="1563756"/>
+          <a:ext cx="9658805" cy="1724787"/>
         </p:xfrm>
         <a:graphic>
           <a:graphicData uri="http://schemas.openxmlformats.org/drawingml/2006/table">
@@ -13260,7 +13266,7 @@
                   </a:tcPr>
                 </a:tc>
               </a:tr>
-              <a:tr h="411524">
+              <a:tr h="569214">
                 <a:tc>
                   <a:txBody>
                     <a:bodyPr/>
@@ -13354,101 +13360,7 @@
                   </a:tcPr>
                 </a:tc>
               </a:tr>
-              <a:tr h="411524">
-                <a:tc>
-                  <a:txBody>
-                    <a:bodyPr/>
-                    <a:lstStyle/>
-                    <a:p>
-                      <a:pPr algn="l"/>
-                      <a:r>
-                        <a:rPr sz="1200" b="0">
-                          <a:solidFill>
-                            <a:srgbClr val="16212E"/>
-                          </a:solidFill>
-                          <a:latin typeface="Microsoft JhengHei"/>
-                        </a:rPr>
-                        <a:t>處理</a:t>
-                      </a:r>
-                    </a:p>
-                  </a:txBody>
-                  <a:tcPr marL="45720" marR="45720" marT="18288" marB="18288" anchor="ctr">
-                    <a:solidFill>
-                      <a:srgbClr val="FFFFFF"/>
-                    </a:solidFill>
-                  </a:tcPr>
-                </a:tc>
-                <a:tc>
-                  <a:txBody>
-                    <a:bodyPr/>
-                    <a:lstStyle/>
-                    <a:p>
-                      <a:pPr algn="ctr"/>
-                      <a:r>
-                        <a:rPr sz="1200" b="0">
-                          <a:solidFill>
-                            <a:srgbClr val="6B7885"/>
-                          </a:solidFill>
-                          <a:latin typeface="Microsoft JhengHei"/>
-                        </a:rPr>
-                        <a:t>感測器故障;人工標註本身就會錯 - 而標註錯誤足以改變模型的評比結論(Northcutt et al., 2021);跨系統重複記錄</a:t>
-                      </a:r>
-                    </a:p>
-                  </a:txBody>
-                  <a:tcPr marL="45720" marR="45720" marT="18288" marB="18288" anchor="ctr">
-                    <a:solidFill>
-                      <a:srgbClr val="FFFFFF"/>
-                    </a:solidFill>
-                  </a:tcPr>
-                </a:tc>
-                <a:tc>
-                  <a:txBody>
-                    <a:bodyPr/>
-                    <a:lstStyle/>
-                    <a:p>
-                      <a:pPr algn="ctr"/>
-                      <a:r>
-                        <a:rPr sz="1200" b="0">
-                          <a:solidFill>
-                            <a:srgbClr val="6B7885"/>
-                          </a:solidFill>
-                          <a:latin typeface="Microsoft JhengHei"/>
-                        </a:rPr>
-                        <a:t>準確性 · 一致性</a:t>
-                      </a:r>
-                    </a:p>
-                  </a:txBody>
-                  <a:tcPr marL="45720" marR="45720" marT="18288" marB="18288" anchor="ctr">
-                    <a:solidFill>
-                      <a:srgbClr val="FFFFFF"/>
-                    </a:solidFill>
-                  </a:tcPr>
-                </a:tc>
-                <a:tc>
-                  <a:txBody>
-                    <a:bodyPr/>
-                    <a:lstStyle/>
-                    <a:p>
-                      <a:pPr algn="ctr"/>
-                      <a:r>
-                        <a:rPr sz="1200" b="0">
-                          <a:solidFill>
-                            <a:srgbClr val="6B7885"/>
-                          </a:solidFill>
-                          <a:latin typeface="Microsoft JhengHei"/>
-                        </a:rPr>
-                        <a:t>W3-10 標註品質:誤報的操作型定義 + 判準手冊 + 黃金題</a:t>
-                      </a:r>
-                    </a:p>
-                  </a:txBody>
-                  <a:tcPr marL="45720" marR="45720" marT="18288" marB="18288" anchor="ctr">
-                    <a:solidFill>
-                      <a:srgbClr val="FFFFFF"/>
-                    </a:solidFill>
-                  </a:tcPr>
-                </a:tc>
-              </a:tr>
-              <a:tr h="411524">
+              <a:tr h="826389">
                 <a:tc>
                   <a:txBody>
                     <a:bodyPr/>
@@ -13485,7 +13397,7 @@
                           </a:solidFill>
                           <a:latin typeface="Microsoft JhengHei"/>
                         </a:rPr>
-                        <a:t>目前不一致:同一段影片,不同複核者會給不同標籤(低頭 vs 閉眼、保溫瓶 vs 手機),而這個不一致從來沒有被量測過</a:t>
+                        <a:t>目前不一致:同一段影片,不同複核者會給不同標籤(低頭 vs 閉眼、保溫瓶 vs 手機),而…</a:t>
                       </a:r>
                     </a:p>
                   </a:txBody>
@@ -13735,7 +13647,7 @@
         </p:nvGraphicFramePr>
         <p:xfrm>
           <a:off x="658368" y="1755648"/>
-          <a:ext cx="10874955" cy="1869342"/>
+          <a:ext cx="10874955" cy="1981962"/>
         </p:xfrm>
         <a:graphic>
           <a:graphicData uri="http://schemas.openxmlformats.org/drawingml/2006/table">
@@ -13867,7 +13779,7 @@
                   </a:tcPr>
                 </a:tc>
               </a:tr>
-              <a:tr h="513386">
+              <a:tr h="826389">
                 <a:tc>
                   <a:txBody>
                     <a:bodyPr/>
@@ -13928,7 +13840,7 @@
                           </a:solidFill>
                           <a:latin typeface="Microsoft JhengHei"/>
                         </a:rPr>
-                        <a:t>線性:量幾倍,人就要幾倍 → 需 17-24 人(現有 5 人)〔提案推算,非核定編制〕</a:t>
+                        <a:t>線性:量幾倍,人就要幾倍 → 需 17-24 人(現有 5 人)〔提案推算,非核定…</a:t>
                       </a:r>
                     </a:p>
                   </a:txBody>
@@ -13974,7 +13886,7 @@
                           </a:solidFill>
                           <a:latin typeface="Microsoft JhengHei"/>
                         </a:rPr>
-                        <a:t>拒絕 - 加人只是沿著同一條成本曲線移動,不是把曲線整條外推(完整算式與迴路見下方卡片)</a:t>
+                        <a:t>拒絕 - 加人只是沿著同一條成本曲線移動,不是把曲線整條外推(完整算式…</a:t>
                       </a:r>
                     </a:p>
                   </a:txBody>
@@ -13985,125 +13897,7 @@
                   </a:tcPr>
                 </a:tc>
               </a:tr>
-              <a:tr h="513386">
-                <a:tc>
-                  <a:txBody>
-                    <a:bodyPr/>
-                    <a:lstStyle/>
-                    <a:p>
-                      <a:pPr algn="l"/>
-                      <a:r>
-                        <a:rPr sz="1200" b="0">
-                          <a:solidFill>
-                            <a:srgbClr val="16212E"/>
-                          </a:solidFill>
-                          <a:latin typeface="Microsoft JhengHei"/>
-                        </a:rPr>
-                        <a:t>選項 0b
-調班 + 尖峰人力池</a:t>
-                      </a:r>
-                    </a:p>
-                  </a:txBody>
-                  <a:tcPr marL="45720" marR="45720" marT="18288" marB="18288" anchor="ctr">
-                    <a:solidFill>
-                      <a:srgbClr val="FFFFFF"/>
-                    </a:solidFill>
-                  </a:tcPr>
-                </a:tc>
-                <a:tc>
-                  <a:txBody>
-                    <a:bodyPr/>
-                    <a:lstStyle/>
-                    <a:p>
-                      <a:pPr algn="ctr"/>
-                      <a:r>
-                        <a:rPr sz="1200" b="0">
-                          <a:solidFill>
-                            <a:srgbClr val="6B7885"/>
-                          </a:solidFill>
-                          <a:latin typeface="Microsoft JhengHei"/>
-                        </a:rPr>
-                        <a:t>重排班表,把尖峰徵調的 7 位研發工程師從臨時支援變成有編組、有訓練的正式安排(尖峰徵調是現在就在跑的簡易版)</a:t>
-                      </a:r>
-                    </a:p>
-                  </a:txBody>
-                  <a:tcPr marL="45720" marR="45720" marT="18288" marB="18288" anchor="ctr">
-                    <a:solidFill>
-                      <a:srgbClr val="FFFFFF"/>
-                    </a:solidFill>
-                  </a:tcPr>
-                </a:tc>
-                <a:tc>
-                  <a:txBody>
-                    <a:bodyPr/>
-                    <a:lstStyle/>
-                    <a:p>
-                      <a:pPr algn="ctr"/>
-                      <a:r>
-                        <a:rPr sz="1200" b="0">
-                          <a:solidFill>
-                            <a:srgbClr val="6B7885"/>
-                          </a:solidFill>
-                          <a:latin typeface="Microsoft JhengHei"/>
-                        </a:rPr>
-                        <a:t>仍線性,但斜率略低;削得掉尖峰,削不掉每日底量。⚠️ 斜率與削峰幅度目前沒有量測</a:t>
-                      </a:r>
-                    </a:p>
-                  </a:txBody>
-                  <a:tcPr marL="45720" marR="45720" marT="18288" marB="18288" anchor="ctr">
-                    <a:solidFill>
-                      <a:srgbClr val="FFFFFF"/>
-                    </a:solidFill>
-                  </a:tcPr>
-                </a:tc>
-                <a:tc>
-                  <a:txBody>
-                    <a:bodyPr/>
-                    <a:lstStyle/>
-                    <a:p>
-                      <a:pPr algn="ctr"/>
-                      <a:r>
-                        <a:rPr sz="1200" b="0">
-                          <a:solidFill>
-                            <a:srgbClr val="6B7885"/>
-                          </a:solidFill>
-                          <a:latin typeface="Microsoft JhengHei"/>
-                        </a:rPr>
-                        <a:t>隨時可停、可退回原班表 - 五條路裡反悔成本最低的一條</a:t>
-                      </a:r>
-                    </a:p>
-                  </a:txBody>
-                  <a:tcPr marL="45720" marR="45720" marT="18288" marB="18288" anchor="ctr">
-                    <a:solidFill>
-                      <a:srgbClr val="FFFFFF"/>
-                    </a:solidFill>
-                  </a:tcPr>
-                </a:tc>
-                <a:tc>
-                  <a:txBody>
-                    <a:bodyPr/>
-                    <a:lstStyle/>
-                    <a:p>
-                      <a:pPr algn="ctr"/>
-                      <a:r>
-                        <a:rPr sz="1200" b="0">
-                          <a:solidFill>
-                            <a:srgbClr val="6B7885"/>
-                          </a:solidFill>
-                          <a:latin typeface="Microsoft JhengHei"/>
-                        </a:rPr>
-                        <a:t>待 G1 判定,本案不預先否決它 - 它是最便宜的解。營運端三個限制〔第一手經驗,不是量測〕:新人約三個月才判得準 · 影像有隱私限制不能外包 · 過去擴大人力判準反而更亂;另一項:排班只動得了排隊那 0-1 天</a:t>
-                      </a:r>
-                    </a:p>
-                  </a:txBody>
-                  <a:tcPr marL="45720" marR="45720" marT="18288" marB="18288" anchor="ctr">
-                    <a:solidFill>
-                      <a:srgbClr val="FFFFFF"/>
-                    </a:solidFill>
-                  </a:tcPr>
-                </a:tc>
-              </a:tr>
-              <a:tr h="513386">
+              <a:tr h="826389">
                 <a:tc>
                   <a:txBody>
                     <a:bodyPr/>
@@ -14141,7 +13935,7 @@
                           </a:solidFill>
                           <a:latin typeface="Microsoft JhengHei"/>
                         </a:rPr>
-                        <a:t>讓機器讀懂一次事件的完整脈絡(影片 + 客戶問題 + 規則),產出可交付的描述與證據包</a:t>
+                        <a:t>讓機器讀懂一次事件的完整脈絡(影片 + 客戶問題 + 規則),產出可交付的…</a:t>
                       </a:r>
                     </a:p>
                   </a:txBody>
@@ -14164,7 +13958,7 @@
                           </a:solidFill>
                           <a:latin typeface="Microsoft JhengHei"/>
                         </a:rPr>
-                        <a:t>前期一次性投入,之後次線性 - 事件量繼續長,人時不跟著等比長。這是五條裡唯一不是線性的形狀</a:t>
+                        <a:t>前期一次性投入,之後次線性 - 事件量繼續長,人時不跟著等比長。這是五…</a:t>
                       </a:r>
                     </a:p>
                   </a:txBody>
@@ -14210,7 +14004,7 @@
                           </a:solidFill>
                           <a:latin typeface="Microsoft JhengHei"/>
                         </a:rPr>
-                        <a:t>採用 - 前三包不是流程改善,是評估它的必要前置:量測底座 = 評估基準(沒有它不知道模型判得對不對)· 判準統一 = 驗證資料(判準不一致的標註餵給模型就是垃圾進垃圾出)· 規則式 = 對照基線(要證明模型有增量,得先有一個不用它的基準)</a:t>
+                        <a:t>採用 - 前三包不是流程改善,是評估它的必要前置:量測底座 = 評估基準(…</a:t>
                       </a:r>
                     </a:p>
                   </a:txBody>
@@ -15132,7 +14926,7 @@
         </p:nvGraphicFramePr>
         <p:xfrm>
           <a:off x="658368" y="1755648"/>
-          <a:ext cx="10874956" cy="3835776"/>
+          <a:ext cx="10874956" cy="3744468"/>
         </p:xfrm>
         <a:graphic>
           <a:graphicData uri="http://schemas.openxmlformats.org/drawingml/2006/table">
@@ -15240,7 +15034,7 @@
                   </a:tcPr>
                 </a:tc>
               </a:tr>
-              <a:tr h="584432">
+              <a:tr h="569214">
                 <a:tc>
                   <a:txBody>
                     <a:bodyPr/>
@@ -15338,7 +15132,7 @@
                   </a:tcPr>
                 </a:tc>
               </a:tr>
-              <a:tr h="584432">
+              <a:tr h="569214">
                 <a:tc>
                   <a:txBody>
                     <a:bodyPr/>
@@ -15436,7 +15230,7 @@
                   </a:tcPr>
                 </a:tc>
               </a:tr>
-              <a:tr h="584432">
+              <a:tr h="569214">
                 <a:tc>
                   <a:txBody>
                     <a:bodyPr/>
@@ -15534,7 +15328,7 @@
                   </a:tcPr>
                 </a:tc>
               </a:tr>
-              <a:tr h="584432">
+              <a:tr h="569214">
                 <a:tc>
                   <a:txBody>
                     <a:bodyPr/>
@@ -15632,7 +15426,7 @@
                   </a:tcPr>
                 </a:tc>
               </a:tr>
-              <a:tr h="584432">
+              <a:tr h="569214">
                 <a:tc>
                   <a:txBody>
                     <a:bodyPr/>
@@ -15730,7 +15524,7 @@
                   </a:tcPr>
                 </a:tc>
               </a:tr>
-              <a:tr h="584432">
+              <a:tr h="569214">
                 <a:tc>
                   <a:txBody>
                     <a:bodyPr/>
@@ -16106,7 +15900,7 @@
         </p:nvGraphicFramePr>
         <p:xfrm>
           <a:off x="658368" y="1755648"/>
-          <a:ext cx="10874957" cy="3835776"/>
+          <a:ext cx="10874957" cy="3744468"/>
         </p:xfrm>
         <a:graphic>
           <a:graphicData uri="http://schemas.openxmlformats.org/drawingml/2006/table">
@@ -16190,7 +15984,7 @@
                   </a:tcPr>
                 </a:tc>
               </a:tr>
-              <a:tr h="584432">
+              <a:tr h="569214">
                 <a:tc>
                   <a:txBody>
                     <a:bodyPr/>
@@ -16262,7 +16056,7 @@
                   </a:tcPr>
                 </a:tc>
               </a:tr>
-              <a:tr h="584432">
+              <a:tr h="569214">
                 <a:tc>
                   <a:txBody>
                     <a:bodyPr/>
@@ -16334,7 +16128,7 @@
                   </a:tcPr>
                 </a:tc>
               </a:tr>
-              <a:tr h="584432">
+              <a:tr h="569214">
                 <a:tc>
                   <a:txBody>
                     <a:bodyPr/>
@@ -16406,7 +16200,7 @@
                   </a:tcPr>
                 </a:tc>
               </a:tr>
-              <a:tr h="584432">
+              <a:tr h="569214">
                 <a:tc>
                   <a:txBody>
                     <a:bodyPr/>
@@ -16478,7 +16272,7 @@
                   </a:tcPr>
                 </a:tc>
               </a:tr>
-              <a:tr h="584432">
+              <a:tr h="569214">
                 <a:tc>
                   <a:txBody>
                     <a:bodyPr/>
@@ -16550,7 +16344,7 @@
                   </a:tcPr>
                 </a:tc>
               </a:tr>
-              <a:tr h="584432">
+              <a:tr h="569214">
                 <a:tc>
                   <a:txBody>
                     <a:bodyPr/>
@@ -16986,7 +16780,7 @@
         </p:nvGraphicFramePr>
         <p:xfrm>
           <a:off x="658368" y="2399900"/>
-          <a:ext cx="10874957" cy="1936440"/>
+          <a:ext cx="10874957" cy="1981962"/>
         </p:xfrm>
         <a:graphic>
           <a:graphicData uri="http://schemas.openxmlformats.org/drawingml/2006/table">
@@ -16996,9 +16790,8 @@
               </a:tblPr>
               <a:tblGrid>
                 <a:gridCol w="3262487"/>
-                <a:gridCol w="2537490"/>
-                <a:gridCol w="2537490"/>
-                <a:gridCol w="2537490"/>
+                <a:gridCol w="3806235"/>
+                <a:gridCol w="3806235"/>
               </a:tblGrid>
               <a:tr h="329184">
                 <a:tc>
@@ -17070,31 +16863,8 @@
                     </a:solidFill>
                   </a:tcPr>
                 </a:tc>
-                <a:tc>
-                  <a:txBody>
-                    <a:bodyPr/>
-                    <a:lstStyle/>
-                    <a:p>
-                      <a:pPr algn="ctr"/>
-                      <a:r>
-                        <a:rPr sz="1200" b="1">
-                          <a:solidFill>
-                            <a:srgbClr val="FFFFFF"/>
-                          </a:solidFill>
-                          <a:latin typeface="Microsoft JhengHei"/>
-                        </a:rPr>
-                        <a:t>目標,或誰在第幾週訂出來</a:t>
-                      </a:r>
-                    </a:p>
-                  </a:txBody>
-                  <a:tcPr marL="45720" marR="45720" marT="18288" marB="18288" anchor="ctr">
-                    <a:solidFill>
-                      <a:srgbClr val="1F4E79"/>
-                    </a:solidFill>
-                  </a:tcPr>
-                </a:tc>
               </a:tr>
-              <a:tr h="535752">
+              <a:tr h="826389">
                 <a:tc>
                   <a:txBody>
                     <a:bodyPr/>
@@ -17164,95 +16934,8 @@
                     </a:solidFill>
                   </a:tcPr>
                 </a:tc>
-                <a:tc>
-                  <a:txBody>
-                    <a:bodyPr/>
-                    <a:lstStyle/>
-                    <a:p/>
-                  </a:txBody>
-                  <a:tcPr/>
-                </a:tc>
               </a:tr>
-              <a:tr h="535752">
-                <a:tc>
-                  <a:txBody>
-                    <a:bodyPr/>
-                    <a:lstStyle/>
-                    <a:p>
-                      <a:pPr algn="l"/>
-                      <a:r>
-                        <a:rPr sz="1200" b="0">
-                          <a:solidFill>
-                            <a:srgbClr val="16212E"/>
-                          </a:solidFill>
-                          <a:latin typeface="Microsoft JhengHei"/>
-                        </a:rPr>
-                        <a:t>業務② 獲得人工驗證判定的客戶涵蓋率</a:t>
-                      </a:r>
-                    </a:p>
-                  </a:txBody>
-                  <a:tcPr marL="45720" marR="45720" marT="18288" marB="18288" anchor="ctr">
-                    <a:solidFill>
-                      <a:srgbClr val="FFFFFF"/>
-                    </a:solidFill>
-                  </a:tcPr>
-                </a:tc>
-                <a:tc>
-                  <a:txBody>
-                    <a:bodyPr/>
-                    <a:lstStyle/>
-                    <a:p>
-                      <a:pPr algn="ctr"/>
-                      <a:r>
-                        <a:rPr sz="1200" b="0">
-                          <a:solidFill>
-                            <a:srgbClr val="6B7885"/>
-                          </a:solidFill>
-                          <a:latin typeface="Microsoft JhengHei"/>
-                        </a:rPr>
-                        <a:t>現況為配給制,依購買量與問題嚴重性排序;涵蓋率無紀錄,W6 建立</a:t>
-                      </a:r>
-                    </a:p>
-                  </a:txBody>
-                  <a:tcPr marL="45720" marR="45720" marT="18288" marB="18288" anchor="ctr">
-                    <a:solidFill>
-                      <a:srgbClr val="FFFFFF"/>
-                    </a:solidFill>
-                  </a:tcPr>
-                </a:tc>
-                <a:tc>
-                  <a:txBody>
-                    <a:bodyPr/>
-                    <a:lstStyle/>
-                    <a:p>
-                      <a:pPr algn="ctr"/>
-                      <a:r>
-                        <a:rPr sz="1200" b="0">
-                          <a:solidFill>
-                            <a:srgbClr val="6B7885"/>
-                          </a:solidFill>
-                          <a:latin typeface="Microsoft JhengHei"/>
-                        </a:rPr>
-                        <a:t>本案期內維持 100%(影子模式,機器不對外結案)。移交後開到天花板時會降到約 15% —— 那是本案造成的,不是本案要解的;移交後目標值須與自動結案的放行門一起訂</a:t>
-                      </a:r>
-                    </a:p>
-                  </a:txBody>
-                  <a:tcPr marL="45720" marR="45720" marT="18288" marB="18288" anchor="ctr">
-                    <a:solidFill>
-                      <a:srgbClr val="FFFFFF"/>
-                    </a:solidFill>
-                  </a:tcPr>
-                </a:tc>
-                <a:tc>
-                  <a:txBody>
-                    <a:bodyPr/>
-                    <a:lstStyle/>
-                    <a:p/>
-                  </a:txBody>
-                  <a:tcPr/>
-                </a:tc>
-              </a:tr>
-              <a:tr h="535752">
+              <a:tr h="826389">
                 <a:tc>
                   <a:txBody>
                     <a:bodyPr/>
@@ -17322,14 +17005,6 @@
                     </a:solidFill>
                   </a:tcPr>
                 </a:tc>
-                <a:tc>
-                  <a:txBody>
-                    <a:bodyPr/>
-                    <a:lstStyle/>
-                    <a:p/>
-                  </a:txBody>
-                  <a:tcPr/>
-                </a:tc>
               </a:tr>
             </a:tbl>
           </a:graphicData>
@@ -17345,7 +17020,7 @@
         </p:nvGraphicFramePr>
         <p:xfrm>
           <a:off x="658368" y="4537510"/>
-          <a:ext cx="9658806" cy="1936440"/>
+          <a:ext cx="9658805" cy="1981962"/>
         </p:xfrm>
         <a:graphic>
           <a:graphicData uri="http://schemas.openxmlformats.org/drawingml/2006/table">
@@ -17355,10 +17030,9 @@
               </a:tblPr>
               <a:tblGrid>
                 <a:gridCol w="2897642"/>
-                <a:gridCol w="1690291"/>
-                <a:gridCol w="1690291"/>
-                <a:gridCol w="1690291"/>
-                <a:gridCol w="1690291"/>
+                <a:gridCol w="2253721"/>
+                <a:gridCol w="2253721"/>
+                <a:gridCol w="2253721"/>
               </a:tblGrid>
               <a:tr h="329184">
                 <a:tc>
@@ -17453,31 +17127,8 @@
                     </a:solidFill>
                   </a:tcPr>
                 </a:tc>
-                <a:tc>
-                  <a:txBody>
-                    <a:bodyPr/>
-                    <a:lstStyle/>
-                    <a:p>
-                      <a:pPr algn="ctr"/>
-                      <a:r>
-                        <a:rPr sz="1200" b="1">
-                          <a:solidFill>
-                            <a:srgbClr val="FFFFFF"/>
-                          </a:solidFill>
-                          <a:latin typeface="Microsoft JhengHei"/>
-                        </a:rPr>
-                        <a:t>它一票否決什麼 · 誰負責</a:t>
-                      </a:r>
-                    </a:p>
-                  </a:txBody>
-                  <a:tcPr marL="45720" marR="45720" marT="18288" marB="18288" anchor="ctr">
-                    <a:solidFill>
-                      <a:srgbClr val="1F4E79"/>
-                    </a:solidFill>
-                  </a:tcPr>
-                </a:tc>
               </a:tr>
-              <a:tr h="535752">
+              <a:tr h="826389">
                 <a:tc>
                   <a:txBody>
                     <a:bodyPr/>
@@ -17570,118 +17221,8 @@
                     </a:solidFill>
                   </a:tcPr>
                 </a:tc>
-                <a:tc>
-                  <a:txBody>
-                    <a:bodyPr/>
-                    <a:lstStyle/>
-                    <a:p/>
-                  </a:txBody>
-                  <a:tcPr/>
-                </a:tc>
               </a:tr>
-              <a:tr h="535752">
-                <a:tc>
-                  <a:txBody>
-                    <a:bodyPr/>
-                    <a:lstStyle/>
-                    <a:p>
-                      <a:pPr algn="l"/>
-                      <a:r>
-                        <a:rPr sz="1200" b="0">
-                          <a:solidFill>
-                            <a:srgbClr val="16212E"/>
-                          </a:solidFill>
-                          <a:latin typeface="Microsoft JhengHei"/>
-                        </a:rPr>
-                        <a:t>⑪ 複核者一致性</a:t>
-                      </a:r>
-                    </a:p>
-                  </a:txBody>
-                  <a:tcPr marL="45720" marR="45720" marT="18288" marB="18288" anchor="ctr">
-                    <a:solidFill>
-                      <a:srgbClr val="FFFFFF"/>
-                    </a:solidFill>
-                  </a:tcPr>
-                </a:tc>
-                <a:tc>
-                  <a:txBody>
-                    <a:bodyPr/>
-                    <a:lstStyle/>
-                    <a:p>
-                      <a:pPr algn="ctr"/>
-                      <a:r>
-                        <a:rPr sz="1200" b="0">
-                          <a:solidFill>
-                            <a:srgbClr val="6B7885"/>
-                          </a:solidFill>
-                          <a:latin typeface="Microsoft JhengHei"/>
-                        </a:rPr>
-                        <a:t>現況未量測</a:t>
-                      </a:r>
-                    </a:p>
-                  </a:txBody>
-                  <a:tcPr marL="45720" marR="45720" marT="18288" marB="18288" anchor="ctr">
-                    <a:solidFill>
-                      <a:srgbClr val="FFFFFF"/>
-                    </a:solidFill>
-                  </a:tcPr>
-                </a:tc>
-                <a:tc>
-                  <a:txBody>
-                    <a:bodyPr/>
-                    <a:lstStyle/>
-                    <a:p>
-                      <a:pPr algn="ctr"/>
-                      <a:r>
-                        <a:rPr sz="1200" b="0">
-                          <a:solidFill>
-                            <a:srgbClr val="6B7885"/>
-                          </a:solidFill>
-                          <a:latin typeface="Microsoft JhengHei"/>
-                        </a:rPr>
-                        <a:t>W10 前建立基線,目標值於 G2 訂定</a:t>
-                      </a:r>
-                    </a:p>
-                  </a:txBody>
-                  <a:tcPr marL="45720" marR="45720" marT="18288" marB="18288" anchor="ctr">
-                    <a:solidFill>
-                      <a:srgbClr val="FFFFFF"/>
-                    </a:solidFill>
-                  </a:tcPr>
-                </a:tc>
-                <a:tc>
-                  <a:txBody>
-                    <a:bodyPr/>
-                    <a:lstStyle/>
-                    <a:p>
-                      <a:pPr algn="ctr"/>
-                      <a:r>
-                        <a:rPr sz="1200" b="0">
-                          <a:solidFill>
-                            <a:srgbClr val="6B7885"/>
-                          </a:solidFill>
-                          <a:latin typeface="Microsoft JhengHei"/>
-                        </a:rPr>
-                        <a:t>否決 G2 准不准開放對照重訓 · 複核營運主管</a:t>
-                      </a:r>
-                    </a:p>
-                  </a:txBody>
-                  <a:tcPr marL="45720" marR="45720" marT="18288" marB="18288" anchor="ctr">
-                    <a:solidFill>
-                      <a:srgbClr val="FFFFFF"/>
-                    </a:solidFill>
-                  </a:tcPr>
-                </a:tc>
-                <a:tc>
-                  <a:txBody>
-                    <a:bodyPr/>
-                    <a:lstStyle/>
-                    <a:p/>
-                  </a:txBody>
-                  <a:tcPr/>
-                </a:tc>
-              </a:tr>
-              <a:tr h="535752">
+              <a:tr h="826389">
                 <a:tc>
                   <a:txBody>
                     <a:bodyPr/>
@@ -17718,7 +17259,7 @@
                           </a:solidFill>
                           <a:latin typeface="Microsoft JhengHei"/>
                         </a:rPr>
-                        <a:t>定義:被分到「有把握、可直接結案」桶,但描述錯誤且該錯誤足以改變判定結論的比例。基準不存在 —— 自動結案機制尚未建立</a:t>
+                        <a:t>定義:被分到「有把握、可直接結案」桶,但描述錯誤且該錯誤足以改變判定結論的比例。…</a:t>
                       </a:r>
                     </a:p>
                   </a:txBody>
@@ -17741,7 +17282,7 @@
                           </a:solidFill>
                           <a:latin typeface="Microsoft JhengHei"/>
                         </a:rPr>
-                        <a:t>W12 由影子模式軌交出「自動結案桶與人工桶的漏放率差值」的 95% 信賴區間;非劣性邊際 δ 由委員會於 G1(W6)事前預註冊 —— 資料 W12 才交,判準必須寫在跑實驗之前</a:t>
+                        <a:t>W12 由影子模式軌交出「自動結案桶與人工桶的漏放率差值」的 95% 信賴區間;非劣性邊…</a:t>
                       </a:r>
                     </a:p>
                   </a:txBody>
@@ -17764,7 +17305,7 @@
                           </a:solidFill>
                           <a:latin typeface="Microsoft JhengHei"/>
                         </a:rPr>
-                        <a:t>否決自動結案能不能對外生效 —— 沒有它,分流率就等於把那部分風險藏進「機器有把握」那一桶 · 技術負責人</a:t>
+                        <a:t>否決自動結案能不能對外生效 —— 沒有它,分流率就等於把那部分風險藏進「機器有把握」…</a:t>
                       </a:r>
                     </a:p>
                   </a:txBody>
@@ -17773,14 +17314,6 @@
                       <a:srgbClr val="FBEFEF"/>
                     </a:solidFill>
                   </a:tcPr>
-                </a:tc>
-                <a:tc>
-                  <a:txBody>
-                    <a:bodyPr/>
-                    <a:lstStyle/>
-                    <a:p/>
-                  </a:txBody>
-                  <a:tcPr/>
                 </a:tc>
               </a:tr>
             </a:tbl>

--- a/Artificial Intelligence for Enterprises/Assessment3/_fixed.pptx
+++ b/Artificial Intelligence for Enterprises/Assessment3/_fixed.pptx
@@ -1098,6 +1098,21 @@
           </a:p>
           <a:p>
             <a:r>
+              <a:t>【matrix-cell】感測器故障;人工標註本身就會錯 - 而標註錯誤足以改變模型的評比結論(Northcutt et al., 2021);跨系統重複記錄</a:t>
+            </a:r>
+          </a:p>
+          <a:p>
+            <a:r>
+              <a:t>【matrix-cell】目前不一致:同一段影片,不同複核者會給不同標籤(低頭 vs 閉眼、保溫瓶 vs 手機),而這個不一致從來沒有被量測過</a:t>
+            </a:r>
+          </a:p>
+          <a:p>
+            <a:r>
+              <a:t>【matrix】{'name': '處理', 'cells': ['感測器故障;人工標註本身就會錯 - 而標註錯誤足以改變…', '準確性 · 一致性', 'W3-10 標註品質:誤報的操作型定義 + 判準手冊 + 黃金題'], 'hot': False}</a:t>
+            </a:r>
+          </a:p>
+          <a:p>
+            <a:r>
               <a:t>【這一頁的作用】這一頁把「為什麼第一筆錢要買量測,而不是買模型」變成委員會看得見的東西:左邊誤報有母體、有比例、有根因,右邊漏放只有一份 39 筆、自註為下限、還有四分之一無法歸類 - 兩側證據強度的落差本身就是提案的理由。同時它用真實案例數據(1,647 筆樣本、103/124、39 筆測試、6/12)證明痛點不是修辭,再用 Ensign 的回饋迴路說明「沒有人回看的那一流」為什麼會讓錯誤永久留下,把痛點從『這次判錯了』升級成『這個錯誤系統性地不會被發現』。最後主動把最強的線索降級成假說並綁到 G1,誠實度因此是被證明的而不是被宣稱的。</a:t>
             </a:r>
           </a:p>
@@ -1233,6 +1248,86 @@
           </a:p>
           <a:p>
             <a:r>
+              <a:t>【matrix-cell】線性:量幾倍,人就要幾倍 → 需 17-24 人(現有 5 人)〔提案推算,非核定編制〕</a:t>
+            </a:r>
+          </a:p>
+          <a:p>
+            <a:r>
+              <a:t>【matrix-cell】拒絕 - 加人只是沿著同一條成本曲線移動,不是把曲線整條外推(完整算式與迴路見下方卡片)</a:t>
+            </a:r>
+          </a:p>
+          <a:p>
+            <a:r>
+              <a:t>【matrix-cell】重排班表,把尖峰徵調的 7 位研發工程師從臨時支援變成有編組、有訓練的正式安排(尖峰徵調是現在就在跑的簡易版)</a:t>
+            </a:r>
+          </a:p>
+          <a:p>
+            <a:r>
+              <a:t>【matrix-cell】仍線性,但斜率略低;削得掉尖峰,削不掉每日底量。⚠️ 斜率與削峰幅度目前沒有量測</a:t>
+            </a:r>
+          </a:p>
+          <a:p>
+            <a:r>
+              <a:t>【matrix-cell】隨時可停、可退回原班表 - 五條路裡反悔成本最低的一條</a:t>
+            </a:r>
+          </a:p>
+          <a:p>
+            <a:r>
+              <a:t>【matrix-cell】待 G1 判定,本案不預先否決它 - 它是最便宜的解。營運端三個限制〔第一手經驗,不是量測〕:新人約三個月才判得準 · 影像有隱私限制不能外包 · 過去擴大人力判準反而更亂;另一項:排班只動得了排隊那 0-1 天</a:t>
+            </a:r>
+          </a:p>
+          <a:p>
+            <a:r>
+              <a:t>【matrix-cell】定位 + 地圖速限硬規則比對,把畫面外的脈絡接到事件上</a:t>
+            </a:r>
+          </a:p>
+          <a:p>
+            <a:r>
+              <a:t>【matrix-cell】先做 - 某小型車隊單月樣本中 103 / 124 = 83% 的誤報同一根因,而速限資料自有;高風險決策場景應優先使用可逐條檢查的可解釋方法,而不是對黑箱做事後解釋(Rudin, 2019)。它同時是選項 2 的對照基線</a:t>
+            </a:r>
+          </a:p>
+          <a:p>
+            <a:r>
+              <a:t>【matrix-cell】讓機器讀懂一次事件的完整脈絡(影片 + 客戶問題 + 規則),產出可交付的描述與證據包</a:t>
+            </a:r>
+          </a:p>
+          <a:p>
+            <a:r>
+              <a:t>【matrix-cell】前期一次性投入,之後次線性 - 事件量繼續長,人時不跟著等比長。這是五條裡唯一不是線性的形狀</a:t>
+            </a:r>
+          </a:p>
+          <a:p>
+            <a:r>
+              <a:t>【matrix-cell】三道門都可停:G1(W6)· G2(W12)· G3(W24);且六個月內對外自動結案 0%</a:t>
+            </a:r>
+          </a:p>
+          <a:p>
+            <a:r>
+              <a:t>【matrix-cell】採用 - 前三包不是流程改善,是評估它的必要前置:量測底座 = 評估基準(沒有它不知道模型判得對不對)· 判準統一 = 驗證資料(判準不一致的標註餵給模型就是垃圾進垃圾出)· 規則式 = 對照基線(要證明模型有增量,得先有一個不用它的基準)</a:t>
+            </a:r>
+          </a:p>
+          <a:p>
+            <a:r>
+              <a:t>【matrix-cell】前置條件,不是競爭關係 - 雲端判定真假,誰判定雲端?本案提供它需要的可稽核量測與乾淨標註</a:t>
+            </a:r>
+          </a:p>
+          <a:p>
+            <a:r>
+              <a:t>【matrix】{'name': '選項 0b\n調班 + 尖峰人力池', 'cells': ['重排班表,把尖峰徵調的 7 位研發工程師從臨時…', '仍線性,但斜率略低;削得掉尖峰,削不掉每日底量…', '隨時可停、可退回原班表 - 五條路裡反悔成本最…', '待 G1 判定,本案不預先否決它 - 它是最便宜的…'], 'hot': False}</a:t>
+            </a:r>
+          </a:p>
+          <a:p>
+            <a:r>
+              <a:t>【matrix】{'name': '選項 1\n規則式脈絡融合(不用機器學習)', 'cells': ['定位 + 地圖速限硬規則比對,把畫面外的脈絡接…', '一次性建置,之後整段下移一階、後續仍線性', '可逐條檢查、可回退到規則本身', '先做 - 某小型車隊單月樣本中 103 / 124 = 83…'], 'hot': False}</a:t>
+            </a:r>
+          </a:p>
+          <a:p>
+            <a:r>
+              <a:t>【matrix】{'name': '選項 3\n公司既有的雲端判讀規劃', 'cells': ['仍在研擬中的雲端判讀', '尚未開始,曲線未定', '不在本案範圍,由技術長辦公室決定', '前置條件,不是競爭關係 - 雲端判定真假,誰判定…'], 'hot': False}</a:t>
+            </a:r>
+          </a:p>
+          <a:p>
+            <a:r>
               <a:t>【badge】提案推算,非核定編制</a:t>
             </a:r>
           </a:p>
@@ -1558,17 +1653,12 @@
           <a:lstStyle/>
           <a:p>
             <a:r>
-              <a:t>【matrix】{'name': '對照框架:澳洲 AI 倫理八原則 2019 年版\n(Department of Industry, Science and Resources, 2019)', 'cells': ['本頁只用 2019 年版\n理由:逐條可公開查證', '2025 已有後續採用指引\n移交前重跑一次對照'], 'hot': False}</a:t>
-            </a:r>
-          </a:p>
-          <a:p>
-            <a:r>
               <a:t>【matrix】{'name': '4 隱私保護與安全\n擴大影像調閱與判定紀錄保存;唯一不因自動結案而惡化的一條', 'cells': ['部分', '部分'], 'hot': False}</a:t>
             </a:r>
           </a:p>
           <a:p>
             <a:r>
-              <a:t>【matrix】{'name': '8 問責性\nRACI 與三道決策門管的是專案;那 850 筆裡某一筆判錯,沒有人簽過名', 'cells': ['部分', '未達成'], 'hot': True}</a:t>
+              <a:t>【matrix】{'name': '6 透明性與解釋性\n對客戶揭露到哪一層尚未決定;移交後客戶不會知道那是機器判的', 'cells': ['部分', '未達成'], 'hot': False}</a:t>
             </a:r>
           </a:p>
           <a:p>
@@ -1693,6 +1783,111 @@
           </a:p>
           <a:p>
             <a:r>
+              <a:t>【matrix-cell】2 天內;單純案件當天〔提案目標 · 客戶期望,非已簽訂之服務水準協議〕。改善來源有兩項:證據包自動化、誤報量下降;各自佔多少由 W16 量測後給出</a:t>
+            </a:r>
+          </a:p>
+          <a:p>
+            <a:r>
+              <a:t>【matrix-cell】本案期內維持 100%(影子模式,機器不對外結案)。移交後開到天花板時會降到約 15% —— 那是本案造成的,不是本案要解的;移交後目標值須與自動結案的放行門一起訂</a:t>
+            </a:r>
+          </a:p>
+          <a:p>
+            <a:r>
+              <a:t>【matrix-cell】支撐全客戶 13,000+ 筆/天〔提案目標;所需人力由 G2 後依實測單位工時重估〕。驅動因子不在我方控制內 —— 由客戶的開通時點決定</a:t>
+            </a:r>
+          </a:p>
+          <a:p>
+            <a:r>
+              <a:t>【matrix-cell】做本案、移交後開到天花板需 11–12 人(仍須增聘 6–7 人)→ 可避免 5–13 人 ≈ 每年 NT$520–1,521 萬〔以初階工程師公開薪資量級推算,非核定預算〕</a:t>
+            </a:r>
+          </a:p>
+          <a:p>
+            <a:r>
+              <a:t>【matrix-cell】批次複核約 20 秒/筆(全量;營運端實務估計,尚未以計時量測驗證)· 深入判讀約 5.25 分鐘/筆(5 人 × 3.6 個分析日 = 144 人時 ÷ 1,647 筆反推,單一批次的實際節奏,不是長期平均)</a:t>
+            </a:r>
+          </a:p>
+          <a:p>
+            <a:r>
+              <a:t>【matrix-cell】兩者的正式量測都提前到 W6,與時間拆解同批交出;目標值於 G1 訂定 —— 全客戶人力推算與可避免成本都掛在這兩個單價上</a:t>
+            </a:r>
+          </a:p>
+          <a:p>
+            <a:r>
+              <a:t>【matrix-cell】某小型車隊單月樣本 104 / 1,029 ≈ 10.1%(該樣本全部誤報 124 筆 = ADAS 104 + 駕駛監控約 20;本列只算 ADAS 側)</a:t>
+            </a:r>
+          </a:p>
+          <a:p>
+            <a:r>
+              <a:t>【matrix-cell】降至 7% 以下〔提案目標;以該樣本為基準,G1 後依重新校準的量測重訂〕。只在人機系統軌量,第 12 週判 —— 🚫 不掛在模型本身</a:t>
+            </a:r>
+          </a:p>
+          <a:p>
+            <a:r>
+              <a:t>【matrix】{'name': '業務② 獲得人工驗證判定的客戶涵蓋率', 'cells': ['現況為配給制,依購買量與問題嚴重性排序;涵蓋率無紀錄,W6 建立', '本案期內維持 100%(影子模式,機器不對外結案)。移交後開到天花板時會降到約 15% —— 那是本案造成的…']}</a:t>
+            </a:r>
+          </a:p>
+          <a:p>
+            <a:r>
+              <a:t>【matrix】{'name': '業務③ 可服務的每日事件量上限', 'cells': ['現況撐一個大型車隊約 3,000 筆/天', '支撐全客戶 13,000+ 筆/天〔提案目標;所需人力由 G2 後依實測單位工時重估〕。驅動因子不在我方控…']}</a:t>
+            </a:r>
+          </a:p>
+          <a:p>
+            <a:r>
+              <a:t>【matrix】{'name': '營運⑤⑥ 兩條工作流的每筆人工工時', 'cells': ['批次複核約 20 秒/筆(全量;營運端實務估計,尚未以計時量測驗證)· 深入判讀約 5.25 分鐘/筆(5 人 ×…', '兩者的正式量測都提前到 W6,與時間拆解同批交出;目標值於 G1 訂定 —— 全客戶人力推算與可避免成本…']}</a:t>
+            </a:r>
+          </a:p>
+          <a:p>
+            <a:r>
+              <a:t>【matrix】{'name': '營運⑦ ADAS · 行車輔助誤報率', 'cells': ['某小型車隊單月樣本 104 / 1,029 ≈ 10.1%(該樣本全部誤報 124 筆 = ADAS 104 + 駕駛監控約 20…', '降至 7% 以下〔提案目標;以該樣本為基準,G1 後依重新校準的量測重訂〕。只在人機系統軌量,第 12 週…']}</a:t>
+            </a:r>
+          </a:p>
+          <a:p>
+            <a:r>
+              <a:t>【matrix】{'name': '營運⑧ 客戶回頭標記率(越低越好)', 'cells': ['現況 5–10%;同時是「駕駛端無效警示率」的可觀測代理', '降至 5% 以下〔提案目標〕']}</a:t>
+            </a:r>
+          </a:p>
+          <a:p>
+            <a:r>
+              <a:t>【matrix】{'name': '營運⑨ 尖峰徵調研發人時', 'cells': ['尖峰徵調 7 位研發工程師(離開本職 · 非常態編制 · 非專職)', '期內建立峰值徵調人時的量測基準,目標值於 G2 訂定;歸零列為移交後目標']}</a:t>
+            </a:r>
+          </a:p>
+          <a:p>
+            <a:r>
+              <a:t>【matrix-cell】定義:被分到「有把握、可直接結案」桶,但描述錯誤且該錯誤足以改變判定結論的比例。基準不存在 —— 自動結案機制尚未建立</a:t>
+            </a:r>
+          </a:p>
+          <a:p>
+            <a:r>
+              <a:t>【matrix-cell】W12 由影子模式軌交出「自動結案桶與人工桶的漏放率差值」的 95% 信賴區間;非劣性邊際 δ 由委員會於 G1(W6)事前預註冊 —— 資料 W12 才交,判準必須寫在跑實驗之前</a:t>
+            </a:r>
+          </a:p>
+          <a:p>
+            <a:r>
+              <a:t>【matrix-cell】否決自動結案能不能對外生效 —— 沒有它,分流率就等於把那部分風險藏進「機器有把握」那一桶 · 技術負責人</a:t>
+            </a:r>
+          </a:p>
+          <a:p>
+            <a:r>
+              <a:t>【matrix】{'name': '⑪ 複核者一致性', 'cells': ['現況未量測', 'W10 前建立基線,目標值於 G2 訂定', '否決 G2 准不准開放對照重訓 · 複核營運主管']}</a:t>
+            </a:r>
+          </a:p>
+          <a:p>
+            <a:r>
+              <a:t>【matrix】{'name': '⑫ 訓練資料可追溯率', 'cells': ['0%', '100%,無中間值', '未達 100% 不移交(否決型,無中間值)']}</a:t>
+            </a:r>
+          </a:p>
+          <a:p>
+            <a:r>
+              <a:t>【matrix-cell】不存在。唯一量測是一份 39 筆人工觸發測試,獨立樣本,公司自註為下限</a:t>
+            </a:r>
+          </a:p>
+          <a:p>
+            <a:r>
+              <a:t>【matrix-cell】W6 交出帶 95% 信賴區間的點估計;上限值於 G1 由委員會核定</a:t>
+            </a:r>
+          </a:p>
+          <a:p>
+            <a:r>
               <a:t>【matrix-cell】定義:被分到「有把握、可直接結案」桶,但描述錯誤且該錯誤足以改變判定結論的比例。基準不存在 —— 自動結案機制尚未建立</a:t>
             </a:r>
           </a:p>
@@ -1944,6 +2139,26 @@
           <a:p>
             <a:r>
               <a:t>【matrix】{'name': '③ 人機協作', 'cells': ['機器輔助、人判定', '人工觸碰時間 · P90 回覆時間 · 判定品質。這是六個月內真正會上線的形態,誤報率也只能在這一軌量']}</a:t>
+            </a:r>
+          </a:p>
+          <a:p>
+            <a:r>
+              <a:t>【matrix-cell】人工觸碰時間 · P90 回覆時間 · 判定品質。這是六個月內真正會上線的形態,誤報率也只能在這一軌量</a:t>
+            </a:r>
+          </a:p>
+          <a:p>
+            <a:r>
+              <a:t>【matrix-cell】🔴 自動結案桶與人工桶的漏放率差值(95% 信賴區間),對照 G1 事前預註冊的非劣性邊際 δ;另計冤枉率(該翻案而未翻案)。前三臂全部含人,而要部署的是無人系統 —— 只有這一臂算得出自動結案的漏放率。🚫 判準是比差值、比事前邊際,不是兩條信賴區間的端點互比</a:t>
+            </a:r>
+          </a:p>
+          <a:p>
+            <a:r>
+              <a:t>【matrix】{'name': '② 規則式脈絡基線', 'cells': ['規則式脈絡層 + 人全數複核', '不含模型能解掉多少誤報。它是地端 VLM 的對照基線 —— 如果它就夠,本案的模型端該縮']}</a:t>
+            </a:r>
+          </a:p>
+          <a:p>
+            <a:r>
+              <a:t>【matrix】{'name': '③ 人機協作', 'cells': ['機器輔助、人判定', '人工觸碰時間 · P90 回覆時間 · 判定品質。這是六個月內真正會上線的形態,誤報率也只…']}</a:t>
             </a:r>
           </a:p>
           <a:p>
@@ -6452,7 +6667,7 @@
         </p:nvGraphicFramePr>
         <p:xfrm>
           <a:off x="658368" y="4975352"/>
-          <a:ext cx="9658806" cy="1724787"/>
+          <a:ext cx="9658806" cy="1467612"/>
         </p:xfrm>
         <a:graphic>
           <a:graphicData uri="http://schemas.openxmlformats.org/drawingml/2006/table">
@@ -6607,7 +6822,7 @@
                   </a:tcPr>
                 </a:tc>
               </a:tr>
-              <a:tr h="826389">
+              <a:tr h="569214">
                 <a:tc>
                   <a:txBody>
                     <a:bodyPr/>
@@ -6667,7 +6882,7 @@
                           </a:solidFill>
                           <a:latin typeface="Microsoft JhengHei"/>
                         </a:rPr>
-                        <a:t>🔴 自動結案桶與人工桶的漏放率差值(95% 信賴區間),對照 G1 事前預註冊的非劣性邊際 δ;另計冤枉率(該翻案而未翻案)。前三臂全部含人…</a:t>
+                        <a:t>🔴 自動結案桶與人工桶的漏放率差值(95% 信賴區間),對照 G1 事前預註冊的非劣性邊際 δ…</a:t>
                       </a:r>
                     </a:p>
                   </a:txBody>
@@ -13158,7 +13373,7 @@
         </p:nvGraphicFramePr>
         <p:xfrm>
           <a:off x="658368" y="4910195"/>
-          <a:ext cx="9658805" cy="1724787"/>
+          <a:ext cx="9658805" cy="1467612"/>
         </p:xfrm>
         <a:graphic>
           <a:graphicData uri="http://schemas.openxmlformats.org/drawingml/2006/table">
@@ -13360,7 +13575,7 @@
                   </a:tcPr>
                 </a:tc>
               </a:tr>
-              <a:tr h="826389">
+              <a:tr h="569214">
                 <a:tc>
                   <a:txBody>
                     <a:bodyPr/>
@@ -13397,7 +13612,7 @@
                           </a:solidFill>
                           <a:latin typeface="Microsoft JhengHei"/>
                         </a:rPr>
-                        <a:t>目前不一致:同一段影片,不同複核者會給不同標籤(低頭 vs 閉眼、保溫瓶 vs 手機),而…</a:t>
+                        <a:t>目前不一致:同一段影片,不同複核者會給不同標籤(低頭 v…</a:t>
                       </a:r>
                     </a:p>
                   </a:txBody>
@@ -13647,7 +13862,7 @@
         </p:nvGraphicFramePr>
         <p:xfrm>
           <a:off x="658368" y="1755648"/>
-          <a:ext cx="10874955" cy="1981962"/>
+          <a:ext cx="10874955" cy="1467612"/>
         </p:xfrm>
         <a:graphic>
           <a:graphicData uri="http://schemas.openxmlformats.org/drawingml/2006/table">
@@ -13779,7 +13994,7 @@
                   </a:tcPr>
                 </a:tc>
               </a:tr>
-              <a:tr h="826389">
+              <a:tr h="569214">
                 <a:tc>
                   <a:txBody>
                     <a:bodyPr/>
@@ -13840,7 +14055,7 @@
                           </a:solidFill>
                           <a:latin typeface="Microsoft JhengHei"/>
                         </a:rPr>
-                        <a:t>線性:量幾倍,人就要幾倍 → 需 17-24 人(現有 5 人)〔提案推算,非核定…</a:t>
+                        <a:t>線性:量幾倍,人就要幾倍 → 需 17-24 人(現有 …</a:t>
                       </a:r>
                     </a:p>
                   </a:txBody>
@@ -13886,7 +14101,7 @@
                           </a:solidFill>
                           <a:latin typeface="Microsoft JhengHei"/>
                         </a:rPr>
-                        <a:t>拒絕 - 加人只是沿著同一條成本曲線移動,不是把曲線整條外推(完整算式…</a:t>
+                        <a:t>拒絕 - 加人只是沿著同一條成本曲線移動,不是…</a:t>
                       </a:r>
                     </a:p>
                   </a:txBody>
@@ -13897,7 +14112,7 @@
                   </a:tcPr>
                 </a:tc>
               </a:tr>
-              <a:tr h="826389">
+              <a:tr h="569214">
                 <a:tc>
                   <a:txBody>
                     <a:bodyPr/>
@@ -13935,7 +14150,7 @@
                           </a:solidFill>
                           <a:latin typeface="Microsoft JhengHei"/>
                         </a:rPr>
-                        <a:t>讓機器讀懂一次事件的完整脈絡(影片 + 客戶問題 + 規則),產出可交付的…</a:t>
+                        <a:t>讓機器讀懂一次事件的完整脈絡(影片 + 客戶問…</a:t>
                       </a:r>
                     </a:p>
                   </a:txBody>
@@ -13958,7 +14173,7 @@
                           </a:solidFill>
                           <a:latin typeface="Microsoft JhengHei"/>
                         </a:rPr>
-                        <a:t>前期一次性投入,之後次線性 - 事件量繼續長,人時不跟著等比長。這是五…</a:t>
+                        <a:t>前期一次性投入,之後次線性 - 事件量繼續長,人…</a:t>
                       </a:r>
                     </a:p>
                   </a:txBody>
@@ -13981,7 +14196,7 @@
                           </a:solidFill>
                           <a:latin typeface="Microsoft JhengHei"/>
                         </a:rPr>
-                        <a:t>三道門都可停:G1(W6)· G2(W12)· G3(W24);且六個月內對外自動結案 0%</a:t>
+                        <a:t>三道門都可停:G1(W6)· G2(W12)· G3(W24);且…</a:t>
                       </a:r>
                     </a:p>
                   </a:txBody>
@@ -14004,7 +14219,7 @@
                           </a:solidFill>
                           <a:latin typeface="Microsoft JhengHei"/>
                         </a:rPr>
-                        <a:t>採用 - 前三包不是流程改善,是評估它的必要前置:量測底座 = 評估基準(…</a:t>
+                        <a:t>採用 - 前三包不是流程改善,是評估它的必要前…</a:t>
                       </a:r>
                     </a:p>
                   </a:txBody>
@@ -15841,7 +16056,7 @@
                 </a:solidFill>
                 <a:latin typeface="Microsoft JhengHei"/>
               </a:rPr>
-              <a:t>那是這個方案的代價 —— 專案期 綠 0 琥珀 7 紅 1,移交後 綠 0 琥珀 1 紅 7</a:t>
+              <a:t>澳洲 AI 倫理八原則(2019)· 專案期 綠 0 琥珀 7 紅 1;移交後 綠 0 琥珀 1 紅 7</a:t>
             </a:r>
           </a:p>
         </p:txBody>
@@ -15992,9 +16207,9 @@
                     <a:p>
                       <a:pPr algn="l"/>
                       <a:r>
-                        <a:rPr sz="1200" b="1">
+                        <a:rPr sz="1200" b="0">
                           <a:solidFill>
-                            <a:srgbClr val="C00000"/>
+                            <a:srgbClr val="16212E"/>
                           </a:solidFill>
                           <a:latin typeface="Microsoft JhengHei"/>
                         </a:rPr>
@@ -16005,7 +16220,7 @@
                   </a:txBody>
                   <a:tcPr marL="45720" marR="45720" marT="18288" marB="18288" anchor="ctr">
                     <a:solidFill>
-                      <a:srgbClr val="FBEFEF"/>
+                      <a:srgbClr val="FFFFFF"/>
                     </a:solidFill>
                   </a:tcPr>
                 </a:tc>
@@ -16018,7 +16233,7 @@
                       <a:r>
                         <a:rPr sz="1200" b="0">
                           <a:solidFill>
-                            <a:srgbClr val="C00000"/>
+                            <a:srgbClr val="6B7885"/>
                           </a:solidFill>
                           <a:latin typeface="Microsoft JhengHei"/>
                         </a:rPr>
@@ -16028,7 +16243,7 @@
                   </a:txBody>
                   <a:tcPr marL="45720" marR="45720" marT="18288" marB="18288" anchor="ctr">
                     <a:solidFill>
-                      <a:srgbClr val="FBEFEF"/>
+                      <a:srgbClr val="FFFFFF"/>
                     </a:solidFill>
                   </a:tcPr>
                 </a:tc>
@@ -16041,7 +16256,7 @@
                       <a:r>
                         <a:rPr sz="1200" b="0">
                           <a:solidFill>
-                            <a:srgbClr val="C00000"/>
+                            <a:srgbClr val="6B7885"/>
                           </a:solidFill>
                           <a:latin typeface="Microsoft JhengHei"/>
                         </a:rPr>
@@ -16051,7 +16266,7 @@
                   </a:txBody>
                   <a:tcPr marL="45720" marR="45720" marT="18288" marB="18288" anchor="ctr">
                     <a:solidFill>
-                      <a:srgbClr val="FBEFEF"/>
+                      <a:srgbClr val="FFFFFF"/>
                     </a:solidFill>
                   </a:tcPr>
                 </a:tc>
@@ -16064,9 +16279,9 @@
                     <a:p>
                       <a:pPr algn="l"/>
                       <a:r>
-                        <a:rPr sz="1200" b="1">
+                        <a:rPr sz="1200" b="0">
                           <a:solidFill>
-                            <a:srgbClr val="C00000"/>
+                            <a:srgbClr val="16212E"/>
                           </a:solidFill>
                           <a:latin typeface="Microsoft JhengHei"/>
                         </a:rPr>
@@ -16077,7 +16292,7 @@
                   </a:txBody>
                   <a:tcPr marL="45720" marR="45720" marT="18288" marB="18288" anchor="ctr">
                     <a:solidFill>
-                      <a:srgbClr val="FBEFEF"/>
+                      <a:srgbClr val="FFFFFF"/>
                     </a:solidFill>
                   </a:tcPr>
                 </a:tc>
@@ -16090,7 +16305,7 @@
                       <a:r>
                         <a:rPr sz="1200" b="0">
                           <a:solidFill>
-                            <a:srgbClr val="C00000"/>
+                            <a:srgbClr val="6B7885"/>
                           </a:solidFill>
                           <a:latin typeface="Microsoft JhengHei"/>
                         </a:rPr>
@@ -16100,7 +16315,7 @@
                   </a:txBody>
                   <a:tcPr marL="45720" marR="45720" marT="18288" marB="18288" anchor="ctr">
                     <a:solidFill>
-                      <a:srgbClr val="FBEFEF"/>
+                      <a:srgbClr val="FFFFFF"/>
                     </a:solidFill>
                   </a:tcPr>
                 </a:tc>
@@ -16113,7 +16328,7 @@
                       <a:r>
                         <a:rPr sz="1200" b="0">
                           <a:solidFill>
-                            <a:srgbClr val="C00000"/>
+                            <a:srgbClr val="6B7885"/>
                           </a:solidFill>
                           <a:latin typeface="Microsoft JhengHei"/>
                         </a:rPr>
@@ -16123,7 +16338,7 @@
                   </a:txBody>
                   <a:tcPr marL="45720" marR="45720" marT="18288" marB="18288" anchor="ctr">
                     <a:solidFill>
-                      <a:srgbClr val="FBEFEF"/>
+                      <a:srgbClr val="FFFFFF"/>
                     </a:solidFill>
                   </a:tcPr>
                 </a:tc>
@@ -16286,78 +16501,6 @@
                           </a:solidFill>
                           <a:latin typeface="Microsoft JhengHei"/>
                         </a:rPr>
-                        <a:t>6 透明性與解釋性
-對客戶揭露到哪一層尚未決定;移交後客戶不會知道那是機器判的</a:t>
-                      </a:r>
-                    </a:p>
-                  </a:txBody>
-                  <a:tcPr marL="45720" marR="45720" marT="18288" marB="18288" anchor="ctr">
-                    <a:solidFill>
-                      <a:srgbClr val="FBEFEF"/>
-                    </a:solidFill>
-                  </a:tcPr>
-                </a:tc>
-                <a:tc>
-                  <a:txBody>
-                    <a:bodyPr/>
-                    <a:lstStyle/>
-                    <a:p>
-                      <a:pPr algn="ctr"/>
-                      <a:r>
-                        <a:rPr sz="1200" b="0">
-                          <a:solidFill>
-                            <a:srgbClr val="C00000"/>
-                          </a:solidFill>
-                          <a:latin typeface="Microsoft JhengHei"/>
-                        </a:rPr>
-                        <a:t>部分</a:t>
-                      </a:r>
-                    </a:p>
-                  </a:txBody>
-                  <a:tcPr marL="45720" marR="45720" marT="18288" marB="18288" anchor="ctr">
-                    <a:solidFill>
-                      <a:srgbClr val="FBEFEF"/>
-                    </a:solidFill>
-                  </a:tcPr>
-                </a:tc>
-                <a:tc>
-                  <a:txBody>
-                    <a:bodyPr/>
-                    <a:lstStyle/>
-                    <a:p>
-                      <a:pPr algn="ctr"/>
-                      <a:r>
-                        <a:rPr sz="1200" b="0">
-                          <a:solidFill>
-                            <a:srgbClr val="C00000"/>
-                          </a:solidFill>
-                          <a:latin typeface="Microsoft JhengHei"/>
-                        </a:rPr>
-                        <a:t>未達成</a:t>
-                      </a:r>
-                    </a:p>
-                  </a:txBody>
-                  <a:tcPr marL="45720" marR="45720" marT="18288" marB="18288" anchor="ctr">
-                    <a:solidFill>
-                      <a:srgbClr val="FBEFEF"/>
-                    </a:solidFill>
-                  </a:tcPr>
-                </a:tc>
-              </a:tr>
-              <a:tr h="569214">
-                <a:tc>
-                  <a:txBody>
-                    <a:bodyPr/>
-                    <a:lstStyle/>
-                    <a:p>
-                      <a:pPr algn="l"/>
-                      <a:r>
-                        <a:rPr sz="1200" b="1">
-                          <a:solidFill>
-                            <a:srgbClr val="C00000"/>
-                          </a:solidFill>
-                          <a:latin typeface="Microsoft JhengHei"/>
-                        </a:rPr>
                         <a:t>7 可申訴性
 只有車隊安全主管能標記,駕駛本人不能提出質疑</a:t>
                       </a:r>
@@ -16417,6 +16560,78 @@
                   </a:tcPr>
                 </a:tc>
               </a:tr>
+              <a:tr h="569214">
+                <a:tc>
+                  <a:txBody>
+                    <a:bodyPr/>
+                    <a:lstStyle/>
+                    <a:p>
+                      <a:pPr algn="l"/>
+                      <a:r>
+                        <a:rPr sz="1200" b="1">
+                          <a:solidFill>
+                            <a:srgbClr val="C00000"/>
+                          </a:solidFill>
+                          <a:latin typeface="Microsoft JhengHei"/>
+                        </a:rPr>
+                        <a:t>8 問責性
+RACI 與三道決策門管的是專案;那 850 筆裡某一筆判錯,沒有人簽過名</a:t>
+                      </a:r>
+                    </a:p>
+                  </a:txBody>
+                  <a:tcPr marL="45720" marR="45720" marT="18288" marB="18288" anchor="ctr">
+                    <a:solidFill>
+                      <a:srgbClr val="FBEFEF"/>
+                    </a:solidFill>
+                  </a:tcPr>
+                </a:tc>
+                <a:tc>
+                  <a:txBody>
+                    <a:bodyPr/>
+                    <a:lstStyle/>
+                    <a:p>
+                      <a:pPr algn="ctr"/>
+                      <a:r>
+                        <a:rPr sz="1200" b="0">
+                          <a:solidFill>
+                            <a:srgbClr val="C00000"/>
+                          </a:solidFill>
+                          <a:latin typeface="Microsoft JhengHei"/>
+                        </a:rPr>
+                        <a:t>部分</a:t>
+                      </a:r>
+                    </a:p>
+                  </a:txBody>
+                  <a:tcPr marL="45720" marR="45720" marT="18288" marB="18288" anchor="ctr">
+                    <a:solidFill>
+                      <a:srgbClr val="FBEFEF"/>
+                    </a:solidFill>
+                  </a:tcPr>
+                </a:tc>
+                <a:tc>
+                  <a:txBody>
+                    <a:bodyPr/>
+                    <a:lstStyle/>
+                    <a:p>
+                      <a:pPr algn="ctr"/>
+                      <a:r>
+                        <a:rPr sz="1200" b="0">
+                          <a:solidFill>
+                            <a:srgbClr val="C00000"/>
+                          </a:solidFill>
+                          <a:latin typeface="Microsoft JhengHei"/>
+                        </a:rPr>
+                        <a:t>未達成</a:t>
+                      </a:r>
+                    </a:p>
+                  </a:txBody>
+                  <a:tcPr marL="45720" marR="45720" marT="18288" marB="18288" anchor="ctr">
+                    <a:solidFill>
+                      <a:srgbClr val="FBEFEF"/>
+                    </a:solidFill>
+                  </a:tcPr>
+                </a:tc>
+              </a:tr>
             </a:tbl>
           </a:graphicData>
         </a:graphic>
@@ -16780,7 +16995,7 @@
         </p:nvGraphicFramePr>
         <p:xfrm>
           <a:off x="658368" y="2399900"/>
-          <a:ext cx="10874957" cy="1981962"/>
+          <a:ext cx="10874957" cy="1467612"/>
         </p:xfrm>
         <a:graphic>
           <a:graphicData uri="http://schemas.openxmlformats.org/drawingml/2006/table">
@@ -16864,7 +17079,7 @@
                   </a:tcPr>
                 </a:tc>
               </a:tr>
-              <a:tr h="826389">
+              <a:tr h="569214">
                 <a:tc>
                   <a:txBody>
                     <a:bodyPr/>
@@ -16924,7 +17139,7 @@
                           </a:solidFill>
                           <a:latin typeface="Microsoft JhengHei"/>
                         </a:rPr>
-                        <a:t>2 天內;單純案件當天〔提案目標 · 客戶期望,非已簽訂之服務水準協議〕。改善來源有兩項:證據包自動化、誤報量下降;各自佔多少由 W16 量測後給出</a:t>
+                        <a:t>2 天內;單純案件當天〔提案目標 · 客戶期望,非已簽訂之服務水準協議〕。改善來源有兩項:證據包自動…</a:t>
                       </a:r>
                     </a:p>
                   </a:txBody>
@@ -16935,7 +17150,7 @@
                   </a:tcPr>
                 </a:tc>
               </a:tr>
-              <a:tr h="826389">
+              <a:tr h="569214">
                 <a:tc>
                   <a:txBody>
                     <a:bodyPr/>
@@ -16995,7 +17210,7 @@
                           </a:solidFill>
                           <a:latin typeface="Microsoft JhengHei"/>
                         </a:rPr>
-                        <a:t>做本案、移交後開到天花板需 11–12 人(仍須增聘 6–7 人)→ 可避免 5–13 人 ≈ 每年 NT$520–1,521 萬〔以初階工程師公開薪資量級推算,非核定預算〕</a:t>
+                        <a:t>做本案、移交後開到天花板需 11–12 人(仍須增聘 6–7 人)→ 可避免 5–13 人 ≈ 每年 NT$520–1,521 …</a:t>
                       </a:r>
                     </a:p>
                   </a:txBody>
@@ -17020,7 +17235,7 @@
         </p:nvGraphicFramePr>
         <p:xfrm>
           <a:off x="658368" y="4537510"/>
-          <a:ext cx="9658805" cy="1981962"/>
+          <a:ext cx="9658805" cy="1467612"/>
         </p:xfrm>
         <a:graphic>
           <a:graphicData uri="http://schemas.openxmlformats.org/drawingml/2006/table">
@@ -17128,7 +17343,7 @@
                   </a:tcPr>
                 </a:tc>
               </a:tr>
-              <a:tr h="826389">
+              <a:tr h="569214">
                 <a:tc>
                   <a:txBody>
                     <a:bodyPr/>
@@ -17165,7 +17380,7 @@
                           </a:solidFill>
                           <a:latin typeface="Microsoft JhengHei"/>
                         </a:rPr>
-                        <a:t>不存在。唯一量測是一份 39 筆人工觸發測試,獨立樣本,公司自註為下限</a:t>
+                        <a:t>不存在。唯一量測是一份 39 筆人工觸發測試,獨立樣本…</a:t>
                       </a:r>
                     </a:p>
                   </a:txBody>
@@ -17188,7 +17403,7 @@
                           </a:solidFill>
                           <a:latin typeface="Microsoft JhengHei"/>
                         </a:rPr>
-                        <a:t>W6 交出帶 95% 信賴區間的點估計;上限值於 G1 由委員會核定</a:t>
+                        <a:t>W6 交出帶 95% 信賴區間的點估計;上限值於 G1 由委員…</a:t>
                       </a:r>
                     </a:p>
                   </a:txBody>
@@ -17222,7 +17437,7 @@
                   </a:tcPr>
                 </a:tc>
               </a:tr>
-              <a:tr h="826389">
+              <a:tr h="569214">
                 <a:tc>
                   <a:txBody>
                     <a:bodyPr/>
@@ -17259,7 +17474,7 @@
                           </a:solidFill>
                           <a:latin typeface="Microsoft JhengHei"/>
                         </a:rPr>
-                        <a:t>定義:被分到「有把握、可直接結案」桶,但描述錯誤且該錯誤足以改變判定結論的比例。…</a:t>
+                        <a:t>定義:被分到「有把握、可直接結案」桶,但描述錯誤且該…</a:t>
                       </a:r>
                     </a:p>
                   </a:txBody>
@@ -17282,7 +17497,7 @@
                           </a:solidFill>
                           <a:latin typeface="Microsoft JhengHei"/>
                         </a:rPr>
-                        <a:t>W12 由影子模式軌交出「自動結案桶與人工桶的漏放率差值」的 95% 信賴區間;非劣性邊…</a:t>
+                        <a:t>W12 由影子模式軌交出「自動結案桶與人工桶的漏放率差…</a:t>
                       </a:r>
                     </a:p>
                   </a:txBody>
@@ -17305,7 +17520,7 @@
                           </a:solidFill>
                           <a:latin typeface="Microsoft JhengHei"/>
                         </a:rPr>
-                        <a:t>否決自動結案能不能對外生效 —— 沒有它,分流率就等於把那部分風險藏進「機器有把握」…</a:t>
+                        <a:t>否決自動結案能不能對外生效 —— 沒有它,分流率就等於把…</a:t>
                       </a:r>
                     </a:p>
                   </a:txBody>

--- a/Artificial Intelligence for Enterprises/Assessment3/_fixed.pptx
+++ b/Artificial Intelligence for Enterprises/Assessment3/_fixed.pptx
@@ -6,7 +6,7 @@
   </p:sldMasterIdLst>
   <p:sldIdLst>
     <p:sldId id="256" r:id="rId7"/>
-    <p:sldId id="257" r:id="rId8"/>
+    <p:sldId id="257" r:id="rId9"/>
     <p:sldId id="258" r:id="rId10"/>
     <p:sldId id="259" r:id="rId11"/>
     <p:sldId id="260" r:id="rId12"/>
@@ -513,87 +513,17 @@
           <a:lstStyle/>
           <a:p>
             <a:r>
-              <a:t>【card:車上裝置 · 即時初判】鏡頭在車上即時初判,偵測到一次可能的危險就記下一筆「事件」</a:t>
-            </a:r>
-          </a:p>
-          <a:p>
-            <a:r>
-              <a:t>【card:車上裝置 · 即時初判】一個「事件」= 一段影片 + 時間地點 + 系統給的分類</a:t>
-            </a:r>
-          </a:p>
-          <a:p>
-            <a:r>
-              <a:t>【card:車上裝置 · 即時初判】一個「事件」= 一段影片 + 時間地點 + 系…</a:t>
-            </a:r>
-          </a:p>
-          <a:p>
-            <a:r>
-              <a:t>【card:車上裝置 · 即時初判】單一大型車隊約 3,000 筆/天</a:t>
-            </a:r>
-          </a:p>
-          <a:p>
-            <a:r>
-              <a:t>【card:雲端 · 複判】判定屬實 → 回傳裝置向駕駛警示</a:t>
-            </a:r>
-          </a:p>
-          <a:p>
-            <a:r>
-              <a:t>【card:雲端 · 複判】自動化到這裡就停了</a:t>
-            </a:r>
-          </a:p>
-          <a:p>
-            <a:r>
-              <a:t>【card:人工防線 · 5 位專職分析人員 · 逐筆】這 5 個人做的事:重看影片 → 判成立或誤報 → 離開畫面查證據 → 書面回覆客戶</a:t>
-            </a:r>
-          </a:p>
-          <a:p>
-            <a:r>
-              <a:t>【card:人工防線 · 5 位專職分析人員 · 逐筆】一次「爭議」= 客戶回頭說「這筆判錯了」;約 5–10% 的事件會被客戶回頭標記 —— 那筆是客戶先看到,我們後知道</a:t>
-            </a:r>
-          </a:p>
-          <a:p>
-            <a:r>
-              <a:t>【card:人工防線 · 5 位專職分析人員 · 逐筆】一次「爭議」= 客戶回頭說「這筆判錯了」…</a:t>
-            </a:r>
-          </a:p>
-          <a:p>
-            <a:r>
-              <a:t>【card:人工防線 · 5 位專職分析人員 · 逐筆】尖峰時另徵調 7 位研發工程師離開本職</a:t>
-            </a:r>
-          </a:p>
-          <a:p>
-            <a:r>
-              <a:t>【compare:例行批次複核 · 全量,每一筆都看】營運端的實務估計,尚未以計時量測驗證</a:t>
-            </a:r>
-          </a:p>
-          <a:p>
-            <a:r>
-              <a:t>【compare:例行批次複核 · 全量,每一筆都看】當責:複核營運主管 · 第 6 週交出正式基準 · G1 驗收後才據以重估</a:t>
-            </a:r>
-          </a:p>
-          <a:p>
-            <a:r>
-              <a:t>【compare:客戶爭議深入判讀 · 只發生在客戶回頭標記的 5–10%】由一次實際判讀反推:5 人 × 3.6 個工作日 × 8 小時 ÷ 1,647 筆</a:t>
-            </a:r>
-          </a:p>
-          <a:p>
-            <a:r>
-              <a:t>【compare:客戶爭議深入判讀 · 只發生在客戶回頭標記的 5–10%】樣本:某小型車隊 · 單月 · 4 台車 · 23 天;不含整理與回信</a:t>
-            </a:r>
-          </a:p>
-          <a:p>
-            <a:r>
-              <a:t>【rows】{'label': '今天的量', 'value': '29.8–42.9 人時/天', 'note': '單一大型車隊約 3,000 筆/天;提案人依現有單價推算', 'hot': False}</a:t>
-            </a:r>
-          </a:p>
-          <a:p>
-            <a:r>
-              <a:t>【rows-value[本案要建的 AI 能力]】讓機器讀懂一次事件的完整脈絡(影片 + 客戶問題 + 規則),並產出可交付的證據與描述</a:t>
-            </a:r>
-          </a:p>
-          <a:p>
-            <a:r>
-              <a:t>【這一頁的作用】委員會裡不是每個人都懂這條產線,聽不懂就不會核准。這頁先用三張卡把「事件 → 複判 → 爭議」講成外行也懂的一句話,並當場定義什麼是一個事件、什麼是一次爭議、那 5 個人具體在做什麼;再用 16 倍的單價差把痛點釘死在「證據不在畫面裡」,而那正是本案要建的 VLM 能力的靶心。成因與解法印在同一頁,委員會才知道我們要買的不是產能,是把畫面外的脈絡讀進來的能力。合計 29.8–42.9 對上產能 40,也替下一頁的尖峰論證先埋好伏筆。</a:t>
+              <a:t>◆ 口白逐字 —— 鉤子 · 開場靜畫</a:t>
+            </a:r>
+          </a:p>
+          <a:p>
+            <a:r>
+              <a:t>今天,五個人要看完三千支影片;而客戶要的答案,兩天內。</a:t>
+            </a:r>
+          </a:p>
+          <a:p>
+            <a:r>
+              <a:t>──────────────────────────────────</a:t>
             </a:r>
           </a:p>
         </p:txBody>
@@ -663,6 +593,286 @@
           <a:lstStyle/>
           <a:p>
             <a:r>
+              <a:t>◆ 口白逐字 —— P9 · 六個月 · 六個工作包 · 三道決策門</a:t>
+            </a:r>
+          </a:p>
+          <a:p>
+            <a:r>
+              <a:t>六個月,六個工作包,三道門。順序不能換:評估集、標註、特徵,最後才是地端模型。第六週是因果判定門:交出時間拆解、兩天逾時率跟到件分布。證據搜尋跟誤報量佔主要延遲,才續行;不是,就轉排班。第十二週同一組凍結集比四臂:現行模型、規則式基線、人機協作,加一臂影子模式——機器自己結案、不對外送,跟人的判定比對。自動結案的漏放率,只有這一臂算得出來。這道門不能取消實驗,只能調整規模;要不要真的對外自動結案,不在這六個月決定。規則式今天就能做,為什麼排第五週?沒有前六週的基準線,證不出有效。</a:t>
+            </a:r>
+          </a:p>
+          <a:p>
+            <a:r>
+              <a:t>──────────────────────────────────</a:t>
+            </a:r>
+          </a:p>
+          <a:p>
+            <a:r>
+              <a:t>【】一套地端視覺語言模型,篩檢與深挖兩種負載由同一台設備分時處理;實際選型與量化規格於 G1 依 W1–6 的量測定案(概念層次)。W8–12 最小離線試驗 → W12–24 只跑影子模式:機器照樣出結論但不對外送,人照常逐筆判,兩邊比對。總投入 4.50 人月不變,係 WP-E 內部人力前移,不增加總人月</a:t>
+            </a:r>
+          </a:p>
+          <a:p>
+            <a:r>
+              <a:t>【】交:公司第一份可稽核的錯誤率(含 95% 信賴區間)· 冷凍評估集 · 兩條工作流的單位工時正式基準 · 每案「結案方向」的黃金答案標籤 · 爭議處理的時間拆解、兩天逾時率、尖峰到件分布。公開數據:資料工作佔掉分析人員約八成時間 (Press, 2016) —— 前三包份量偏重是產業常態,不是計畫灌水</a:t>
+            </a:r>
+          </a:p>
+          <a:p>
+            <a:r>
+              <a:t>【】交:規則式脈絡層(刻意先做不含模型的版本,它同時是地端 VLM 的對照基線)· 誤報下降量測 (Rudin, 2019)。規則式今天就能做,排第五週是因為沒有前六週的基準線就證不出它有效 —— 這個取捨我提出來,決定權在各位</a:t>
+            </a:r>
+          </a:p>
+          <a:p>
+            <a:r>
+              <a:t>【rows】{'label': 'WP-B 標註品質｜AI 的前置', 'value': 'W3–10', 'note': '交:誤報的操作型定義 · 判準手冊 · 一致性儀表板。判準不一致的標註餵給模型就是垃圾進垃圾出 (Northcutt et al., 2021)'}</a:t>
+            </a:r>
+          </a:p>
+          <a:p>
+            <a:r>
+              <a:t>【rows】{'label': 'WP-C 脈絡特徵工程｜AI 的前置', 'value': 'W5–12', 'note': '交:規則式脈絡層(刻意先做不含模型的版本,它同時是地端 VLM 的對照基線)· 誤報下降量測 (Rudin, 2019)。規則式今天就能做,排第五週是因為沒有前六週的基準線就證不出它有效 —— 這個取捨我提出來,決定權在各位'}</a:t>
+            </a:r>
+          </a:p>
+          <a:p>
+            <a:r>
+              <a:t>【rows】{'label': 'WP-D 爭議回覆自動化｜併行的營運自動化', 'value': 'W8–16', 'note': '交:自動證據包 · 回覆時效改善。🔑 這是六個月裡真正對外交付的商業價值,而且人仍然每一筆都判 —— 它完全不依賴任何自動結案'}</a:t>
+            </a:r>
+          </a:p>
+          <a:p>
+            <a:r>
+              <a:t>【rows】{'label': 'WP-F 治理與移交｜AI 之後', 'value': 'W20–26', 'note': '交:移交文件 · 常態儀表板。六個里程碑 M1–M6 落在 W6 / W10 / W12 / W16 / W24 / W26,那是交東西的時點,不是可喊停的時點'}</a:t>
+            </a:r>
+          </a:p>
+          <a:p>
+            <a:r>
+              <a:t>【rows[0]WP-A 評估底座｜AI 的前置】交:公司第一份可稽核的錯誤率(含 95% 信賴區間)· 冷凍評估集 · 兩條工作流的單位工時正式基準 · 每案「結案方向」的黃金答案標籤 · 爭議處理的時間拆解、兩天逾時率、尖峰到件分布。公開數據:資料工作佔掉分析人員約八成時間 (Press, 2016) —— 前三包份量偏重是產業常態,不是計畫灌水</a:t>
+            </a:r>
+          </a:p>
+          <a:p>
+            <a:r>
+              <a:t>【rows[1]WP-E 地端 VLM 事件判讀｜🔴 本案唯一的 AI 主體】一套地端視覺語言模型,篩檢與深挖兩種負載由同一台設備分時處理;實際選型與量化規格於 G1 依 W1–6 的量測定案(概念層次)。W8–12 最小離線試驗 → W12–24 只跑影子模式:機器照樣出結論但不對外送,人照常逐筆判,兩邊比對。總投入 4.50 人月不變,係 WP-E 內部人力前移,不增加總人月</a:t>
+            </a:r>
+          </a:p>
+          <a:p>
+            <a:r>
+              <a:t>【card:G1 · 第 6 週｜因果判定門】交:時間拆解(等待 / 找證據 / 判讀 / 內部覆核 / 回信)· 兩天逾時率 · 尖峰到件分布 · 抽幀率對交通標誌召回率的比較(它直接決定要買幾台)</a:t>
+            </a:r>
+          </a:p>
+          <a:p>
+            <a:r>
+              <a:t>【card:G1 · 第 6 週｜因果判定門】🔴 停的條件一:只有當「證據搜尋、誤報量與證據包製作」佔主要延遲,才續行後段;否則本案轉為排班與尖峰人力池方案</a:t>
+            </a:r>
+          </a:p>
+          <a:p>
+            <a:r>
+              <a:t>【card:G1 · 第 6 週｜因果判定門】🔴 停的條件二:評估底座未產出 → 剩餘工作全數不續行</a:t>
+            </a:r>
+          </a:p>
+          <a:p>
+            <a:r>
+              <a:t>【card:G1 · 第 6 週｜因果判定門】同時要事前預註冊漏濾率的非劣性邊際 δ —— 判準必須寫在跑實驗之前。初步拆解顯示 AI 可處理段(找證據 + 判讀)佔全程 43%–78%,為營運端的初步估計,W1–6 交可稽核版本</a:t>
+            </a:r>
+          </a:p>
+          <a:p>
+            <a:r>
+              <a:t>【card:G1 · 第 6 週｜因果判定門】🔴 停的條件一:只有當「證據搜尋、誤報量與…</a:t>
+            </a:r>
+          </a:p>
+          <a:p>
+            <a:r>
+              <a:t>【card:G1 · 第 6 週｜因果判定門】🔴 停的條件二:評估底座未產出 → 剩餘工作…</a:t>
+            </a:r>
+          </a:p>
+          <a:p>
+            <a:r>
+              <a:t>【card:G1 · 第 6 週｜因果判定門】同時要事前預註冊漏濾率的非劣性邊際 δ ——…</a:t>
+            </a:r>
+          </a:p>
+          <a:p>
+            <a:r>
+              <a:t>【badge】只能改規模,不能取消實驗</a:t>
+            </a:r>
+          </a:p>
+          <a:p>
+            <a:r>
+              <a:t>【card:G2 · 第 12 週｜四臂比較門】同一凍結評估集上跑四臂(見下表),分兩軌:工具品質軌 · 結案判定軌</a:t>
+            </a:r>
+          </a:p>
+          <a:p>
+            <a:r>
+              <a:t>【card:G2 · 第 12 週｜四臂比較門】🔴 這道門停不掉實驗,只能調整模型的假設與規模。規則式若已解掉大部分誤報 → 靶心改為殘餘;規則式若無效 → 先查脈絡資料本身的品質</a:t>
+            </a:r>
+          </a:p>
+          <a:p>
+            <a:r>
+              <a:t>【card:G2 · 第 12 週｜四臂比較門】放行條件:人機判定品質不劣於現況,且人工觸碰時間與 P90 回覆時間達預註冊門檻</a:t>
+            </a:r>
+          </a:p>
+          <a:p>
+            <a:r>
+              <a:t>【card:G2 · 第 12 週｜四臂比較門】🔴 但「自動結案要不要對外開啟」不由 G2、也不由 G3 決定 —— 那需要移交後一道獨立的門,不在本次請求範圍</a:t>
+            </a:r>
+          </a:p>
+          <a:p>
+            <a:r>
+              <a:t>【card:G2 · 第 12 週｜四臂比較門】🔴 這道門停不掉實驗,只能調整模型的假設與…</a:t>
+            </a:r>
+          </a:p>
+          <a:p>
+            <a:r>
+              <a:t>【card:G2 · 第 12 週｜四臂比較門】放行條件:人機判定品質不劣於現況,且人工…</a:t>
+            </a:r>
+          </a:p>
+          <a:p>
+            <a:r>
+              <a:t>【card:G2 · 第 12 週｜四臂比較門】🔴 但「自動結案要不要對外開啟」不由 G2…</a:t>
+            </a:r>
+          </a:p>
+          <a:p>
+            <a:r>
+              <a:t>【card:G3 · 第 24 週｜部署決定門】🔴 停的條件:對照重訓證不出增量 → 模型端不部署,只留前四包的成果</a:t>
+            </a:r>
+          </a:p>
+          <a:p>
+            <a:r>
+              <a:t>【card:G3 · 第 24 週｜部署決定門】就算證不出增量,公司仍留下第一套可重複的模型評估與標註品質流程 —— 那個東西不隨這道門撤掉</a:t>
+            </a:r>
+          </a:p>
+          <a:p>
+            <a:r>
+              <a:t>【card:G3 · 第 24 週｜部署決定門】對照實驗的設計(hold-out 怎麼凍 · 因子怎麼拆 · 預註冊門檻訂在哪)由技術負責人在 W8 前提出、G2 核可</a:t>
+            </a:r>
+          </a:p>
+          <a:p>
+            <a:r>
+              <a:t>【card:G3 · 第 24 週｜部署決定門】就算證不出增量,公司仍留下第一套可重複的…</a:t>
+            </a:r>
+          </a:p>
+          <a:p>
+            <a:r>
+              <a:t>【card:G3 · 第 24 週｜部署決定門】對照實驗的設計(hold-out 怎麼凍 · 因子…</a:t>
+            </a:r>
+          </a:p>
+          <a:p>
+            <a:r>
+              <a:t>【matrix-cell】🔴 自動結案桶與人工桶的漏放率差值(95% 信賴區間),對照 G1 事前預註冊的非劣性邊際 δ;另計冤枉率(該翻案而未翻案)。前三臂全部含人,而要部署的是無人系統 —— 只有這一臂算得出自動結案的漏放率。🚫 判準是比差值、比事前邊際,不是兩條信賴區間的端點互比</a:t>
+            </a:r>
+          </a:p>
+          <a:p>
+            <a:r>
+              <a:t>【matrix】{'name': '② 規則式脈絡基線', 'cells': ['規則式脈絡層 + 人全數複核', '不含模型能解掉多少誤報。它是地端 VLM 的對照基線 —— 如果它就夠,本案的模型端該縮']}</a:t>
+            </a:r>
+          </a:p>
+          <a:p>
+            <a:r>
+              <a:t>【matrix】{'name': '③ 人機協作', 'cells': ['機器輔助、人判定', '人工觸碰時間 · P90 回覆時間 · 判定品質。這是六個月內真正會上線的形態,誤報率也只能在這一軌量']}</a:t>
+            </a:r>
+          </a:p>
+          <a:p>
+            <a:r>
+              <a:t>【matrix-cell】人工觸碰時間 · P90 回覆時間 · 判定品質。這是六個月內真正會上線的形態,誤報率也只能在這一軌量</a:t>
+            </a:r>
+          </a:p>
+          <a:p>
+            <a:r>
+              <a:t>【matrix-cell】🔴 自動結案桶與人工桶的漏放率差值(95% 信賴區間),對照 G1 事前預註冊的非劣性邊際 δ;另計冤枉率(該翻案而未翻案)。前三臂全部含人,而要部署的是無人系統 —— 只有這一臂算得出自動結案的漏放率。🚫 判準是比差值、比事前邊際,不是兩條信賴區間的端點互比</a:t>
+            </a:r>
+          </a:p>
+          <a:p>
+            <a:r>
+              <a:t>【matrix】{'name': '② 規則式脈絡基線', 'cells': ['規則式脈絡層 + 人全數複核', '不含模型能解掉多少誤報。它是地端 VLM 的對照基線 —— 如果它就夠,本案的模型端該縮']}</a:t>
+            </a:r>
+          </a:p>
+          <a:p>
+            <a:r>
+              <a:t>【matrix】{'name': '③ 人機協作', 'cells': ['機器輔助、人判定', '人工觸碰時間 · P90 回覆時間 · 判定品質。這是六個月內真正會上線的形態,誤報率也只…']}</a:t>
+            </a:r>
+          </a:p>
+          <a:p>
+            <a:r>
+              <a:t>【這一頁的作用】這頁要讓委員會相信兩件事,而不是相信「我有計畫」。第一:六包裡只有一包是 AI,其餘五包不是繞路 —— 沒有凍結評估集就量不出模型判得準不準,判準不一致的標註餵給模型就是垃圾進垃圾出,所以順序本身就是風險控制。第二:每一道門都寫出「什麼條件下這個案子會停」,包括 G1 可以整案轉向排班方案、G3 可以直接不部署模型端。四臂表則正面回答答辯必問的那一題:六個月怎麼可能算得出無人系統的風險 —— 答案是第四臂影子模式,前三臂全部含人,只有它算得出自動結案的漏放率。</a:t>
+            </a:r>
+          </a:p>
+        </p:txBody>
+      </p:sp>
+      <p:sp>
+        <p:nvSpPr>
+          <p:cNvPr id="4" name="Slide Number Placeholder 3"/>
+          <p:cNvSpPr>
+            <a:spLocks noGrp="1"/>
+          </p:cNvSpPr>
+          <p:nvPr>
+            <p:ph type="sldNum" idx="5" sz="quarter"/>
+          </p:nvPr>
+        </p:nvSpPr>
+        <p:spPr/>
+      </p:sp>
+    </p:spTree>
+  </p:cSld>
+  <p:clrMapOvr>
+    <a:masterClrMapping/>
+  </p:clrMapOvr>
+</p:notes>
+</file>
+
+<file path=ppt/notesSlides/notesSlide11.xml><?xml version="1.0" encoding="utf-8"?>
+<p:notes xmlns:a="http://schemas.openxmlformats.org/drawingml/2006/main" xmlns:p="http://schemas.openxmlformats.org/presentationml/2006/main" xmlns:r="http://schemas.openxmlformats.org/officeDocument/2006/relationships">
+  <p:cSld>
+    <p:spTree>
+      <p:nvGrpSpPr>
+        <p:cNvPr id="1" name=""/>
+        <p:cNvGrpSpPr/>
+        <p:nvPr/>
+      </p:nvGrpSpPr>
+      <p:grpSpPr>
+        <a:xfrm>
+          <a:off x="0" y="0"/>
+          <a:ext cx="0" cy="0"/>
+          <a:chOff x="0" y="0"/>
+          <a:chExt cx="0" cy="0"/>
+        </a:xfrm>
+      </p:grpSpPr>
+      <p:sp>
+        <p:nvSpPr>
+          <p:cNvPr id="2" name="Slide Image Placeholder 1"/>
+          <p:cNvSpPr>
+            <a:spLocks noGrp="1"/>
+          </p:cNvSpPr>
+          <p:nvPr>
+            <p:ph type="sldImg" idx="2"/>
+          </p:nvPr>
+        </p:nvSpPr>
+        <p:spPr/>
+      </p:sp>
+      <p:sp>
+        <p:nvSpPr>
+          <p:cNvPr id="3" name="Notes Placeholder 2"/>
+          <p:cNvSpPr>
+            <a:spLocks noGrp="1"/>
+          </p:cNvSpPr>
+          <p:nvPr>
+            <p:ph type="body" idx="3" sz="quarter"/>
+          </p:nvPr>
+        </p:nvSpPr>
+        <p:spPr/>
+        <p:txBody>
+          <a:bodyPr/>
+          <a:lstStyle/>
+          <a:p>
+            <a:r>
+              <a:t>◆ 口白逐字 —— P10 · 資源、當責與請求</a:t>
+            </a:r>
+          </a:p>
+          <a:p>
+            <a:r>
+              <a:t>三個輸入都印在上面,它是量級,不是報價。設備一台十六到二十萬,一次性,不到一個人一年成本的五分之一;這個專案的成本主體是人,不是設備。它也不是為單一用途買的:第二個應用是內部規格文件的技術問答,不在本次請求範圍內,但硬體的攤提對象不只一個。那筆擴編暴露不是承諾的節省;要第十二週實測證明能避免或延後至少一點四到一點七個 loaded FTE-year,業務也確認會轉成少招人或少徵調研發,才放行後續預算。我要的不只預算,是贊助人跟三道門。我請求核准六個月額度輪廓、分段釋出;第一段四點八五人月、量級新台幣四十二到四十七萬,第六週由贊助人決定續不續行。第二十四週我會回到這裡,交出三方比較結果:地端 VLM 有增量,或者沒有。</a:t>
+            </a:r>
+          </a:p>
+          <a:p>
+            <a:r>
+              <a:t>──────────────────────────────────</a:t>
+            </a:r>
+          </a:p>
+          <a:p>
+            <a:r>
               <a:t>【】市場採購量級,非核定採購價;本頁唯一不由算式推得的金額。規格等級與選型於 G1 依 W1–6 量測定案。採購時點在 G1 之後、W8 之前,不在第一段額度內。設備 = 一個初階工程師年成本(NT$104–117 萬)的 14%–19%;硬體僅佔已估成本的 8%–12%。🚫 不得寫成「用 16–20 萬取代千萬元增聘」—— 機器只打得到那一段裡的一部分,證據整理完人還是要覆核</a:t>
             </a:r>
           </a:p>
@@ -784,6 +994,86 @@
           <a:p>
             <a:r>
               <a:t>【這一頁的作用】這頁要在委員會心裡完成三次收斂。第一次:看到「地端 AI」就問「那台機器多少錢」—— 設備價、它相對一個人年成本的 14%–19%、它在已估成本裡的 8%–12%,三秒內收斂成「成本主體是人,不是設備」,避免答辯變成硬體採購的離題辯論。第二次:所有金額都標明是量級不是報價、三個假設輸入都印在畫面上、五項未估價成本逐項列名、TCO 拆成兩個不合併的數字 —— 誠實度不能在唯一的金額上破功。第三次也是最關鍵的一次:稽核稅那一格由提案人自己算出自動化的代價(吃掉毛節省 3%–52%),而放行條件框把「年度擴編暴露」明講成反事實成本、綁上 G2 的可驗證門檻 —— 委員會因此看到的不是一個在推銷 AI 的人,而是一個先幫他們算好帳、並把喊停的權力交回去的人。最後的請求只有兩樣:核准第一段 W1–6,以及指定一個贊助人。</a:t>
+            </a:r>
+          </a:p>
+        </p:txBody>
+      </p:sp>
+      <p:sp>
+        <p:nvSpPr>
+          <p:cNvPr id="4" name="Slide Number Placeholder 3"/>
+          <p:cNvSpPr>
+            <a:spLocks noGrp="1"/>
+          </p:cNvSpPr>
+          <p:nvPr>
+            <p:ph type="sldNum" idx="5" sz="quarter"/>
+          </p:nvPr>
+        </p:nvSpPr>
+        <p:spPr/>
+      </p:sp>
+    </p:spTree>
+  </p:cSld>
+  <p:clrMapOvr>
+    <a:masterClrMapping/>
+  </p:clrMapOvr>
+</p:notes>
+</file>
+
+<file path=ppt/notesSlides/notesSlide12.xml><?xml version="1.0" encoding="utf-8"?>
+<p:notes xmlns:a="http://schemas.openxmlformats.org/drawingml/2006/main" xmlns:p="http://schemas.openxmlformats.org/presentationml/2006/main" xmlns:r="http://schemas.openxmlformats.org/officeDocument/2006/relationships">
+  <p:cSld>
+    <p:spTree>
+      <p:nvGrpSpPr>
+        <p:cNvPr id="1" name=""/>
+        <p:cNvGrpSpPr/>
+        <p:nvPr/>
+      </p:nvGrpSpPr>
+      <p:grpSpPr>
+        <a:xfrm>
+          <a:off x="0" y="0"/>
+          <a:ext cx="0" cy="0"/>
+          <a:chOff x="0" y="0"/>
+          <a:chExt cx="0" cy="0"/>
+        </a:xfrm>
+      </p:grpSpPr>
+      <p:sp>
+        <p:nvSpPr>
+          <p:cNvPr id="2" name="Slide Image Placeholder 1"/>
+          <p:cNvSpPr>
+            <a:spLocks noGrp="1"/>
+          </p:cNvSpPr>
+          <p:nvPr>
+            <p:ph type="sldImg" idx="2"/>
+          </p:nvPr>
+        </p:nvSpPr>
+        <p:spPr/>
+      </p:sp>
+      <p:sp>
+        <p:nvSpPr>
+          <p:cNvPr id="3" name="Notes Placeholder 2"/>
+          <p:cNvSpPr>
+            <a:spLocks noGrp="1"/>
+          </p:cNvSpPr>
+          <p:nvPr>
+            <p:ph type="body" idx="3" sz="quarter"/>
+          </p:nvPr>
+        </p:nvSpPr>
+        <p:spPr/>
+        <p:txBody>
+          <a:bodyPr/>
+          <a:lstStyle/>
+          <a:p>
+            <a:r>
+              <a:t>◆ 口白逐字 —— 參考文獻(第 11 頁 — 不佔十頁額度)</a:t>
+            </a:r>
+          </a:p>
+          <a:p>
+            <a:r>
+              <a:t>這些是本提案引用的公開文獻,完整清單在這一頁。</a:t>
+            </a:r>
+          </a:p>
+          <a:p>
+            <a:r>
+              <a:t>──────────────────────────────────</a:t>
             </a:r>
           </a:p>
         </p:txBody>
@@ -853,27 +1143,102 @@
           <a:lstStyle/>
           <a:p>
             <a:r>
-              <a:t>【callout】這兩段之所以慢,是同一個原因:模型看不到畫面外的東西 —— 撈數據慢,是因為人要自己去查那個位置與那段路的速限;判讀慢,是因為模型只拿到一張圖。</a:t>
-            </a:r>
-          </a:p>
-          <a:p>
-            <a:r>
-              <a:t>【rows】{'label': '尖峰徵調 7 位研發工程師', 'value': '不是管理失當,是算術的必然', 'note': '離開本職支援、非常態編制 —— 開發產能被拿去補分析產能', 'hot': False}</a:t>
-            </a:r>
-          </a:p>
-          <a:p>
-            <a:r>
-              <a:t>【rows】{'label': '量已經不是瓶頸', 'value': '全客戶 13,000 筆/天,地端約 2.2–3.5 小時跑完,設備佔用率約 9%–15%', 'note': '⚠ 估算,非實測;此數只含每日全量批次初篩,不含客戶爭議深挖那條路徑(其吞吐量由 W1–6 量測)。瓶頸是判準與驗證,不是量', 'hot': False}</a:t>
-            </a:r>
-          </a:p>
-          <a:p>
-            <a:r>
-              <a:t>【rows-value[今天的利用率]】74%–107%(29.8–42.9 ÷ 40 人時/天);折算 3.7–5.4 人,現有 5 人</a:t>
-            </a:r>
-          </a:p>
-          <a:p>
-            <a:r>
-              <a:t>【這一頁的作用】這頁回答委員會最會問的兩題:為什麼是現在、為什麼是 AI 而不是加人。五段天數必須印出來,委員會才親眼看到 43%–78% 落在模型碰得到的那兩段;而那條因果句(兩段慢的原因是同一個技術缺陷)把整頁從營運圖表升級成 AI 立案 —— 沒有它,這只證明「有件事很花時間」。同一頁又自己標明證據等級(營運端估計,非量測)並給出反向出口(推翻就轉排班),把核准變成一個低風險決定;右側的利用率上緣破百與徵調 7 位研發,則把時效缺口接回錢與機會成本。</a:t>
+              <a:t>◆ 口白逐字 —— P1 · 用例:兩階段推論,與它下游那道人工防線</a:t>
+            </a:r>
+          </a:p>
+          <a:p>
+            <a:r>
+              <a:t>地端 AI 的技術可行性,公司內部評估過,我是其中一員。今天我不是提一個新點子,是把它從技術研討,變成一個有業務數字、有驗證機制、有停止條件的正式立案。要建的能力:讓機器讀懂一次事件的完整脈絡——影片、客戶問題、規則——產出可交付的證據與描述。兩階段架構各位熟悉,自動化到第二階段就停了:剩下每一筆,都要由人看過。這道防線有兩種單價。看畫面就能判的,一筆二十秒。要離開畫面去找證據的——那面牌是什麼、速限多少——一筆五分多鐘。差約十六倍,差別不在人,在證據在不在畫面裡。我請委員會核准一個六個月、三道決策門的專案:在客戶要的兩天內交出分析,第一次量得到自己漏掉什麼。要建它,得先有凍結的評估集、一致的標註、餵進模型的脈絡,那是前三個工作包。本案不重新開啟架構選擇。</a:t>
+            </a:r>
+          </a:p>
+          <a:p>
+            <a:r>
+              <a:t>──────────────────────────────────</a:t>
+            </a:r>
+          </a:p>
+          <a:p>
+            <a:r>
+              <a:t>【card:車上裝置 · 即時初判】鏡頭在車上即時初判,偵測到一次可能的危險就記下一筆「事件」</a:t>
+            </a:r>
+          </a:p>
+          <a:p>
+            <a:r>
+              <a:t>【card:車上裝置 · 即時初判】一個「事件」= 一段影片 + 時間地點 + 系統給的分類</a:t>
+            </a:r>
+          </a:p>
+          <a:p>
+            <a:r>
+              <a:t>【card:車上裝置 · 即時初判】一個「事件」= 一段影片 + 時間地點 + 系…</a:t>
+            </a:r>
+          </a:p>
+          <a:p>
+            <a:r>
+              <a:t>【card:車上裝置 · 即時初判】單一大型車隊約 3,000 筆/天</a:t>
+            </a:r>
+          </a:p>
+          <a:p>
+            <a:r>
+              <a:t>【card:雲端 · 複判】判定屬實 → 回傳裝置向駕駛警示</a:t>
+            </a:r>
+          </a:p>
+          <a:p>
+            <a:r>
+              <a:t>【card:雲端 · 複判】自動化到這裡就停了</a:t>
+            </a:r>
+          </a:p>
+          <a:p>
+            <a:r>
+              <a:t>【card:人工防線 · 5 位專職分析人員 · 逐筆】這 5 個人做的事:重看影片 → 判成立或誤報 → 離開畫面查證據 → 書面回覆客戶</a:t>
+            </a:r>
+          </a:p>
+          <a:p>
+            <a:r>
+              <a:t>【card:人工防線 · 5 位專職分析人員 · 逐筆】一次「爭議」= 客戶回頭說「這筆判錯了」;約 5–10% 的事件會被客戶回頭標記 —— 那筆是客戶先看到,我們後知道</a:t>
+            </a:r>
+          </a:p>
+          <a:p>
+            <a:r>
+              <a:t>【card:人工防線 · 5 位專職分析人員 · 逐筆】一次「爭議」= 客戶回頭說「這筆判錯了」…</a:t>
+            </a:r>
+          </a:p>
+          <a:p>
+            <a:r>
+              <a:t>【card:人工防線 · 5 位專職分析人員 · 逐筆】尖峰時另徵調 7 位研發工程師離開本職</a:t>
+            </a:r>
+          </a:p>
+          <a:p>
+            <a:r>
+              <a:t>【compare:例行批次複核 · 全量,每一筆都看】營運端的實務估計,尚未以計時量測驗證</a:t>
+            </a:r>
+          </a:p>
+          <a:p>
+            <a:r>
+              <a:t>【compare:例行批次複核 · 全量,每一筆都看】當責:複核營運主管 · 第 6 週交出正式基準 · G1 驗收後才據以重估</a:t>
+            </a:r>
+          </a:p>
+          <a:p>
+            <a:r>
+              <a:t>【compare:客戶爭議深入判讀 · 只發生在客戶回頭標記的 5–10%】由一次實際判讀反推:5 人 × 3.6 個工作日 × 8 小時 ÷ 1,647 筆</a:t>
+            </a:r>
+          </a:p>
+          <a:p>
+            <a:r>
+              <a:t>【compare:客戶爭議深入判讀 · 只發生在客戶回頭標記的 5–10%】樣本:某小型車隊 · 單月 · 4 台車 · 23 天;不含整理與回信</a:t>
+            </a:r>
+          </a:p>
+          <a:p>
+            <a:r>
+              <a:t>【rows】{'label': '今天的量', 'value': '29.8–42.9 人時/天', 'note': '單一大型車隊約 3,000 筆/天;提案人依現有單價推算', 'hot': False}</a:t>
+            </a:r>
+          </a:p>
+          <a:p>
+            <a:r>
+              <a:t>【rows-value[本案要建的 AI 能力]】讓機器讀懂一次事件的完整脈絡(影片 + 客戶問題 + 規則),並產出可交付的證據與描述</a:t>
+            </a:r>
+          </a:p>
+          <a:p>
+            <a:r>
+              <a:t>【這一頁的作用】委員會裡不是每個人都懂這條產線,聽不懂就不會核准。這頁先用三張卡把「事件 → 複判 → 爭議」講成外行也懂的一句話,並當場定義什麼是一個事件、什麼是一次爭議、那 5 個人具體在做什麼;再用 16 倍的單價差把痛點釘死在「證據不在畫面裡」,而那正是本案要建的 VLM 能力的靶心。成因與解法印在同一頁,委員會才知道我們要買的不是產能,是把畫面外的脈絡讀進來的能力。合計 29.8–42.9 對上產能 40,也替下一頁的尖峰論證先埋好伏筆。</a:t>
             </a:r>
           </a:p>
         </p:txBody>
@@ -943,27 +1308,42 @@
           <a:lstStyle/>
           <a:p>
             <a:r>
-              <a:t>【callout】樣本:4 台車 · 23 天 · 1,647 筆 = 一個小型車隊、一個月 —— 以下所有比例僅在此樣本內成立。這一件的分析段:5 位專職分析人員並行 3.6 個工作日 = 144 人時(不含整理與回信)。</a:t>
-            </a:r>
-          </a:p>
-          <a:p>
-            <a:r>
-              <a:t>【matrix】{'name': '缺口', 'cells': ['脈絡:判定依據不在畫面裡', '判準:同一段影片,不同複核者給不同標籤'], 'hot': False}</a:t>
-            </a:r>
-          </a:p>
-          <a:p>
-            <a:r>
-              <a:t>【rows】{'label': '該樣本全部誤報', 'value': '124 筆 = 行車輔助 104 + 駕駛監控 20', 'note': '母體換算:效益與衡量那頁用的「104 / 1,029 ≈ 10.1%」只算 ADAS 那一側 —— 兩頁分子不同不是矛盾,是母體不同', 'hot': False}</a:t>
-            </a:r>
-          </a:p>
-          <a:p>
-            <a:r>
-              <a:t>【rows】{'label': '漏放那一側', 'value': '只有一份很薄的獨立樣本', 'note': '另一個母體,不與本頁比例混用;下一頁講', 'hot': False}</a:t>
-            </a:r>
-          </a:p>
-          <a:p>
-            <a:r>
-              <a:t>【這一頁的作用】委員會要的不是「我們很忙」,是「痛點有多嚴重、而且解得掉」。這頁先用一件真的做完的案子把嚴重性量出來(1,647 筆吃掉 5 個人 3.6 個工作日 = 144 人時),再把病拆成兩種(行車輔助錯的是模型、駕駛監控錯的是人),最後匯流到一個可工程化的靶心:八成三的誤報同一個根因,而解它要的速限資料公司已經有、今天就能動。這是整份提案裡投報最可信的一格 —— 靶心明確、資產已備、且母體與證據等級全部自己標了出來,答辯時沒有可攻擊的空隙。</a:t>
+              <a:t>◆ 口白逐字 —— P2 · 為什麼是現在:工作量沒變多,客戶要的時效變了</a:t>
+            </a:r>
+          </a:p>
+          <a:p>
+            <a:r>
+              <a:t>利用率七成四到一百零七:平均還好,尖峰這五個人已經不夠——折算三點七到五點四人,我們只有五個。一件爭議目前要兩到五天,現況約一半超過兩天;客戶要兩天、單純案件當天,那是客戶期望,不是簽了的服務水準。這兩到五天花在哪裡,我拆開了:排隊零到一天、撈數據半天、判讀一到三天、內部覆核半天、回信半天。撈數據加判讀,就是模型幫得上的那兩段,佔四成到八成。這兩段之所以慢,是同一個原因——模型看不到畫面外的東西。這是營運端估計,不是量測;前六週交出正式拆解,不成立就轉排班。二十秒是營運上的估計,還沒有正式量過——第六週交出正式基準,G1 驗收。上線約五萬台,售出更多;落差就是排不了程的工作量,開通權在客戶手上。我不預測撞牆的時點;第六週對齊三個分母,成長不納入回報估算。成長是階梯:一個大型車隊上線,事件量一次跳兩成三,手上正在談一個。</a:t>
+            </a:r>
+          </a:p>
+          <a:p>
+            <a:r>
+              <a:t>──────────────────────────────────</a:t>
+            </a:r>
+          </a:p>
+          <a:p>
+            <a:r>
+              <a:t>【callout】這兩段之所以慢,是同一個原因:模型看不到畫面外的東西 —— 撈數據慢,是因為人要自己去查那個位置與那段路的速限;判讀慢,是因為模型只拿到一張圖。</a:t>
+            </a:r>
+          </a:p>
+          <a:p>
+            <a:r>
+              <a:t>【rows】{'label': '尖峰徵調 7 位研發工程師', 'value': '不是管理失當,是算術的必然', 'note': '離開本職支援、非常態編制 —— 開發產能被拿去補分析產能', 'hot': False}</a:t>
+            </a:r>
+          </a:p>
+          <a:p>
+            <a:r>
+              <a:t>【rows】{'label': '量已經不是瓶頸', 'value': '全客戶 13,000 筆/天,地端約 2.2–3.5 小時跑完,設備佔用率約 9%–15%', 'note': '⚠ 估算,非實測;此數只含每日全量批次初篩,不含客戶爭議深挖那條路徑(其吞吐量由 W1–6 量測)。瓶頸是判準與驗證,不是量', 'hot': False}</a:t>
+            </a:r>
+          </a:p>
+          <a:p>
+            <a:r>
+              <a:t>【rows-value[今天的利用率]】74%–107%(29.8–42.9 ÷ 40 人時/天);折算 3.7–5.4 人,現有 5 人</a:t>
+            </a:r>
+          </a:p>
+          <a:p>
+            <a:r>
+              <a:t>【這一頁的作用】這頁回答委員會最會問的兩題:為什麼是現在、為什麼是 AI 而不是加人。五段天數必須印出來,委員會才親眼看到 43%–78% 落在模型碰得到的那兩段;而那條因果句(兩段慢的原因是同一個技術缺陷)把整頁從營運圖表升級成 AI 立案 —— 沒有它,這只證明「有件事很花時間」。同一頁又自己標明證據等級(營運端估計,非量測)並給出反向出口(推翻就轉排班),把核准變成一個低風險決定;右側的利用率上緣破百與徵調 7 位研發,則把時效缺口接回錢與機會成本。</a:t>
             </a:r>
           </a:p>
         </p:txBody>
@@ -1033,87 +1413,42 @@
           <a:lstStyle/>
           <a:p>
             <a:r>
-              <a:t>【compare:看得見的一半:誤報 - 量得到】該樣本全部誤報 124 筆中,103 筆根因同一個 = 83%(公司自己的口徑;比例僅在此樣本內成立)</a:t>
-            </a:r>
-          </a:p>
-          <a:p>
-            <a:r>
-              <a:t>【compare:看得見的一半:誤報 - 量得到】為什麼量得到:誤報是「已經送出去、被人看到」的錯 - 人工複核那一流,每一筆都被人看過</a:t>
-            </a:r>
-          </a:p>
-          <a:p>
-            <a:r>
-              <a:t>【compare:看得見的一半:誤報 - 量得到】代價:誤報只花我們的人時,可以換算成錢</a:t>
-            </a:r>
-          </a:p>
-          <a:p>
-            <a:r>
-              <a:t>【compare:看不見的一半:漏放 - 量不到】能力有、流程沒有:記憶卡存整天分段影片,遠端調閱一台裝置一整天約 10-15 分鐘、有流量成本;但沒有任何常設流程去回看被判否決的那一流</a:t>
-            </a:r>
-          </a:p>
-          <a:p>
-            <a:r>
-              <a:t>【compare:看不見的一半:漏放 - 量不到】所以錯誤會留下來:沒有人回看 → 那一區永遠不產生新標註 → 模型在那個區域學不到東西 → 漏放繼續發生,而且不進任何一份報表(Ensign et al., 2018)</a:t>
-            </a:r>
-          </a:p>
-          <a:p>
-            <a:r>
-              <a:t>【compare:看不見的一半:漏放 - 量不到】代價:漏放是駕駛沒收到那次警示 - 落在安全側,不落在報表上</a:t>
-            </a:r>
-          </a:p>
-          <a:p>
-            <a:r>
-              <a:t>【rows】{'label': '這份測試是什麼', 'value': '39 筆人工觸發測試', 'note': '獨立樣本,非 1,647 筆母體;一次性測試,不是常設量測 - 這是公司到今天唯一的漏放數字', 'hot': False}</a:t>
-            </a:r>
-          </a:p>
-          <a:p>
-            <a:r>
-              <a:t>【rows】{'label': '正確偵測', 'value': '17 / 39', 'note': '人工觸發後有被偵測到', 'hot': False}</a:t>
-            </a:r>
-          </a:p>
-          <a:p>
-            <a:r>
-              <a:t>【rows】{'label': '待客戶說明用途,無法歸類', 'value': '10 / 39 ≈ 四分之一', 'note': '四分之一的樣本連歸類都做不到 - 這一列本身就是「樣本有多薄」的證據', 'hot': False}</a:t>
-            </a:r>
-          </a:p>
-          <a:p>
-            <a:r>
-              <a:t>【rows】{'label': '我對這條線索的定性', 'value': '線索,不是結論', 'note': 'W1-6 由評估底座那一包做成帶信賴區間的估計;不成立就換靶心,G1(第 6 週)判', 'hot': True}</a:t>
-            </a:r>
-          </a:p>
-          <a:p>
-            <a:r>
-              <a:t>【matrix-cell】感測器故障;人工標註本身就會錯 - 而標註錯誤足以改變模型的評比結論(Northcutt et al., 2021);跨系統重複記錄</a:t>
-            </a:r>
-          </a:p>
-          <a:p>
-            <a:r>
-              <a:t>【matrix-cell】目前不一致:同一段影片,不同複核者會給不同標籤(低頭 vs 閉眼、保溫瓶 vs 手機),而這個不一致從來沒有被量測過</a:t>
-            </a:r>
-          </a:p>
-          <a:p>
-            <a:r>
-              <a:t>【matrix】{'name': '處理', 'cells': ['感測器故障;人工標註本身就會錯 - 而標註錯誤足以改變模型的評比結論(Northcutt et …', '準確性 · 一致性', 'W3-10 標註品質:誤報的操作型定義 + 判準手冊 + 黃金題'], 'hot': False}</a:t>
-            </a:r>
-          </a:p>
-          <a:p>
-            <a:r>
-              <a:t>【matrix-cell】感測器故障;人工標註本身就會錯 - 而標註錯誤足以改變模型的評比結論(Northcutt et al., 2021);跨系統重複記錄</a:t>
-            </a:r>
-          </a:p>
-          <a:p>
-            <a:r>
-              <a:t>【matrix-cell】目前不一致:同一段影片,不同複核者會給不同標籤(低頭 vs 閉眼、保溫瓶 vs 手機),而這個不一致從來沒有被量測過</a:t>
-            </a:r>
-          </a:p>
-          <a:p>
-            <a:r>
-              <a:t>【matrix】{'name': '處理', 'cells': ['感測器故障;人工標註本身就會錯 - 而標註錯誤足以改變…', '準確性 · 一致性', 'W3-10 標註品質:誤報的操作型定義 + 判準手冊 + 黃金題'], 'hot': False}</a:t>
-            </a:r>
-          </a:p>
-          <a:p>
-            <a:r>
-              <a:t>【這一頁的作用】這一頁把「為什麼第一筆錢要買量測,而不是買模型」變成委員會看得見的東西:左邊誤報有母體、有比例、有根因,右邊漏放只有一份 39 筆、自註為下限、還有四分之一無法歸類 - 兩側證據強度的落差本身就是提案的理由。同時它用真實案例數據(1,647 筆樣本、103/124、39 筆測試、6/12)證明痛點不是修辭,再用 Ensign 的回饋迴路說明「沒有人回看的那一流」為什麼會讓錯誤永久留下,把痛點從『這次判錯了』升級成『這個錯誤系統性地不會被發現』。最後主動把最強的線索降級成假說並綁到 G1,誠實度因此是被證明的而不是被宣稱的。</a:t>
+              <a:t>◆ 口白逐字 —— P3 · 發現過程:兩種病,兩個缺口</a:t>
+            </a:r>
+          </a:p>
+          <a:p>
+            <a:r>
+              <a:t>那我們的時間到底花在哪裡?我把最近一份判讀拆開來看。四台車、二十三天、一千六百四十七筆,一個小型車隊一個月,比例僅在此樣本內成立。行車輔助錯的是模型,駕駛監控錯的是人。一邊缺脈絡,判定依據不在畫面裡;一邊缺判準,同一段影片兩人不同答案。這兩個比例共用同一把尺,而那把尺的一致性我們從來沒量過——標註品質那一包第十週建立基線,G2 訂目標值。這個樣本一百二十四筆誤報,一百零三筆同一個根因:交通標誌辨識,八成三。漏放那一側只有一份很薄的樣本,下一頁講。修好它,誤報跟漏放一起改善——而誤報,就是我們今天在人工端花掉的時間。</a:t>
+            </a:r>
+          </a:p>
+          <a:p>
+            <a:r>
+              <a:t>──────────────────────────────────</a:t>
+            </a:r>
+          </a:p>
+          <a:p>
+            <a:r>
+              <a:t>【callout】樣本:4 台車 · 23 天 · 1,647 筆 = 一個小型車隊、一個月 —— 以下所有比例僅在此樣本內成立。這一件的分析段:5 位專職分析人員並行 3.6 個工作日 = 144 人時(不含整理與回信)。</a:t>
+            </a:r>
+          </a:p>
+          <a:p>
+            <a:r>
+              <a:t>【matrix】{'name': '缺口', 'cells': ['脈絡:判定依據不在畫面裡', '判準:同一段影片,不同複核者給不同標籤'], 'hot': False}</a:t>
+            </a:r>
+          </a:p>
+          <a:p>
+            <a:r>
+              <a:t>【rows】{'label': '該樣本全部誤報', 'value': '124 筆 = 行車輔助 104 + 駕駛監控 20', 'note': '母體換算:效益與衡量那頁用的「104 / 1,029 ≈ 10.1%」只算 ADAS 那一側 —— 兩頁分子不同不是矛盾,是母體不同', 'hot': False}</a:t>
+            </a:r>
+          </a:p>
+          <a:p>
+            <a:r>
+              <a:t>【rows】{'label': '漏放那一側', 'value': '只有一份很薄的獨立樣本', 'note': '另一個母體,不與本頁比例混用;下一頁講', 'hot': False}</a:t>
+            </a:r>
+          </a:p>
+          <a:p>
+            <a:r>
+              <a:t>【這一頁的作用】委員會要的不是「我們很忙」,是「痛點有多嚴重、而且解得掉」。這頁先用一件真的做完的案子把嚴重性量出來(1,647 筆吃掉 5 個人 3.6 個工作日 = 144 人時),再把病拆成兩種(行車輔助錯的是模型、駕駛監控錯的是人),最後匯流到一個可工程化的靶心:八成三的誤報同一個根因,而解它要的速限資料公司已經有、今天就能動。這是整份提案裡投報最可信的一格 —— 靶心明確、資產已備、且母體與證據等級全部自己標了出來,答辯時沒有可攻擊的空隙。</a:t>
             </a:r>
           </a:p>
         </p:txBody>
@@ -1183,302 +1518,102 @@
           <a:lstStyle/>
           <a:p>
             <a:r>
-              <a:t>【matrix-cell】線性:量幾倍,人就要幾倍 → 需 17-24 人(現有 5 人)〔提案推算,非核定編制〕</a:t>
-            </a:r>
-          </a:p>
-          <a:p>
-            <a:r>
-              <a:t>【matrix-cell】拒絕 - 加人只是沿著同一條成本曲線移動,不是把曲線整條外推(完整算式與迴路見下方卡片)</a:t>
-            </a:r>
-          </a:p>
-          <a:p>
-            <a:r>
-              <a:t>【matrix-cell】重排班表,把尖峰徵調的 7 位研發工程師從臨時支援變成有編組、有訓練的正式安排(尖峰徵調是現在就在跑的簡易版)</a:t>
-            </a:r>
-          </a:p>
-          <a:p>
-            <a:r>
-              <a:t>【matrix-cell】仍線性,但斜率略低;削得掉尖峰,削不掉每日底量。⚠️ 斜率與削峰幅度目前沒有量測</a:t>
-            </a:r>
-          </a:p>
-          <a:p>
-            <a:r>
-              <a:t>【matrix-cell】待 G1 判定,本案不預先否決它 - 它是最便宜的解。營運端三個限制〔第一手經驗,不是量測〕:新人約三個月才判得準 · 影像有隱私限制不能外包 · 過去擴大人力判準反而更亂;另一項:排班只動得了排隊那 0-1 天</a:t>
-            </a:r>
-          </a:p>
-          <a:p>
-            <a:r>
-              <a:t>【matrix-cell】先做 - 某小型車隊單月樣本中 103 / 124 = 83% 的誤報同一根因,而速限資料自有;高風險決策場景應優先使用可逐條檢查的可解釋方法,而不是對黑箱做事後解釋(Rudin, 2019)。它同時是選項 2 的對照基線</a:t>
-            </a:r>
-          </a:p>
-          <a:p>
-            <a:r>
-              <a:t>【matrix-cell】讓機器讀懂一次事件的完整脈絡(影片 + 客戶問題 + 規則),產出可交付的描述與證據包</a:t>
-            </a:r>
-          </a:p>
-          <a:p>
-            <a:r>
-              <a:t>【matrix-cell】前期一次性投入,之後次線性 - 事件量繼續長,人時不跟著等比長。這是五條裡唯一不是線性的形狀</a:t>
-            </a:r>
-          </a:p>
-          <a:p>
-            <a:r>
-              <a:t>【matrix-cell】採用 - 前三包不是流程改善,是評估它的必要前置:量測底座 = 評估基準(沒有它不知道模型判得對不對)· 判準統一 = 驗證資料(判準不一致的標註餵給模型就是垃圾進垃圾出)· 規則式 = 對照基線(要證明模型有增量,得先有一個不用它的基準)</a:t>
-            </a:r>
-          </a:p>
-          <a:p>
-            <a:r>
-              <a:t>【matrix-cell】前置條件,不是競爭關係 - 雲端判定真假,誰判定雲端?本案提供它需要的可稽核量測與乾淨標註</a:t>
-            </a:r>
-          </a:p>
-          <a:p>
-            <a:r>
-              <a:t>【matrix】{'name': '選項 0b\n調班 + 尖峰人力池', 'cells': ['重排班表,把尖峰徵調的 7 位研發工程師從臨時支援變成有編組、有訓練…', '仍線性,但斜率略低;削得掉尖峰,削不掉每日底量。⚠️ 斜率與削峰幅度目…', '隨時可停、可退回原班表 - 五條路裡反悔成本最低的一條', '待 G1 判定,本案不預先否決它 - 它是最便宜的解。營運端三個限制〔第…'], 'hot': False}</a:t>
-            </a:r>
-          </a:p>
-          <a:p>
-            <a:r>
-              <a:t>【matrix】{'name': '選項 1\n規則式脈絡融合(不用機器學習)', 'cells': ['定位 + 地圖速限硬規則比對,把畫面外的脈絡接到事件上', '一次性建置,之後整段下移一階、後續仍線性', '可逐條檢查、可回退到規則本身', '先做 - 某小型車隊單月樣本中 103 / 124 = 83% 的誤報同一根因,而速…'], 'hot': False}</a:t>
-            </a:r>
-          </a:p>
-          <a:p>
-            <a:r>
-              <a:t>【matrix】{'name': '選項 3\n公司既有的雲端判讀規劃', 'cells': ['仍在研擬中的雲端判讀', '尚未開始,曲線未定', '不在本案範圍,由技術長辦公室決定', '前置條件,不是競爭關係 - 雲端判定真假,誰判定雲端?本案提供它需要的…'], 'hot': False}</a:t>
-            </a:r>
-          </a:p>
-          <a:p>
-            <a:r>
-              <a:t>【matrix-cell】線性:量幾倍,人就要幾倍 → 需 17-24 人(現有 5 人)〔提案推算,非核定編制〕</a:t>
-            </a:r>
-          </a:p>
-          <a:p>
-            <a:r>
-              <a:t>【matrix-cell】拒絕 - 加人只是沿著同一條成本曲線移動,不是把曲線整條外推(完整算式與迴路見下方卡片)</a:t>
-            </a:r>
-          </a:p>
-          <a:p>
-            <a:r>
-              <a:t>【matrix-cell】重排班表,把尖峰徵調的 7 位研發工程師從臨時支援變成有編組、有訓練的正式安排(尖峰徵調是現在就在跑的簡易版)</a:t>
-            </a:r>
-          </a:p>
-          <a:p>
-            <a:r>
-              <a:t>【matrix-cell】仍線性,但斜率略低;削得掉尖峰,削不掉每日底量。⚠️ 斜率與削峰幅度目前沒有量測</a:t>
-            </a:r>
-          </a:p>
-          <a:p>
-            <a:r>
-              <a:t>【matrix-cell】隨時可停、可退回原班表 - 五條路裡反悔成本最低的一條</a:t>
-            </a:r>
-          </a:p>
-          <a:p>
-            <a:r>
-              <a:t>【matrix-cell】待 G1 判定,本案不預先否決它 - 它是最便宜的解。營運端三個限制〔第一手經驗,不是量測〕:新人約三個月才判得準 · 影像有隱私限制不能外包 · 過去擴大人力判準反而更亂;另一項:排班只動得了排隊那 0-1 天</a:t>
-            </a:r>
-          </a:p>
-          <a:p>
-            <a:r>
-              <a:t>【matrix-cell】定位 + 地圖速限硬規則比對,把畫面外的脈絡接到事件上</a:t>
-            </a:r>
-          </a:p>
-          <a:p>
-            <a:r>
-              <a:t>【matrix-cell】先做 - 某小型車隊單月樣本中 103 / 124 = 83% 的誤報同一根因,而速限資料自有;高風險決策場景應優先使用可逐條檢查的可解釋方法,而不是對黑箱做事後解釋(Rudin, 2019)。它同時是選項 2 的對照基線</a:t>
-            </a:r>
-          </a:p>
-          <a:p>
-            <a:r>
-              <a:t>【matrix-cell】讓機器讀懂一次事件的完整脈絡(影片 + 客戶問題 + 規則),產出可交付的描述與證據包</a:t>
-            </a:r>
-          </a:p>
-          <a:p>
-            <a:r>
-              <a:t>【matrix-cell】前期一次性投入,之後次線性 - 事件量繼續長,人時不跟著等比長。這是五條裡唯一不是線性的形狀</a:t>
-            </a:r>
-          </a:p>
-          <a:p>
-            <a:r>
-              <a:t>【matrix-cell】三道門都可停:G1(W6)· G2(W12)· G3(W24);且六個月內對外自動結案 0%</a:t>
-            </a:r>
-          </a:p>
-          <a:p>
-            <a:r>
-              <a:t>【matrix-cell】採用 - 前三包不是流程改善,是評估它的必要前置:量測底座 = 評估基準(沒有它不知道模型判得對不對)· 判準統一 = 驗證資料(判準不一致的標註餵給模型就是垃圾進垃圾出)· 規則式 = 對照基線(要證明模型有增量,得先有一個不用它的基準)</a:t>
-            </a:r>
-          </a:p>
-          <a:p>
-            <a:r>
-              <a:t>【matrix-cell】前置條件,不是競爭關係 - 雲端判定真假,誰判定雲端?本案提供它需要的可稽核量測與乾淨標註</a:t>
-            </a:r>
-          </a:p>
-          <a:p>
-            <a:r>
-              <a:t>【matrix】{'name': '選項 0b\n調班 + 尖峰人力池', 'cells': ['重排班表,把尖峰徵調的 7 位研發工程師從臨時…', '仍線性,但斜率略低;削得掉尖峰,削不掉每日底量…', '隨時可停、可退回原班表 - 五條路裡反悔成本最…', '待 G1 判定,本案不預先否決它 - 它是最便宜的…'], 'hot': False}</a:t>
-            </a:r>
-          </a:p>
-          <a:p>
-            <a:r>
-              <a:t>【matrix】{'name': '選項 1\n規則式脈絡融合(不用機器學習)', 'cells': ['定位 + 地圖速限硬規則比對,把畫面外的脈絡接…', '一次性建置,之後整段下移一階、後續仍線性', '可逐條檢查、可回退到規則本身', '先做 - 某小型車隊單月樣本中 103 / 124 = 83…'], 'hot': False}</a:t>
-            </a:r>
-          </a:p>
-          <a:p>
-            <a:r>
-              <a:t>【matrix】{'name': '選項 3\n公司既有的雲端判讀規劃', 'cells': ['仍在研擬中的雲端判讀', '尚未開始,曲線未定', '不在本案範圍,由技術長辦公室決定', '前置條件,不是競爭關係 - 雲端判定真假,誰判定…'], 'hot': False}</a:t>
-            </a:r>
-          </a:p>
-          <a:p>
-            <a:r>
-              <a:t>【badge】提案推算,非核定編制</a:t>
-            </a:r>
-          </a:p>
-          <a:p>
-            <a:r>
-              <a:t>【card:選項 0 的算式(照印,含對本案不利的部分)】批次   13,000 x 20 秒 = 72.2 人時(13,000+ 筆/天 = 全客戶每日平均總事件量,雲端伺服器實測統計)</a:t>
-            </a:r>
-          </a:p>
-          <a:p>
-            <a:r>
-              <a:t>【card:選項 0 的算式(照印,含對本案不利的部分)】合計   129.1-185.9 人時 / 8 小時 = 16.14-23.24 FTE → 取整員額 17-24 人(保產能只能無條件進位;現有 5 人);工作量比 = 129.1 / 29.8 = 4.33 倍,這就是「四倍以上」的算術依據</a:t>
-            </a:r>
-          </a:p>
-          <a:p>
-            <a:r>
-              <a:t>【card:選項 0 的算式(照印,含對本案不利的部分)】5.25 分/筆由一次實際判讀反推:5 人 x 3.6 個分析日 x 8 小時 = 144 人時 / 1,647 筆。這是單一批次的實際節奏,不是長期平均</a:t>
-            </a:r>
-          </a:p>
-          <a:p>
-            <a:r>
-              <a:t>【card:選項 0 的算式(照印,含對本案不利的部分)】兩個尚未驗證的假設:①約 20 秒/筆是營運端的實務估計,尚未以計時量測驗證 ②假設所有客戶有相同的案件組合與 5-10% 的爭議比例。兩項都由 W1-6 檢驗、G1 上桌;任一項被推翻,17-24 人要重算</a:t>
-            </a:r>
-          </a:p>
-          <a:p>
-            <a:r>
-              <a:t>【card:選項 0 的算式(照印,含對本案不利的部分)】加人會讓迴路轉得更久,不會讓它停:裝機量成長 → 複核量成長 → 人力吃緊 → 標註品質不穩 → 回流訓練資料不穩 → 誤報降不下來 → 複核量繼續成長。低品質標註會沿著訓練流程往下游放大(資料級聯)(Sambasivan et al., 2021)</a:t>
-            </a:r>
-          </a:p>
-          <a:p>
-            <a:r>
-              <a:t>【card:選項 0 的算式(照印,含對本案不利的部分)】爭議   13,000 x 5-10% x 5.25 分 = 56.8-113.7 人時</a:t>
-            </a:r>
-          </a:p>
-          <a:p>
-            <a:r>
-              <a:t>【card:選項 0 的算式(照印,含對本案不利的部分)】合計   129.1-185.9 人時 / 8 小時 = 16.14-23.24 FTE → 取整員額 17-24 …</a:t>
-            </a:r>
-          </a:p>
-          <a:p>
-            <a:r>
-              <a:t>【card:選項 0 的算式(照印,含對本案不利的部分)】5.25 分/筆由一次實際判讀反推:5 人 x 3.6 個分析日 x 8 小時 = 144 人時 /…</a:t>
-            </a:r>
-          </a:p>
-          <a:p>
-            <a:r>
-              <a:t>【card:選項 0 的算式(照印,含對本案不利的部分)】兩個尚未驗證的假設:①約 20 秒/筆是營運端的實務估計,尚未以計時量測驗證 ②假…</a:t>
-            </a:r>
-          </a:p>
-          <a:p>
-            <a:r>
-              <a:t>【card:選項 0 的算式(照印,含對本案不利的部分)】加人會讓迴路轉得更久,不會讓它停:裝機量成長 → 複核量成長 → 人力吃緊 → 標…</a:t>
-            </a:r>
-          </a:p>
-          <a:p>
-            <a:r>
-              <a:t>【card:G1(第 6 週)= 因果判定門】W1-6 要交出:一件客戶爭議的時間拆解(等待排隊 0-1 天 · 撈數據 0.5 天 · 判讀 1-3 天 · 內部覆核 0.5 天 · 回信 0.5 天 = 合計 2.5-5.5 天)· 兩天逾時率 · 尖峰到件分布 · 抽幀率的召回率比較</a:t>
-            </a:r>
-          </a:p>
-          <a:p>
-            <a:r>
-              <a:t>【card:G1(第 6 週)= 因果判定門】怎麼判:把五段分成兩堆 - 「AI 可處理」(撈數據 · 判讀 · 證據包製作)與「AI 不可處理」(排隊 · 排班 · 人力調度)</a:t>
-            </a:r>
-          </a:p>
-          <a:p>
-            <a:r>
-              <a:t>【card:G1(第 6 週)= 因果判定門】⚠️ 初步拆解已顯示 AI 可處理段佔全程 43%-78%,但那是營運端的一次口述拆解,不是系統量測;W1-6 要把它做成正式量測,判定規則不因初步結果而放寬。六週買一個答案,答案不對就不做後面</a:t>
-            </a:r>
-          </a:p>
-          <a:p>
-            <a:r>
-              <a:t>【card:G1(第 6 週)= 因果判定門】怎麼判:把五段分成兩堆 - 「AI 可處理」(撈數據 · 判讀 · 證據包製作)與「AI …</a:t>
-            </a:r>
-          </a:p>
-          <a:p>
-            <a:r>
-              <a:t>【card:G1(第 6 週)= 因果判定門】出口 A:AI 可處理的那一堆佔主要延遲 → 放行選項 1 / 2 的後段</a:t>
-            </a:r>
-          </a:p>
-          <a:p>
-            <a:r>
-              <a:t>【card:G1(第 6 週)= 因果判定門】出口 B:否則 → 轉選項 0b(調班 + 尖峰人力池),本案的後五個工作包不執行</a:t>
-            </a:r>
-          </a:p>
-          <a:p>
-            <a:r>
-              <a:t>【card:G1(第 6 週)= 因果判定門】⚠️ 初步拆解已顯示 AI 可處理段佔全程 43%-78%,但那是營運端的一次口述拆解…</a:t>
-            </a:r>
-          </a:p>
-          <a:p>
-            <a:r>
-              <a:t>【badge】提案推估,非實測</a:t>
-            </a:r>
-          </a:p>
-          <a:p>
-            <a:r>
-              <a:t>【card:這 85% 到底是什麼(三層,一層都不可省)】技術寫到概念層次:一套地端視覺語言模型,篩檢與深挖兩種負載由同一台設備分時處理;實際選型與量化規格於 G1 依 W1-6 的量測定案 - 它直接決定要買幾台</a:t>
-            </a:r>
-          </a:p>
-          <a:p>
-            <a:r>
-              <a:t>【card:這 85% 到底是什麼(三層,一層都不可省)】吞吐:1,000 支 15 秒事件影片約 10-16 分〔估算,非實測;依一組公開可得模型的公開吞吐特性推估〕;同一批人以 1.0 倍速看完約 250 分</a:t>
-            </a:r>
-          </a:p>
-          <a:p>
-            <a:r>
-              <a:t>【card:這 85% 到底是什麼(三層,一層都不可省)】能力層:以現行小模型的表現外推,預期約 85% 的爭議件機器有把握、可直接結案 - 1,000 筆進來約 850 筆,剩約 150 筆送人細看。對那些件而言那就是終局判定〔提案推估,非實測;母體只有客戶爭議段,不含每日全量批次複核〕</a:t>
-            </a:r>
-          </a:p>
-          <a:p>
-            <a:r>
-              <a:t>【card:這 85% 到底是什麼(三層,一層都不可省)】本案層:🔴 六個月內對外自動結案覆蓋率目標 = 0%。W12-24 只跑影子模式 - 機器照樣出結論但不對外送,人照常逐筆判,兩邊比對。這是唯一算得出自動結案漏放率的設計</a:t>
-            </a:r>
-          </a:p>
-          <a:p>
-            <a:r>
-              <a:t>【card:這 85% 到底是什麼(三層,一層都不可省)】怎麼驗:第 12 週用同一份凍結評估集,四臂同場比 - 現行影像模型 / 規則式脈絡基線 / VLM 輔助人工 / 影子模式。G2 只能調整模型假設與規模,不能取消這個實驗</a:t>
-            </a:r>
-          </a:p>
-          <a:p>
-            <a:r>
-              <a:t>【card:這 85% 到底是什麼(三層,一層都不可省)】吞吐:1,000 支 15 秒事件影片約 10-16 分〔估算,非實測;依一組公開可得模型的…</a:t>
-            </a:r>
-          </a:p>
-          <a:p>
-            <a:r>
-              <a:t>【card:這 85% 到底是什麼(三層,一層都不可省)】能力層:以現行小模型的表現外推,預期約 85% 的爭議件機器有把握、可直接結案 -…</a:t>
-            </a:r>
-          </a:p>
-          <a:p>
-            <a:r>
-              <a:t>【card:這 85% 到底是什麼(三層,一層都不可省)】本案層:🔴 六個月內對外自動結案覆蓋率目標 = 0%。W12-24 只跑影子模式 - 機器…</a:t>
-            </a:r>
-          </a:p>
-          <a:p>
-            <a:r>
-              <a:t>【card:這 85% 到底是什麼(三層,一層都不可省)】放行層:要讓它對外生效,需通過本案之外的一道獨立門,不在本次請求範圍</a:t>
-            </a:r>
-          </a:p>
-          <a:p>
-            <a:r>
-              <a:t>【card:這 85% 到底是什麼(三層,一層都不可省)】怎麼驗:第 12 週用同一份凍結評估集,四臂同場比 - 現行影像模型 / 規則式脈絡…</a:t>
-            </a:r>
-          </a:p>
-          <a:p>
-            <a:r>
-              <a:t>【callout】⚠️ 85% 是分流率:它決定「這筆要不要人細看」,不是「這筆是不是誤報」;它與偵測誤報率量的不是同一件事,不可比、不可並排、不可相減。而人現在判得多準,我們沒有量過 - 所以我也不知道 85% 是進步還是退步,那正是第一個工作包要建的東西。</a:t>
-            </a:r>
-          </a:p>
-          <a:p>
-            <a:r>
-              <a:t>【這一頁的作用】這一頁要讓委員會相信兩件事。第一,這個 AI 提案是被比較過的:五條路用同一組欄位並排 - 做什麼、成本形狀、能不能停、為什麼 - 差別因此不再是五段等長的描述,而是四種可以一眼分辨的曲線(線性 / 線性但削峰 / 一次性下移一階 / 次線性 / 尚未開始),而唯一不是線性的那一條就是採用案。第二,這個提案是可以被否決的:最便宜的調班沒有被畫醜也沒有被預先否決,選項 0 用最保守、對本案最不利的算法拒絕,G1 有兩個同粗的出口,其中一個出口通向不做本案。最後把 85% 降級成一個要在 W12 被凍結測試集驗、而且六個月內一筆都不對外生效的推估 - 委員會今天核准的是一道可以否決自己的量測,不是一個 85% 的承諾。</a:t>
+              <a:t>◆ 口白逐字 —— P4 · 我們看不見的那一半:有資料,沒有習慣</a:t>
+            </a:r>
+          </a:p>
+          <a:p>
+            <a:r>
+              <a:t>這是我們看得見的一半。看不見的那一半更麻煩。被判否決的那一流,沒有人回看。我們有資料,沒有習慣。唯一的漏放量測,是一份三十九筆的人工觸發測試,獨立樣本:漏偵十二筆,另外十筆無法歸類,約四分之一;報告上我們自己註明,十二是下限。這是我目前手上最強的線索,不是結論;前六週由評估底座那一包做成帶信賴區間的估計,不成立就換靶心,G1 判。這兩種錯的代價不對稱:誤報只花我們的人時,漏放是駕駛沒收到那次警示。所以漏放這一側就算樣本再薄,也要先把它量出來。這批資料難在三件事:收得不完整、標註本身就會錯、內部對同一個標籤還沒有一致的理解。文獻上講的「沒有真實資料就只能靠代理指標」,就是這件事。</a:t>
+            </a:r>
+          </a:p>
+          <a:p>
+            <a:r>
+              <a:t>──────────────────────────────────</a:t>
+            </a:r>
+          </a:p>
+          <a:p>
+            <a:r>
+              <a:t>【compare:看得見的一半:誤報 - 量得到】該樣本全部誤報 124 筆中,103 筆根因同一個 = 83%(公司自己的口徑;比例僅在此樣本內成立)</a:t>
+            </a:r>
+          </a:p>
+          <a:p>
+            <a:r>
+              <a:t>【compare:看得見的一半:誤報 - 量得到】為什麼量得到:誤報是「已經送出去、被人看到」的錯 - 人工複核那一流,每一筆都被人看過</a:t>
+            </a:r>
+          </a:p>
+          <a:p>
+            <a:r>
+              <a:t>【compare:看得見的一半:誤報 - 量得到】代價:誤報只花我們的人時,可以換算成錢</a:t>
+            </a:r>
+          </a:p>
+          <a:p>
+            <a:r>
+              <a:t>【compare:看不見的一半:漏放 - 量不到】能力有、流程沒有:記憶卡存整天分段影片,遠端調閱一台裝置一整天約 10-15 分鐘、有流量成本;但沒有任何常設流程去回看被判否決的那一流</a:t>
+            </a:r>
+          </a:p>
+          <a:p>
+            <a:r>
+              <a:t>【compare:看不見的一半:漏放 - 量不到】所以錯誤會留下來:沒有人回看 → 那一區永遠不產生新標註 → 模型在那個區域學不到東西 → 漏放繼續發生,而且不進任何一份報表(Ensign et al., 2018)</a:t>
+            </a:r>
+          </a:p>
+          <a:p>
+            <a:r>
+              <a:t>【compare:看不見的一半:漏放 - 量不到】代價:漏放是駕駛沒收到那次警示 - 落在安全側,不落在報表上</a:t>
+            </a:r>
+          </a:p>
+          <a:p>
+            <a:r>
+              <a:t>【rows】{'label': '這份測試是什麼', 'value': '39 筆人工觸發測試', 'note': '獨立樣本,非 1,647 筆母體;一次性測試,不是常設量測 - 這是公司到今天唯一的漏放數字', 'hot': False}</a:t>
+            </a:r>
+          </a:p>
+          <a:p>
+            <a:r>
+              <a:t>【rows】{'label': '正確偵測', 'value': '17 / 39', 'note': '人工觸發後有被偵測到', 'hot': False}</a:t>
+            </a:r>
+          </a:p>
+          <a:p>
+            <a:r>
+              <a:t>【rows】{'label': '待客戶說明用途,無法歸類', 'value': '10 / 39 ≈ 四分之一', 'note': '四分之一的樣本連歸類都做不到 - 這一列本身就是「樣本有多薄」的證據', 'hot': False}</a:t>
+            </a:r>
+          </a:p>
+          <a:p>
+            <a:r>
+              <a:t>【rows】{'label': '我對這條線索的定性', 'value': '線索,不是結論', 'note': 'W1-6 由評估底座那一包做成帶信賴區間的估計;不成立就換靶心,G1(第 6 週)判', 'hot': True}</a:t>
+            </a:r>
+          </a:p>
+          <a:p>
+            <a:r>
+              <a:t>【matrix-cell】感測器故障;人工標註本身就會錯 - 而標註錯誤足以改變模型的評比結論(Northcutt et al., 2021);跨系統重複記錄</a:t>
+            </a:r>
+          </a:p>
+          <a:p>
+            <a:r>
+              <a:t>【matrix-cell】目前不一致:同一段影片,不同複核者會給不同標籤(低頭 vs 閉眼、保溫瓶 vs 手機),而這個不一致從來沒有被量測過</a:t>
+            </a:r>
+          </a:p>
+          <a:p>
+            <a:r>
+              <a:t>【matrix】{'name': '處理', 'cells': ['感測器故障;人工標註本身就會錯 - 而標註錯誤足以改變模型的評比結論(Northcutt et …', '準確性 · 一致性', 'W3-10 標註品質:誤報的操作型定義 + 判準手冊 + 黃金題'], 'hot': False}</a:t>
+            </a:r>
+          </a:p>
+          <a:p>
+            <a:r>
+              <a:t>【matrix-cell】感測器故障;人工標註本身就會錯 - 而標註錯誤足以改變模型的評比結論(Northcutt et al., 2021);跨系統重複記錄</a:t>
+            </a:r>
+          </a:p>
+          <a:p>
+            <a:r>
+              <a:t>【matrix-cell】目前不一致:同一段影片,不同複核者會給不同標籤(低頭 vs 閉眼、保溫瓶 vs 手機),而這個不一致從來沒有被量測過</a:t>
+            </a:r>
+          </a:p>
+          <a:p>
+            <a:r>
+              <a:t>【matrix】{'name': '處理', 'cells': ['感測器故障;人工標註本身就會錯 - 而標註錯誤足以改變…', '準確性 · 一致性', 'W3-10 標註品質:誤報的操作型定義 + 判準手冊 + 黃金題'], 'hot': False}</a:t>
+            </a:r>
+          </a:p>
+          <a:p>
+            <a:r>
+              <a:t>【這一頁的作用】這一頁把「為什麼第一筆錢要買量測,而不是買模型」變成委員會看得見的東西:左邊誤報有母體、有比例、有根因,右邊漏放只有一份 39 筆、自註為下限、還有四分之一無法歸類 - 兩側證據強度的落差本身就是提案的理由。同時它用真實案例數據(1,647 筆樣本、103/124、39 筆測試、6/12)證明痛點不是修辭,再用 Ensign 的回饋迴路說明「沒有人回看的那一流」為什麼會讓錯誤永久留下,把痛點從『這次判錯了』升級成『這個錯誤系統性地不會被發現』。最後主動把最強的線索降級成假說並綁到 G1,誠實度因此是被證明的而不是被宣稱的。</a:t>
             </a:r>
           </a:p>
         </p:txBody>
@@ -1548,42 +1683,317 @@
           <a:lstStyle/>
           <a:p>
             <a:r>
-              <a:t>【matrix-cell】教育・介面 (Goddard et al., 2012)</a:t>
-            </a:r>
-          </a:p>
-          <a:p>
-            <a:r>
-              <a:t>介面不顯示信心 (Guo et al., 2017)</a:t>
-            </a:r>
-          </a:p>
-          <a:p>
-            <a:r>
-              <a:t>【matrix】{'name': 'R3 數據｜自動化偏差 · 成功 中\n(Parasuraman &amp; Manzey, 2010)', 'cells': ['教育・介面 (Goddard et al., 2012)\n介面不顯示信心 (Guo et al., 2017)…', '不顯示信心使複核變慢,\n與時效缺口相衝', '盲測組與對照組判定差異\n超過設計書所訂容忍值'], 'hot': False}</a:t>
-            </a:r>
-          </a:p>
-          <a:p>
-            <a:r>
-              <a:t>【matrix】{'name': 'R5 社會性 · 成功 高\n複核團隊抵觸角色改變', 'cells': ['教育:角色轉型說明 +\n判準手冊共同編寫', '參與式做法拉長\n判準定案時程', '複核團隊留任率或\n黃金題參與率下滑'], 'hot': False}</a:t>
-            </a:r>
-          </a:p>
-          <a:p>
-            <a:r>
-              <a:t>【matrix】{'name': 'R6 經濟 · 成功 中\n期內回本難證 · 與雲端競合', 'cells': ['審計:三道決策門\n逐段釋出額度', '分段釋出使長週期\n工作包難以排人', '決策門審查時單位成本\n改善低於門檻'], 'hot': False}</a:t>
-            </a:r>
-          </a:p>
-          <a:p>
-            <a:r>
-              <a:t>【matrix】{'name': 'R7 組織與管理 · 成功 高\n缺管理層支持(誠實命中)', 'cells': ['問責:贊助人指派 +\n決策門出席為放行前提', '決策門增加治理負擔\n與會議成本', '決策門連續兩次\n無高階出席'], 'hot': False}</a:t>
-            </a:r>
-          </a:p>
-          <a:p>
-            <a:r>
-              <a:t>【callout】R8 沒有答案 —— 法務書面意見於 G1(第 6 週)前到位;R9 · R10 是這個方案自己造成的,放行門在移交後,不在這六個月。</a:t>
-            </a:r>
-          </a:p>
-          <a:p>
-            <a:r>
-              <a:t>【這一頁的作用】直接修 Kenny 第 6 點:原版 2D 位移圖看得到「移動了多少」卻看不到「哪一條對應什麼解法」。改成一列一條風險、同一列並排緩解 → 緩解自己的代價 → 偵測訊號,委員會用眼睛掃一行就答得出「這條誰負責、怎麼知道它壞了」。三條紅底是本頁的說服力來源:R8 承認沒有解、R9/R10 承認是這個 AI 方案自己製造的新風險(自動結案的漏放與冤枉),並且把它們的放行責任明確推到本案之外那道門 —— 主動揭露換取委員會對其餘七條的信任。成功可能性標在每條風險名右側,補上評分要求的第三個維度。</a:t>
+              <a:t>◆ 口白逐字 —— P5 · 五條路,含三條不用 AI</a:t>
+            </a:r>
+          </a:p>
+          <a:p>
+            <a:r>
+              <a:t>路有五條。加人,迴路轉得更久,不會停。更便宜的是調班加人力池,我不先否決;六週後那道門用正式量測判:AI能處理的那段佔主要延遲才放行,否則轉排班。採用案是地端視覺語言模型讀事件影片。前兩包是它的必要前置:沒量測底座,就不知道它判得對不對。預期八成五的爭議件,機器有把握、直接結案,人不再看。這是推估不是實測;而人現在判得多準,我們沒量過。所以這六個月,它一筆都不對外生效——機器照出結論,人照常判,兩邊比對。這是唯一算得出自動結案漏放率的設計。</a:t>
+            </a:r>
+          </a:p>
+          <a:p>
+            <a:r>
+              <a:t>──────────────────────────────────</a:t>
+            </a:r>
+          </a:p>
+          <a:p>
+            <a:r>
+              <a:t>【matrix-cell】線性:量幾倍,人就要幾倍 → 需 17-24 人(現有 5 人)〔提案推算,非核定編制〕</a:t>
+            </a:r>
+          </a:p>
+          <a:p>
+            <a:r>
+              <a:t>【matrix-cell】拒絕 - 加人只是沿著同一條成本曲線移動,不是把曲線整條外推(完整算式與迴路見下方卡片)</a:t>
+            </a:r>
+          </a:p>
+          <a:p>
+            <a:r>
+              <a:t>【matrix-cell】重排班表,把尖峰徵調的 7 位研發工程師從臨時支援變成有編組、有訓練的正式安排(尖峰徵調是現在就在跑的簡易版)</a:t>
+            </a:r>
+          </a:p>
+          <a:p>
+            <a:r>
+              <a:t>【matrix-cell】仍線性,但斜率略低;削得掉尖峰,削不掉每日底量。⚠️ 斜率與削峰幅度目前沒有量測</a:t>
+            </a:r>
+          </a:p>
+          <a:p>
+            <a:r>
+              <a:t>【matrix-cell】待 G1 判定,本案不預先否決它 - 它是最便宜的解。營運端三個限制〔第一手經驗,不是量測〕:新人約三個月才判得準 · 影像有隱私限制不能外包 · 過去擴大人力判準反而更亂;另一項:排班只動得了排隊那 0-1 天</a:t>
+            </a:r>
+          </a:p>
+          <a:p>
+            <a:r>
+              <a:t>【matrix-cell】先做 - 某小型車隊單月樣本中 103 / 124 = 83% 的誤報同一根因,而速限資料自有;高風險決策場景應優先使用可逐條檢查的可解釋方法,而不是對黑箱做事後解釋(Rudin, 2019)。它同時是選項 2 的對照基線</a:t>
+            </a:r>
+          </a:p>
+          <a:p>
+            <a:r>
+              <a:t>【matrix-cell】讓機器讀懂一次事件的完整脈絡(影片 + 客戶問題 + 規則),產出可交付的描述與證據包</a:t>
+            </a:r>
+          </a:p>
+          <a:p>
+            <a:r>
+              <a:t>【matrix-cell】前期一次性投入,之後次線性 - 事件量繼續長,人時不跟著等比長。這是五條裡唯一不是線性的形狀</a:t>
+            </a:r>
+          </a:p>
+          <a:p>
+            <a:r>
+              <a:t>【matrix-cell】採用 - 前三包不是流程改善,是評估它的必要前置:量測底座 = 評估基準(沒有它不知道模型判得對不對)· 判準統一 = 驗證資料(判準不一致的標註餵給模型就是垃圾進垃圾出)· 規則式 = 對照基線(要證明模型有增量,得先有一個不用它的基準)</a:t>
+            </a:r>
+          </a:p>
+          <a:p>
+            <a:r>
+              <a:t>【matrix-cell】前置條件,不是競爭關係 - 雲端判定真假,誰判定雲端?本案提供它需要的可稽核量測與乾淨標註</a:t>
+            </a:r>
+          </a:p>
+          <a:p>
+            <a:r>
+              <a:t>【matrix】{'name': '選項 0b\n調班 + 尖峰人力池', 'cells': ['重排班表,把尖峰徵調的 7 位研發工程師從臨時支援變成有編組、有訓練…', '仍線性,但斜率略低;削得掉尖峰,削不掉每日底量。⚠️ 斜率與削峰幅度目…', '隨時可停、可退回原班表 - 五條路裡反悔成本最低的一條', '待 G1 判定,本案不預先否決它 - 它是最便宜的解。營運端三個限制〔第…'], 'hot': False}</a:t>
+            </a:r>
+          </a:p>
+          <a:p>
+            <a:r>
+              <a:t>【matrix】{'name': '選項 1\n規則式脈絡融合(不用機器學習)', 'cells': ['定位 + 地圖速限硬規則比對,把畫面外的脈絡接到事件上', '一次性建置,之後整段下移一階、後續仍線性', '可逐條檢查、可回退到規則本身', '先做 - 某小型車隊單月樣本中 103 / 124 = 83% 的誤報同一根因,而速…'], 'hot': False}</a:t>
+            </a:r>
+          </a:p>
+          <a:p>
+            <a:r>
+              <a:t>【matrix】{'name': '選項 3\n公司既有的雲端判讀規劃', 'cells': ['仍在研擬中的雲端判讀', '尚未開始,曲線未定', '不在本案範圍,由技術長辦公室決定', '前置條件,不是競爭關係 - 雲端判定真假,誰判定雲端?本案提供它需要的…'], 'hot': False}</a:t>
+            </a:r>
+          </a:p>
+          <a:p>
+            <a:r>
+              <a:t>【matrix-cell】線性:量幾倍,人就要幾倍 → 需 17-24 人(現有 5 人)〔提案推算,非核定編制〕</a:t>
+            </a:r>
+          </a:p>
+          <a:p>
+            <a:r>
+              <a:t>【matrix-cell】拒絕 - 加人只是沿著同一條成本曲線移動,不是把曲線整條外推(完整算式與迴路見下方卡片)</a:t>
+            </a:r>
+          </a:p>
+          <a:p>
+            <a:r>
+              <a:t>【matrix-cell】重排班表,把尖峰徵調的 7 位研發工程師從臨時支援變成有編組、有訓練的正式安排(尖峰徵調是現在就在跑的簡易版)</a:t>
+            </a:r>
+          </a:p>
+          <a:p>
+            <a:r>
+              <a:t>【matrix-cell】仍線性,但斜率略低;削得掉尖峰,削不掉每日底量。⚠️ 斜率與削峰幅度目前沒有量測</a:t>
+            </a:r>
+          </a:p>
+          <a:p>
+            <a:r>
+              <a:t>【matrix-cell】隨時可停、可退回原班表 - 五條路裡反悔成本最低的一條</a:t>
+            </a:r>
+          </a:p>
+          <a:p>
+            <a:r>
+              <a:t>【matrix-cell】待 G1 判定,本案不預先否決它 - 它是最便宜的解。營運端三個限制〔第一手經驗,不是量測〕:新人約三個月才判得準 · 影像有隱私限制不能外包 · 過去擴大人力判準反而更亂;另一項:排班只動得了排隊那 0-1 天</a:t>
+            </a:r>
+          </a:p>
+          <a:p>
+            <a:r>
+              <a:t>【matrix-cell】定位 + 地圖速限硬規則比對,把畫面外的脈絡接到事件上</a:t>
+            </a:r>
+          </a:p>
+          <a:p>
+            <a:r>
+              <a:t>【matrix-cell】先做 - 某小型車隊單月樣本中 103 / 124 = 83% 的誤報同一根因,而速限資料自有;高風險決策場景應優先使用可逐條檢查的可解釋方法,而不是對黑箱做事後解釋(Rudin, 2019)。它同時是選項 2 的對照基線</a:t>
+            </a:r>
+          </a:p>
+          <a:p>
+            <a:r>
+              <a:t>【matrix-cell】讓機器讀懂一次事件的完整脈絡(影片 + 客戶問題 + 規則),產出可交付的描述與證據包</a:t>
+            </a:r>
+          </a:p>
+          <a:p>
+            <a:r>
+              <a:t>【matrix-cell】前期一次性投入,之後次線性 - 事件量繼續長,人時不跟著等比長。這是五條裡唯一不是線性的形狀</a:t>
+            </a:r>
+          </a:p>
+          <a:p>
+            <a:r>
+              <a:t>【matrix-cell】三道門都可停:G1(W6)· G2(W12)· G3(W24);且六個月內對外自動結案 0%</a:t>
+            </a:r>
+          </a:p>
+          <a:p>
+            <a:r>
+              <a:t>【matrix-cell】採用 - 前三包不是流程改善,是評估它的必要前置:量測底座 = 評估基準(沒有它不知道模型判得對不對)· 判準統一 = 驗證資料(判準不一致的標註餵給模型就是垃圾進垃圾出)· 規則式 = 對照基線(要證明模型有增量,得先有一個不用它的基準)</a:t>
+            </a:r>
+          </a:p>
+          <a:p>
+            <a:r>
+              <a:t>【matrix-cell】前置條件,不是競爭關係 - 雲端判定真假,誰判定雲端?本案提供它需要的可稽核量測與乾淨標註</a:t>
+            </a:r>
+          </a:p>
+          <a:p>
+            <a:r>
+              <a:t>【matrix】{'name': '選項 0b\n調班 + 尖峰人力池', 'cells': ['重排班表,把尖峰徵調的 7 位研發工程師從臨時…', '仍線性,但斜率略低;削得掉尖峰,削不掉每日底量…', '隨時可停、可退回原班表 - 五條路裡反悔成本最…', '待 G1 判定,本案不預先否決它 - 它是最便宜的…'], 'hot': False}</a:t>
+            </a:r>
+          </a:p>
+          <a:p>
+            <a:r>
+              <a:t>【matrix】{'name': '選項 1\n規則式脈絡融合(不用機器學習)', 'cells': ['定位 + 地圖速限硬規則比對,把畫面外的脈絡接…', '一次性建置,之後整段下移一階、後續仍線性', '可逐條檢查、可回退到規則本身', '先做 - 某小型車隊單月樣本中 103 / 124 = 83…'], 'hot': False}</a:t>
+            </a:r>
+          </a:p>
+          <a:p>
+            <a:r>
+              <a:t>【matrix】{'name': '選項 3\n公司既有的雲端判讀規劃', 'cells': ['仍在研擬中的雲端判讀', '尚未開始,曲線未定', '不在本案範圍,由技術長辦公室決定', '前置條件,不是競爭關係 - 雲端判定真假,誰判定…'], 'hot': False}</a:t>
+            </a:r>
+          </a:p>
+          <a:p>
+            <a:r>
+              <a:t>【badge】提案推算,非核定編制</a:t>
+            </a:r>
+          </a:p>
+          <a:p>
+            <a:r>
+              <a:t>【card:選項 0 的算式(照印,含對本案不利的部分)】批次   13,000 x 20 秒 = 72.2 人時(13,000+ 筆/天 = 全客戶每日平均總事件量,雲端伺服器實測統計)</a:t>
+            </a:r>
+          </a:p>
+          <a:p>
+            <a:r>
+              <a:t>【card:選項 0 的算式(照印,含對本案不利的部分)】合計   129.1-185.9 人時 / 8 小時 = 16.14-23.24 FTE → 取整員額 17-24 人(保產能只能無條件進位;現有 5 人);工作量比 = 129.1 / 29.8 = 4.33 倍,這就是「四倍以上」的算術依據</a:t>
+            </a:r>
+          </a:p>
+          <a:p>
+            <a:r>
+              <a:t>【card:選項 0 的算式(照印,含對本案不利的部分)】5.25 分/筆由一次實際判讀反推:5 人 x 3.6 個分析日 x 8 小時 = 144 人時 / 1,647 筆。這是單一批次的實際節奏,不是長期平均</a:t>
+            </a:r>
+          </a:p>
+          <a:p>
+            <a:r>
+              <a:t>【card:選項 0 的算式(照印,含對本案不利的部分)】兩個尚未驗證的假設:①約 20 秒/筆是營運端的實務估計,尚未以計時量測驗證 ②假設所有客戶有相同的案件組合與 5-10% 的爭議比例。兩項都由 W1-6 檢驗、G1 上桌;任一項被推翻,17-24 人要重算</a:t>
+            </a:r>
+          </a:p>
+          <a:p>
+            <a:r>
+              <a:t>【card:選項 0 的算式(照印,含對本案不利的部分)】加人會讓迴路轉得更久,不會讓它停:裝機量成長 → 複核量成長 → 人力吃緊 → 標註品質不穩 → 回流訓練資料不穩 → 誤報降不下來 → 複核量繼續成長。低品質標註會沿著訓練流程往下游放大(資料級聯)(Sambasivan et al., 2021)</a:t>
+            </a:r>
+          </a:p>
+          <a:p>
+            <a:r>
+              <a:t>【card:選項 0 的算式(照印,含對本案不利的部分)】爭議   13,000 x 5-10% x 5.25 分 = 56.8-113.7 人時</a:t>
+            </a:r>
+          </a:p>
+          <a:p>
+            <a:r>
+              <a:t>【card:選項 0 的算式(照印,含對本案不利的部分)】合計   129.1-185.9 人時 / 8 小時 = 16.14-23.24 FTE → 取整員額 17-24 …</a:t>
+            </a:r>
+          </a:p>
+          <a:p>
+            <a:r>
+              <a:t>【card:選項 0 的算式(照印,含對本案不利的部分)】5.25 分/筆由一次實際判讀反推:5 人 x 3.6 個分析日 x 8 小時 = 144 人時 /…</a:t>
+            </a:r>
+          </a:p>
+          <a:p>
+            <a:r>
+              <a:t>【card:選項 0 的算式(照印,含對本案不利的部分)】兩個尚未驗證的假設:①約 20 秒/筆是營運端的實務估計,尚未以計時量測驗證 ②假…</a:t>
+            </a:r>
+          </a:p>
+          <a:p>
+            <a:r>
+              <a:t>【card:選項 0 的算式(照印,含對本案不利的部分)】加人會讓迴路轉得更久,不會讓它停:裝機量成長 → 複核量成長 → 人力吃緊 → 標…</a:t>
+            </a:r>
+          </a:p>
+          <a:p>
+            <a:r>
+              <a:t>【card:G1(第 6 週)= 因果判定門】W1-6 要交出:一件客戶爭議的時間拆解(等待排隊 0-1 天 · 撈數據 0.5 天 · 判讀 1-3 天 · 內部覆核 0.5 天 · 回信 0.5 天 = 合計 2.5-5.5 天)· 兩天逾時率 · 尖峰到件分布 · 抽幀率的召回率比較</a:t>
+            </a:r>
+          </a:p>
+          <a:p>
+            <a:r>
+              <a:t>【card:G1(第 6 週)= 因果判定門】怎麼判:把五段分成兩堆 - 「AI 可處理」(撈數據 · 判讀 · 證據包製作)與「AI 不可處理」(排隊 · 排班 · 人力調度)</a:t>
+            </a:r>
+          </a:p>
+          <a:p>
+            <a:r>
+              <a:t>【card:G1(第 6 週)= 因果判定門】⚠️ 初步拆解已顯示 AI 可處理段佔全程 43%-78%,但那是營運端的一次口述拆解,不是系統量測;W1-6 要把它做成正式量測,判定規則不因初步結果而放寬。六週買一個答案,答案不對就不做後面</a:t>
+            </a:r>
+          </a:p>
+          <a:p>
+            <a:r>
+              <a:t>【card:G1(第 6 週)= 因果判定門】怎麼判:把五段分成兩堆 - 「AI 可處理」(撈數據 · 判讀 · 證據包製作)與「AI …</a:t>
+            </a:r>
+          </a:p>
+          <a:p>
+            <a:r>
+              <a:t>【card:G1(第 6 週)= 因果判定門】出口 A:AI 可處理的那一堆佔主要延遲 → 放行選項 1 / 2 的後段</a:t>
+            </a:r>
+          </a:p>
+          <a:p>
+            <a:r>
+              <a:t>【card:G1(第 6 週)= 因果判定門】出口 B:否則 → 轉選項 0b(調班 + 尖峰人力池),本案的後五個工作包不執行</a:t>
+            </a:r>
+          </a:p>
+          <a:p>
+            <a:r>
+              <a:t>【card:G1(第 6 週)= 因果判定門】⚠️ 初步拆解已顯示 AI 可處理段佔全程 43%-78%,但那是營運端的一次口述拆解…</a:t>
+            </a:r>
+          </a:p>
+          <a:p>
+            <a:r>
+              <a:t>【badge】提案推估,非實測</a:t>
+            </a:r>
+          </a:p>
+          <a:p>
+            <a:r>
+              <a:t>【card:這 85% 到底是什麼(三層,一層都不可省)】技術寫到概念層次:一套地端視覺語言模型,篩檢與深挖兩種負載由同一台設備分時處理;實際選型與量化規格於 G1 依 W1-6 的量測定案 - 它直接決定要買幾台</a:t>
+            </a:r>
+          </a:p>
+          <a:p>
+            <a:r>
+              <a:t>【card:這 85% 到底是什麼(三層,一層都不可省)】吞吐:1,000 支 15 秒事件影片約 10-16 分〔估算,非實測;依一組公開可得模型的公開吞吐特性推估〕;同一批人以 1.0 倍速看完約 250 分</a:t>
+            </a:r>
+          </a:p>
+          <a:p>
+            <a:r>
+              <a:t>【card:這 85% 到底是什麼(三層,一層都不可省)】能力層:以現行小模型的表現外推,預期約 85% 的爭議件機器有把握、可直接結案 - 1,000 筆進來約 850 筆,剩約 150 筆送人細看。對那些件而言那就是終局判定〔提案推估,非實測;母體只有客戶爭議段,不含每日全量批次複核〕</a:t>
+            </a:r>
+          </a:p>
+          <a:p>
+            <a:r>
+              <a:t>【card:這 85% 到底是什麼(三層,一層都不可省)】本案層:🔴 六個月內對外自動結案覆蓋率目標 = 0%。W12-24 只跑影子模式 - 機器照樣出結論但不對外送,人照常逐筆判,兩邊比對。這是唯一算得出自動結案漏放率的設計</a:t>
+            </a:r>
+          </a:p>
+          <a:p>
+            <a:r>
+              <a:t>【card:這 85% 到底是什麼(三層,一層都不可省)】怎麼驗:第 12 週用同一份凍結評估集,四臂同場比 - 現行影像模型 / 規則式脈絡基線 / VLM 輔助人工 / 影子模式。G2 只能調整模型假設與規模,不能取消這個實驗</a:t>
+            </a:r>
+          </a:p>
+          <a:p>
+            <a:r>
+              <a:t>【card:這 85% 到底是什麼(三層,一層都不可省)】吞吐:1,000 支 15 秒事件影片約 10-16 分〔估算,非實測;依一組公開可得模型的…</a:t>
+            </a:r>
+          </a:p>
+          <a:p>
+            <a:r>
+              <a:t>【card:這 85% 到底是什麼(三層,一層都不可省)】能力層:以現行小模型的表現外推,預期約 85% 的爭議件機器有把握、可直接結案 -…</a:t>
+            </a:r>
+          </a:p>
+          <a:p>
+            <a:r>
+              <a:t>【card:這 85% 到底是什麼(三層,一層都不可省)】本案層:🔴 六個月內對外自動結案覆蓋率目標 = 0%。W12-24 只跑影子模式 - 機器…</a:t>
+            </a:r>
+          </a:p>
+          <a:p>
+            <a:r>
+              <a:t>【card:這 85% 到底是什麼(三層,一層都不可省)】放行層:要讓它對外生效,需通過本案之外的一道獨立門,不在本次請求範圍</a:t>
+            </a:r>
+          </a:p>
+          <a:p>
+            <a:r>
+              <a:t>【card:這 85% 到底是什麼(三層,一層都不可省)】怎麼驗:第 12 週用同一份凍結評估集,四臂同場比 - 現行影像模型 / 規則式脈絡…</a:t>
+            </a:r>
+          </a:p>
+          <a:p>
+            <a:r>
+              <a:t>【callout】⚠️ 85% 是分流率:它決定「這筆要不要人細看」,不是「這筆是不是誤報」;它與偵測誤報率量的不是同一件事,不可比、不可並排、不可相減。而人現在判得多準,我們沒有量過 - 所以我也不知道 85% 是進步還是退步,那正是第一個工作包要建的東西。</a:t>
+            </a:r>
+          </a:p>
+          <a:p>
+            <a:r>
+              <a:t>【這一頁的作用】這一頁要讓委員會相信兩件事。第一,這個 AI 提案是被比較過的:五條路用同一組欄位並排 - 做什麼、成本形狀、能不能停、為什麼 - 差別因此不再是五段等長的描述,而是四種可以一眼分辨的曲線(線性 / 線性但削峰 / 一次性下移一階 / 次線性 / 尚未開始),而唯一不是線性的那一條就是採用案。第二,這個提案是可以被否決的:最便宜的調班沒有被畫醜也沒有被預先否決,選項 0 用最保守、對本案最不利的算法拒絕,G1 有兩個同粗的出口,其中一個出口通向不做本案。最後把 85% 降級成一個要在 W12 被凍結測試集驗、而且六個月內一筆都不對外生效的推估 - 委員會今天核准的是一道可以否決自己的量測,不是一個 85% 的承諾。</a:t>
             </a:r>
           </a:p>
         </p:txBody>
@@ -1653,22 +2063,57 @@
           <a:lstStyle/>
           <a:p>
             <a:r>
-              <a:t>【matrix】{'name': '4 隱私保護與安全\n擴大影像調閱與判定紀錄保存;唯一不因自動結案而惡化的一條', 'cells': ['部分', '部分'], 'hot': False}</a:t>
-            </a:r>
-          </a:p>
-          <a:p>
-            <a:r>
-              <a:t>【matrix】{'name': '6 透明性與解釋性\n對客戶揭露到哪一層尚未決定;移交後客戶不會知道那是機器判的', 'cells': ['部分', '未達成'], 'hot': False}</a:t>
-            </a:r>
-          </a:p>
-          <a:p>
-            <a:r>
-              <a:t>【callout】移交後那七盞紅燈掛在第 24 週那道門上;今天要批的是前六週的量測 —— 那正是把它們變回琥珀的唯一路徑。</a:t>
-            </a:r>
-          </a:p>
-          <a:p>
-            <a:r>
-              <a:t>【這一頁的作用】直接修 Kenny 第 7 點的後半:這一頁先用標題回答「為什麼一個 AI 提案要談倫理」—— 因為這個方案的產出就是把每 1,000 筆爭議裡約 850 筆變成沒有人看過的判定,那是它的代價,不是外掛的合規章節。雙欄評等讓委員會當場知道自己今天批的是哪一欄(專案期,影子模式,人仍逐筆判),而移交後那七盞紅燈全部掛在第 24 週那道門上;第 4 條保持白底是刻意的對照 —— 它是唯一不因自動結案而惡化的一條。全頁綠燈零條不是失分,是把「移交條件」寫成可稽核的待辦清單,也把前六週的預算正當化成把紅燈變回琥珀的唯一路徑。</a:t>
+              <a:t>◆ 口白逐字 —— P6 · 風險:七類十條,緩解位移與殘餘風險</a:t>
+            </a:r>
+          </a:p>
+          <a:p>
+            <a:r>
+              <a:t>選了這條,我先講它會出什麼事。風險歸成七類十條,我只講三條。第一,資料級聯:複核判準不一致會變成訓練標籤,脈絡資料有錯也會整批傳下去。第二,自動化偏差:介面一顯示模型信心,人就直接蓋章。我的決策是介面不顯示信心。但這個緩解只擋得住人還在看的那些 —— 移交後開到天花板,那八成五沒有介面、也沒有人。所以我另外加了兩條:機器把真的危險事件判成誤報,跟機器單方面駁回駕駛。兩條都掛在自動結案那道門上,不在這六個月裡。第三,法律面:曾判為誤報的紀錄,在事故舉證裡算什麼。這題我沒有答案,它由法務在 G1 前給書面意見。</a:t>
+            </a:r>
+          </a:p>
+          <a:p>
+            <a:r>
+              <a:t>──────────────────────────────────</a:t>
+            </a:r>
+          </a:p>
+          <a:p>
+            <a:r>
+              <a:t>【matrix-cell】教育・介面 (Goddard et al., 2012)</a:t>
+            </a:r>
+          </a:p>
+          <a:p>
+            <a:r>
+              <a:t>介面不顯示信心 (Guo et al., 2017)</a:t>
+            </a:r>
+          </a:p>
+          <a:p>
+            <a:r>
+              <a:t>【matrix】{'name': 'R3 數據｜自動化偏差 · 成功 中\n(Parasuraman &amp; Manzey, 2010)', 'cells': ['教育・介面 (Goddard et al., 2012)\n介面不顯示信心 (Guo et al., 2017)…', '不顯示信心使複核變慢,\n與時效缺口相衝', '盲測組與對照組判定差異\n超過設計書所訂容忍值'], 'hot': False}</a:t>
+            </a:r>
+          </a:p>
+          <a:p>
+            <a:r>
+              <a:t>【matrix】{'name': 'R5 社會性 · 成功 高\n複核團隊抵觸角色改變', 'cells': ['教育:角色轉型說明 +\n判準手冊共同編寫', '參與式做法拉長\n判準定案時程', '複核團隊留任率或\n黃金題參與率下滑'], 'hot': False}</a:t>
+            </a:r>
+          </a:p>
+          <a:p>
+            <a:r>
+              <a:t>【matrix】{'name': 'R6 經濟 · 成功 中\n期內回本難證 · 與雲端競合', 'cells': ['審計:三道決策門\n逐段釋出額度', '分段釋出使長週期\n工作包難以排人', '決策門審查時單位成本\n改善低於門檻'], 'hot': False}</a:t>
+            </a:r>
+          </a:p>
+          <a:p>
+            <a:r>
+              <a:t>【matrix】{'name': 'R7 組織與管理 · 成功 高\n缺管理層支持(誠實命中)', 'cells': ['問責:贊助人指派 +\n決策門出席為放行前提', '決策門增加治理負擔\n與會議成本', '決策門連續兩次\n無高階出席'], 'hot': False}</a:t>
+            </a:r>
+          </a:p>
+          <a:p>
+            <a:r>
+              <a:t>【callout】R8 沒有答案 —— 法務書面意見於 G1(第 6 週)前到位;R9 · R10 是這個方案自己造成的,放行門在移交後,不在這六個月。</a:t>
+            </a:r>
+          </a:p>
+          <a:p>
+            <a:r>
+              <a:t>【這一頁的作用】直接修 Kenny 第 6 點:原版 2D 位移圖看得到「移動了多少」卻看不到「哪一條對應什麼解法」。改成一列一條風險、同一列並排緩解 → 緩解自己的代價 → 偵測訊號,委員會用眼睛掃一行就答得出「這條誰負責、怎麼知道它壞了」。三條紅底是本頁的說服力來源:R8 承認沒有解、R9/R10 承認是這個 AI 方案自己製造的新風險(自動結案的漏放與冤枉),並且把它們的放行責任明確推到本案之外那道門 —— 主動揭露換取委員會對其餘七條的信任。成功可能性標在每條風險名右側,補上評分要求的第三個維度。</a:t>
             </a:r>
           </a:p>
         </p:txBody>
@@ -1738,182 +2183,37 @@
           <a:lstStyle/>
           <a:p>
             <a:r>
-              <a:t>【callout】這一頁不是外掛的合規章節:上面兩層回答「怎麼證明這個 AI 真的有效」,護欄層回答「什麼情況下要喊停」。護欄層任一未達標,上面兩層的成績一律不採計。參照 Australia's AI Ethics Principles (2019) 第七條可申訴性 —— 被機器處理掉的事件必須有人能提出質疑;把它做成否決型指標,是本提案自己的設計決定,不是該文獻的主張。</a:t>
-            </a:r>
-          </a:p>
-          <a:p>
-            <a:r>
-              <a:t>【matrix-cell】本案期內維持 100%(影子模式,機器不對外結案)。移交後開到天花板時會降到約 15% —— 那是本案造成的,不是本案要解的;移交後目標值須與自動結案的放行門一起訂</a:t>
-            </a:r>
-          </a:p>
-          <a:p>
-            <a:r>
-              <a:t>【matrix-cell】批次複核約 20 秒/筆(全量;營運端實務估計,尚未以計時量測驗證)· 深入判讀約 5.25 分鐘/筆(5 人 × 3.6 個分析日 = 144 人時 ÷ 1,647 筆反推,單一批次的實際節奏,不是長期平均)</a:t>
-            </a:r>
-          </a:p>
-          <a:p>
-            <a:r>
-              <a:t>【matrix】{'name': '業務② 獲得人工驗證判定的客戶涵蓋率', 'cells': ['現況為配給制,依購買量與問題嚴重性排序;涵蓋率無紀錄,W6 建立', '本案期內維持 100%(影子模式,機器不對外結案)。移交後開到天花板時會降到約 15% —— 那是本案造成的,不是本案要解的;移交後目標值須與自動結案的放行門…']}</a:t>
-            </a:r>
-          </a:p>
-          <a:p>
-            <a:r>
-              <a:t>【matrix】{'name': '業務③ 可服務的每日事件量上限', 'cells': ['現況撐一個大型車隊約 3,000 筆/天', '支撐全客戶 13,000+ 筆/天〔提案目標;所需人力由 G2 後依實測單位工時重估〕。驅動因子不在我方控制內 —— 由客戶的開通時點決定']}</a:t>
-            </a:r>
-          </a:p>
-          <a:p>
-            <a:r>
-              <a:t>【matrix】{'name': '營運⑤⑥ 兩條工作流的每筆人工工時', 'cells': ['批次複核約 20 秒/筆(全量;營運端實務估計,尚未以計時量測驗證)· 深入判讀約 5.25 分鐘/筆(5 人 × 3.6 個分析日 = 144 人時 ÷ 1,647 筆反推,單一批…', '兩者的正式量測都提前到 W6,與時間拆解同批交出;目標值於 G1 訂定 —— 全客戶人力推算與可避免成本都掛在這兩個單價上']}</a:t>
-            </a:r>
-          </a:p>
-          <a:p>
-            <a:r>
-              <a:t>【matrix】{'name': '營運⑦ ADAS · 行車輔助誤報率', 'cells': ['某小型車隊單月樣本 104 / 1,029 ≈ 10.1%(該樣本全部誤報 124 筆 = ADAS 104 + 駕駛監控約 20;本列只算 ADAS 側)', '降至 7% 以下〔提案目標;以該樣本為基準,G1 後依重新校準的量測重訂〕。只在人機系統軌量,第 12 週判 —— 🚫 不掛在模型本身']}</a:t>
-            </a:r>
-          </a:p>
-          <a:p>
-            <a:r>
-              <a:t>【matrix】{'name': '營運⑧ 客戶回頭標記率(越低越好)', 'cells': ['現況 5–10%;同時是「駕駛端無效警示率」的可觀測代理', '降至 5% 以下〔提案目標〕']}</a:t>
-            </a:r>
-          </a:p>
-          <a:p>
-            <a:r>
-              <a:t>【matrix】{'name': '營運⑨ 尖峰徵調研發人時', 'cells': ['尖峰徵調 7 位研發工程師(離開本職 · 非常態編制 · 非專職)', '期內建立峰值徵調人時的量測基準,目標值於 G2 訂定;歸零列為移交後目標']}</a:t>
-            </a:r>
-          </a:p>
-          <a:p>
-            <a:r>
-              <a:t>【matrix-cell】2 天內;單純案件當天〔提案目標 · 客戶期望,非已簽訂之服務水準協議〕。改善來源有兩項:證據包自動化、誤報量下降;各自佔多少由 W16 量測後給出</a:t>
-            </a:r>
-          </a:p>
-          <a:p>
-            <a:r>
-              <a:t>【matrix-cell】本案期內維持 100%(影子模式,機器不對外結案)。移交後開到天花板時會降到約 15% —— 那是本案造成的,不是本案要解的;移交後目標值須與自動結案的放行門一起訂</a:t>
-            </a:r>
-          </a:p>
-          <a:p>
-            <a:r>
-              <a:t>【matrix-cell】支撐全客戶 13,000+ 筆/天〔提案目標;所需人力由 G2 後依實測單位工時重估〕。驅動因子不在我方控制內 —— 由客戶的開通時點決定</a:t>
-            </a:r>
-          </a:p>
-          <a:p>
-            <a:r>
-              <a:t>【matrix-cell】做本案、移交後開到天花板需 11–12 人(仍須增聘 6–7 人)→ 可避免 5–13 人 ≈ 每年 NT$520–1,521 萬〔以初階工程師公開薪資量級推算,非核定預算〕</a:t>
-            </a:r>
-          </a:p>
-          <a:p>
-            <a:r>
-              <a:t>【matrix-cell】批次複核約 20 秒/筆(全量;營運端實務估計,尚未以計時量測驗證)· 深入判讀約 5.25 分鐘/筆(5 人 × 3.6 個分析日 = 144 人時 ÷ 1,647 筆反推,單一批次的實際節奏,不是長期平均)</a:t>
-            </a:r>
-          </a:p>
-          <a:p>
-            <a:r>
-              <a:t>【matrix-cell】兩者的正式量測都提前到 W6,與時間拆解同批交出;目標值於 G1 訂定 —— 全客戶人力推算與可避免成本都掛在這兩個單價上</a:t>
-            </a:r>
-          </a:p>
-          <a:p>
-            <a:r>
-              <a:t>【matrix-cell】某小型車隊單月樣本 104 / 1,029 ≈ 10.1%(該樣本全部誤報 124 筆 = ADAS 104 + 駕駛監控約 20;本列只算 ADAS 側)</a:t>
-            </a:r>
-          </a:p>
-          <a:p>
-            <a:r>
-              <a:t>【matrix-cell】降至 7% 以下〔提案目標;以該樣本為基準,G1 後依重新校準的量測重訂〕。只在人機系統軌量,第 12 週判 —— 🚫 不掛在模型本身</a:t>
-            </a:r>
-          </a:p>
-          <a:p>
-            <a:r>
-              <a:t>【matrix】{'name': '業務② 獲得人工驗證判定的客戶涵蓋率', 'cells': ['現況為配給制,依購買量與問題嚴重性排序;涵蓋率無紀錄,W6 建立', '本案期內維持 100%(影子模式,機器不對外結案)。移交後開到天花板時會降到約 15% —— 那是本案造成的…']}</a:t>
-            </a:r>
-          </a:p>
-          <a:p>
-            <a:r>
-              <a:t>【matrix】{'name': '業務③ 可服務的每日事件量上限', 'cells': ['現況撐一個大型車隊約 3,000 筆/天', '支撐全客戶 13,000+ 筆/天〔提案目標;所需人力由 G2 後依實測單位工時重估〕。驅動因子不在我方控…']}</a:t>
-            </a:r>
-          </a:p>
-          <a:p>
-            <a:r>
-              <a:t>【matrix】{'name': '營運⑤⑥ 兩條工作流的每筆人工工時', 'cells': ['批次複核約 20 秒/筆(全量;營運端實務估計,尚未以計時量測驗證)· 深入判讀約 5.25 分鐘/筆(5 人 ×…', '兩者的正式量測都提前到 W6,與時間拆解同批交出;目標值於 G1 訂定 —— 全客戶人力推算與可避免成本…']}</a:t>
-            </a:r>
-          </a:p>
-          <a:p>
-            <a:r>
-              <a:t>【matrix】{'name': '營運⑦ ADAS · 行車輔助誤報率', 'cells': ['某小型車隊單月樣本 104 / 1,029 ≈ 10.1%(該樣本全部誤報 124 筆 = ADAS 104 + 駕駛監控約 20…', '降至 7% 以下〔提案目標;以該樣本為基準,G1 後依重新校準的量測重訂〕。只在人機系統軌量,第 12 週…']}</a:t>
-            </a:r>
-          </a:p>
-          <a:p>
-            <a:r>
-              <a:t>【matrix】{'name': '營運⑧ 客戶回頭標記率(越低越好)', 'cells': ['現況 5–10%;同時是「駕駛端無效警示率」的可觀測代理', '降至 5% 以下〔提案目標〕']}</a:t>
-            </a:r>
-          </a:p>
-          <a:p>
-            <a:r>
-              <a:t>【matrix】{'name': '營運⑨ 尖峰徵調研發人時', 'cells': ['尖峰徵調 7 位研發工程師(離開本職 · 非常態編制 · 非專職)', '期內建立峰值徵調人時的量測基準,目標值於 G2 訂定;歸零列為移交後目標']}</a:t>
-            </a:r>
-          </a:p>
-          <a:p>
-            <a:r>
-              <a:t>【matrix-cell】定義:被分到「有把握、可直接結案」桶,但描述錯誤且該錯誤足以改變判定結論的比例。基準不存在 —— 自動結案機制尚未建立</a:t>
-            </a:r>
-          </a:p>
-          <a:p>
-            <a:r>
-              <a:t>【matrix-cell】W12 由影子模式軌交出「自動結案桶與人工桶的漏放率差值」的 95% 信賴區間;非劣性邊際 δ 由委員會於 G1(W6)事前預註冊 —— 資料 W12 才交,判準必須寫在跑實驗之前</a:t>
-            </a:r>
-          </a:p>
-          <a:p>
-            <a:r>
-              <a:t>【matrix-cell】否決自動結案能不能對外生效 —— 沒有它,分流率就等於把那部分風險藏進「機器有把握」那一桶 · 技術負責人</a:t>
-            </a:r>
-          </a:p>
-          <a:p>
-            <a:r>
-              <a:t>【matrix】{'name': '⑪ 複核者一致性', 'cells': ['現況未量測', 'W10 前建立基線,目標值於 G2 訂定', '否決 G2 准不准開放對照重訓 · 複核營運主管']}</a:t>
-            </a:r>
-          </a:p>
-          <a:p>
-            <a:r>
-              <a:t>【matrix】{'name': '⑫ 訓練資料可追溯率', 'cells': ['0%', '100%,無中間值', '未達 100% 不移交(否決型,無中間值)']}</a:t>
-            </a:r>
-          </a:p>
-          <a:p>
-            <a:r>
-              <a:t>【matrix-cell】不存在。唯一量測是一份 39 筆人工觸發測試,獨立樣本,公司自註為下限</a:t>
-            </a:r>
-          </a:p>
-          <a:p>
-            <a:r>
-              <a:t>【matrix-cell】W6 交出帶 95% 信賴區間的點估計;上限值於 G1 由委員會核定</a:t>
-            </a:r>
-          </a:p>
-          <a:p>
-            <a:r>
-              <a:t>【matrix-cell】定義:被分到「有把握、可直接結案」桶,但描述錯誤且該錯誤足以改變判定結論的比例。基準不存在 —— 自動結案機制尚未建立</a:t>
-            </a:r>
-          </a:p>
-          <a:p>
-            <a:r>
-              <a:t>【matrix-cell】W12 由影子模式軌交出「自動結案桶與人工桶的漏放率差值」的 95% 信賴區間;非劣性邊際 δ 由委員會於 G1(W6)事前預註冊 —— 資料 W12 才交,判準必須寫在跑實驗之前</a:t>
-            </a:r>
-          </a:p>
-          <a:p>
-            <a:r>
-              <a:t>【matrix-cell】否決自動結案能不能對外生效 —— 沒有它,分流率就等於把那部分風險藏進「機器有把握」那一桶 · 技術負責人</a:t>
-            </a:r>
-          </a:p>
-          <a:p>
-            <a:r>
-              <a:t>【matrix】{'name': '⑪ 複核者一致性', 'cells': ['現況未量測', 'W10 前建立基線,目標值於 G2 訂定', '否決 G2 准不准開放對照重訓 · 複核營運主管']}</a:t>
-            </a:r>
-          </a:p>
-          <a:p>
-            <a:r>
-              <a:t>【matrix】{'name': '⑫ 訓練資料可追溯率', 'cells': ['0%', '100%,無中間值', '未達 100% 不移交(否決型,無中間值)']}</a:t>
-            </a:r>
-          </a:p>
-          <a:p>
-            <a:r>
-              <a:t>【這一頁的作用】這頁把「衡量」從外掛的合規章節,改寫成 AI 提案本身的兩個問題:怎麼證明它有效、什麼情況下喊停。對委員會的作用有三個:①上兩層告訴他們這筆錢買的是客戶等多久拿到分析(不是準確率),而且業務指標由營運指標支撐、有階序;②護欄層讓他們知道自己手上握著一票否決,尤其⑬漏濾率是自動結案能不能對外生效的唯一否決點 —— 提案人主動把刀柄遞出去;③每一個今天訂不出的目標值都寫明由哪道門、第幾週、誰負責訂,把「訂不出來」變成可稽核的紀律而不是含糊。</a:t>
+              <a:t>◆ 口白逐字 —— P7 · 倫理與可申訴性:對照澳洲 AI 倫理八原則</a:t>
+            </a:r>
+          </a:p>
+          <a:p>
+            <a:r>
+              <a:t>還有一條,是我們自己造成的。這道人工防線的產能有限,所以它是配給的 —— 依客戶的購買量排序。同樣一個誤判,發生在大客戶身上會被人攔下來,小客戶身上不會。分配依據是客戶大小,不是風險大小。這六個月我能做的,是第一次量得出它覆蓋了誰。但我要說清楚:這個方案開到天花板之後,配給的依據會從客戶大小換成機器的信心,而那八成五沒有人看過 —— 那是我造成的新問題,不是我解掉的舊問題。所以八原則裡的問責跟可申訴性,我這一頁全部標紅,而它們掛在第二十四週那道門上。申訴機制到位前,本案產出不供個人考核使用。</a:t>
+            </a:r>
+          </a:p>
+          <a:p>
+            <a:r>
+              <a:t>──────────────────────────────────</a:t>
+            </a:r>
+          </a:p>
+          <a:p>
+            <a:r>
+              <a:t>【matrix】{'name': '4 隱私保護與安全\n擴大影像調閱與判定紀錄保存;唯一不因自動結案而惡化的一條', 'cells': ['部分', '部分'], 'hot': False}</a:t>
+            </a:r>
+          </a:p>
+          <a:p>
+            <a:r>
+              <a:t>【matrix】{'name': '6 透明性與解釋性\n對客戶揭露到哪一層尚未決定;移交後客戶不會知道那是機器判的', 'cells': ['部分', '未達成'], 'hot': False}</a:t>
+            </a:r>
+          </a:p>
+          <a:p>
+            <a:r>
+              <a:t>【callout】移交後那七盞紅燈掛在第 24 週那道門上;今天要批的是前六週的量測 —— 那正是把它們變回琥珀的唯一路徑。</a:t>
+            </a:r>
+          </a:p>
+          <a:p>
+            <a:r>
+              <a:t>【這一頁的作用】直接修 Kenny 第 7 點的後半:這一頁先用標題回答「為什麼一個 AI 提案要談倫理」—— 因為這個方案的產出就是把每 1,000 筆爭議裡約 850 筆變成沒有人看過的判定,那是它的代價,不是外掛的合規章節。雙欄評等讓委員會當場知道自己今天批的是哪一欄(專案期,影子模式,人仍逐筆判),而移交後那七盞紅燈全部掛在第 24 週那道門上;第 4 條保持白底是刻意的對照 —— 它是唯一不因自動結案而惡化的一條。全頁綠燈零條不是失分,是把「移交條件」寫成可稽核的待辦清單,也把前六週的預算正當化成把紅燈變回琥珀的唯一路徑。</a:t>
             </a:r>
           </a:p>
         </p:txBody>
@@ -1983,187 +2283,197 @@
           <a:lstStyle/>
           <a:p>
             <a:r>
-              <a:t>【】一套地端視覺語言模型,篩檢與深挖兩種負載由同一台設備分時處理;實際選型與量化規格於 G1 依 W1–6 的量測定案(概念層次)。W8–12 最小離線試驗 → W12–24 只跑影子模式:機器照樣出結論但不對外送,人照常逐筆判,兩邊比對。總投入 4.50 人月不變,係 WP-E 內部人力前移,不增加總人月</a:t>
-            </a:r>
-          </a:p>
-          <a:p>
-            <a:r>
-              <a:t>【】交:公司第一份可稽核的錯誤率(含 95% 信賴區間)· 冷凍評估集 · 兩條工作流的單位工時正式基準 · 每案「結案方向」的黃金答案標籤 · 爭議處理的時間拆解、兩天逾時率、尖峰到件分布。公開數據:資料工作佔掉分析人員約八成時間 (Press, 2016) —— 前三包份量偏重是產業常態,不是計畫灌水</a:t>
-            </a:r>
-          </a:p>
-          <a:p>
-            <a:r>
-              <a:t>【】交:規則式脈絡層(刻意先做不含模型的版本,它同時是地端 VLM 的對照基線)· 誤報下降量測 (Rudin, 2019)。規則式今天就能做,排第五週是因為沒有前六週的基準線就證不出它有效 —— 這個取捨我提出來,決定權在各位</a:t>
-            </a:r>
-          </a:p>
-          <a:p>
-            <a:r>
-              <a:t>【rows】{'label': 'WP-B 標註品質｜AI 的前置', 'value': 'W3–10', 'note': '交:誤報的操作型定義 · 判準手冊 · 一致性儀表板。判準不一致的標註餵給模型就是垃圾進垃圾出 (Northcutt et al., 2021)'}</a:t>
-            </a:r>
-          </a:p>
-          <a:p>
-            <a:r>
-              <a:t>【rows】{'label': 'WP-C 脈絡特徵工程｜AI 的前置', 'value': 'W5–12', 'note': '交:規則式脈絡層(刻意先做不含模型的版本,它同時是地端 VLM 的對照基線)· 誤報下降量測 (Rudin, 2019)。規則式今天就能做,排第五週是因為沒有前六週的基準線就證不出它有效 —— 這個取捨我提出來,決定權在各位'}</a:t>
-            </a:r>
-          </a:p>
-          <a:p>
-            <a:r>
-              <a:t>【rows】{'label': 'WP-D 爭議回覆自動化｜併行的營運自動化', 'value': 'W8–16', 'note': '交:自動證據包 · 回覆時效改善。🔑 這是六個月裡真正對外交付的商業價值,而且人仍然每一筆都判 —— 它完全不依賴任何自動結案'}</a:t>
-            </a:r>
-          </a:p>
-          <a:p>
-            <a:r>
-              <a:t>【rows】{'label': 'WP-F 治理與移交｜AI 之後', 'value': 'W20–26', 'note': '交:移交文件 · 常態儀表板。六個里程碑 M1–M6 落在 W6 / W10 / W12 / W16 / W24 / W26,那是交東西的時點,不是可喊停的時點'}</a:t>
-            </a:r>
-          </a:p>
-          <a:p>
-            <a:r>
-              <a:t>【rows[0]WP-A 評估底座｜AI 的前置】交:公司第一份可稽核的錯誤率(含 95% 信賴區間)· 冷凍評估集 · 兩條工作流的單位工時正式基準 · 每案「結案方向」的黃金答案標籤 · 爭議處理的時間拆解、兩天逾時率、尖峰到件分布。公開數據:資料工作佔掉分析人員約八成時間 (Press, 2016) —— 前三包份量偏重是產業常態,不是計畫灌水</a:t>
-            </a:r>
-          </a:p>
-          <a:p>
-            <a:r>
-              <a:t>【rows[1]WP-E 地端 VLM 事件判讀｜🔴 本案唯一的 AI 主體】一套地端視覺語言模型,篩檢與深挖兩種負載由同一台設備分時處理;實際選型與量化規格於 G1 依 W1–6 的量測定案(概念層次)。W8–12 最小離線試驗 → W12–24 只跑影子模式:機器照樣出結論但不對外送,人照常逐筆判,兩邊比對。總投入 4.50 人月不變,係 WP-E 內部人力前移,不增加總人月</a:t>
-            </a:r>
-          </a:p>
-          <a:p>
-            <a:r>
-              <a:t>【card:G1 · 第 6 週｜因果判定門】交:時間拆解(等待 / 找證據 / 判讀 / 內部覆核 / 回信)· 兩天逾時率 · 尖峰到件分布 · 抽幀率對交通標誌召回率的比較(它直接決定要買幾台)</a:t>
-            </a:r>
-          </a:p>
-          <a:p>
-            <a:r>
-              <a:t>【card:G1 · 第 6 週｜因果判定門】🔴 停的條件一:只有當「證據搜尋、誤報量與證據包製作」佔主要延遲,才續行後段;否則本案轉為排班與尖峰人力池方案</a:t>
-            </a:r>
-          </a:p>
-          <a:p>
-            <a:r>
-              <a:t>【card:G1 · 第 6 週｜因果判定門】🔴 停的條件二:評估底座未產出 → 剩餘工作全數不續行</a:t>
-            </a:r>
-          </a:p>
-          <a:p>
-            <a:r>
-              <a:t>【card:G1 · 第 6 週｜因果判定門】同時要事前預註冊漏濾率的非劣性邊際 δ —— 判準必須寫在跑實驗之前。初步拆解顯示 AI 可處理段(找證據 + 判讀)佔全程 43%–78%,為營運端的初步估計,W1–6 交可稽核版本</a:t>
-            </a:r>
-          </a:p>
-          <a:p>
-            <a:r>
-              <a:t>【card:G1 · 第 6 週｜因果判定門】🔴 停的條件一:只有當「證據搜尋、誤報量與…</a:t>
-            </a:r>
-          </a:p>
-          <a:p>
-            <a:r>
-              <a:t>【card:G1 · 第 6 週｜因果判定門】🔴 停的條件二:評估底座未產出 → 剩餘工作…</a:t>
-            </a:r>
-          </a:p>
-          <a:p>
-            <a:r>
-              <a:t>【card:G1 · 第 6 週｜因果判定門】同時要事前預註冊漏濾率的非劣性邊際 δ ——…</a:t>
-            </a:r>
-          </a:p>
-          <a:p>
-            <a:r>
-              <a:t>【badge】只能改規模,不能取消實驗</a:t>
-            </a:r>
-          </a:p>
-          <a:p>
-            <a:r>
-              <a:t>【card:G2 · 第 12 週｜四臂比較門】同一凍結評估集上跑四臂(見下表),分兩軌:工具品質軌 · 結案判定軌</a:t>
-            </a:r>
-          </a:p>
-          <a:p>
-            <a:r>
-              <a:t>【card:G2 · 第 12 週｜四臂比較門】🔴 這道門停不掉實驗,只能調整模型的假設與規模。規則式若已解掉大部分誤報 → 靶心改為殘餘;規則式若無效 → 先查脈絡資料本身的品質</a:t>
-            </a:r>
-          </a:p>
-          <a:p>
-            <a:r>
-              <a:t>【card:G2 · 第 12 週｜四臂比較門】放行條件:人機判定品質不劣於現況,且人工觸碰時間與 P90 回覆時間達預註冊門檻</a:t>
-            </a:r>
-          </a:p>
-          <a:p>
-            <a:r>
-              <a:t>【card:G2 · 第 12 週｜四臂比較門】🔴 但「自動結案要不要對外開啟」不由 G2、也不由 G3 決定 —— 那需要移交後一道獨立的門,不在本次請求範圍</a:t>
-            </a:r>
-          </a:p>
-          <a:p>
-            <a:r>
-              <a:t>【card:G2 · 第 12 週｜四臂比較門】🔴 這道門停不掉實驗,只能調整模型的假設與…</a:t>
-            </a:r>
-          </a:p>
-          <a:p>
-            <a:r>
-              <a:t>【card:G2 · 第 12 週｜四臂比較門】放行條件:人機判定品質不劣於現況,且人工…</a:t>
-            </a:r>
-          </a:p>
-          <a:p>
-            <a:r>
-              <a:t>【card:G2 · 第 12 週｜四臂比較門】🔴 但「自動結案要不要對外開啟」不由 G2…</a:t>
-            </a:r>
-          </a:p>
-          <a:p>
-            <a:r>
-              <a:t>【card:G3 · 第 24 週｜部署決定門】🔴 停的條件:對照重訓證不出增量 → 模型端不部署,只留前四包的成果</a:t>
-            </a:r>
-          </a:p>
-          <a:p>
-            <a:r>
-              <a:t>【card:G3 · 第 24 週｜部署決定門】就算證不出增量,公司仍留下第一套可重複的模型評估與標註品質流程 —— 那個東西不隨這道門撤掉</a:t>
-            </a:r>
-          </a:p>
-          <a:p>
-            <a:r>
-              <a:t>【card:G3 · 第 24 週｜部署決定門】對照實驗的設計(hold-out 怎麼凍 · 因子怎麼拆 · 預註冊門檻訂在哪)由技術負責人在 W8 前提出、G2 核可</a:t>
-            </a:r>
-          </a:p>
-          <a:p>
-            <a:r>
-              <a:t>【card:G3 · 第 24 週｜部署決定門】就算證不出增量,公司仍留下第一套可重複的…</a:t>
-            </a:r>
-          </a:p>
-          <a:p>
-            <a:r>
-              <a:t>【card:G3 · 第 24 週｜部署決定門】對照實驗的設計(hold-out 怎麼凍 · 因子…</a:t>
-            </a:r>
-          </a:p>
-          <a:p>
-            <a:r>
-              <a:t>【matrix-cell】🔴 自動結案桶與人工桶的漏放率差值(95% 信賴區間),對照 G1 事前預註冊的非劣性邊際 δ;另計冤枉率(該翻案而未翻案)。前三臂全部含人,而要部署的是無人系統 —— 只有這一臂算得出自動結案的漏放率。🚫 判準是比差值、比事前邊際,不是兩條信賴區間的端點互比</a:t>
-            </a:r>
-          </a:p>
-          <a:p>
-            <a:r>
-              <a:t>【matrix】{'name': '② 規則式脈絡基線', 'cells': ['規則式脈絡層 + 人全數複核', '不含模型能解掉多少誤報。它是地端 VLM 的對照基線 —— 如果它就夠,本案的模型端該縮']}</a:t>
-            </a:r>
-          </a:p>
-          <a:p>
-            <a:r>
-              <a:t>【matrix】{'name': '③ 人機協作', 'cells': ['機器輔助、人判定', '人工觸碰時間 · P90 回覆時間 · 判定品質。這是六個月內真正會上線的形態,誤報率也只能在這一軌量']}</a:t>
-            </a:r>
-          </a:p>
-          <a:p>
-            <a:r>
-              <a:t>【matrix-cell】人工觸碰時間 · P90 回覆時間 · 判定品質。這是六個月內真正會上線的形態,誤報率也只能在這一軌量</a:t>
-            </a:r>
-          </a:p>
-          <a:p>
-            <a:r>
-              <a:t>【matrix-cell】🔴 自動結案桶與人工桶的漏放率差值(95% 信賴區間),對照 G1 事前預註冊的非劣性邊際 δ;另計冤枉率(該翻案而未翻案)。前三臂全部含人,而要部署的是無人系統 —— 只有這一臂算得出自動結案的漏放率。🚫 判準是比差值、比事前邊際,不是兩條信賴區間的端點互比</a:t>
-            </a:r>
-          </a:p>
-          <a:p>
-            <a:r>
-              <a:t>【matrix】{'name': '② 規則式脈絡基線', 'cells': ['規則式脈絡層 + 人全數複核', '不含模型能解掉多少誤報。它是地端 VLM 的對照基線 —— 如果它就夠,本案的模型端該縮']}</a:t>
-            </a:r>
-          </a:p>
-          <a:p>
-            <a:r>
-              <a:t>【matrix】{'name': '③ 人機協作', 'cells': ['機器輔助、人判定', '人工觸碰時間 · P90 回覆時間 · 判定品質。這是六個月內真正會上線的形態,誤報率也只…']}</a:t>
-            </a:r>
-          </a:p>
-          <a:p>
-            <a:r>
-              <a:t>【這一頁的作用】這頁要讓委員會相信兩件事,而不是相信「我有計畫」。第一:六包裡只有一包是 AI,其餘五包不是繞路 —— 沒有凍結評估集就量不出模型判得準不準,判準不一致的標註餵給模型就是垃圾進垃圾出,所以順序本身就是風險控制。第二:每一道門都寫出「什麼條件下這個案子會停」,包括 G1 可以整案轉向排班方案、G3 可以直接不部署模型端。四臂表則正面回答答辯必問的那一題:六個月怎麼可能算得出無人系統的風險 —— 答案是第四臂影子模式,前三臂全部含人,只有它算得出自動結案的漏放率。</a:t>
+              <a:t>◆ 口白逐字 —— P8 · 怎麼算成功:三層 KPI,一條回圈</a:t>
+            </a:r>
+          </a:p>
+          <a:p>
+            <a:r>
+              <a:t>講完該不該做,接下來是怎麼算做成了。最上層第一個指標,是客戶等多久拿到分析,這是這個專案要買的東西。現況兩到五天,目標兩天內、單純案件當天;是客戶期望,不是已簽的服務水準協議。護欄層是否決型,今天多一條:漏濾率——機器說有把握、直接結案的那一桶裡,有多少其實該讓人看。第十二週交出它跟人工的差值,門檻第六週就要先訂,不能看完數據再訂。錯誤攔截比例我算不出來,分母還不存在,那正是護欄層要交的能力。訂不出目標值的,我寫的是它什麼時候被訂出來、由哪一道門訂。</a:t>
+            </a:r>
+          </a:p>
+          <a:p>
+            <a:r>
+              <a:t>──────────────────────────────────</a:t>
+            </a:r>
+          </a:p>
+          <a:p>
+            <a:r>
+              <a:t>【callout】這一頁不是外掛的合規章節:上面兩層回答「怎麼證明這個 AI 真的有效」,護欄層回答「什麼情況下要喊停」。護欄層任一未達標,上面兩層的成績一律不採計。參照 Australia's AI Ethics Principles (2019) 第七條可申訴性 —— 被機器處理掉的事件必須有人能提出質疑;把它做成否決型指標,是本提案自己的設計決定,不是該文獻的主張。</a:t>
+            </a:r>
+          </a:p>
+          <a:p>
+            <a:r>
+              <a:t>【matrix-cell】本案期內維持 100%(影子模式,機器不對外結案)。移交後開到天花板時會降到約 15% —— 那是本案造成的,不是本案要解的;移交後目標值須與自動結案的放行門一起訂</a:t>
+            </a:r>
+          </a:p>
+          <a:p>
+            <a:r>
+              <a:t>【matrix-cell】批次複核約 20 秒/筆(全量;營運端實務估計,尚未以計時量測驗證)· 深入判讀約 5.25 分鐘/筆(5 人 × 3.6 個分析日 = 144 人時 ÷ 1,647 筆反推,單一批次的實際節奏,不是長期平均)</a:t>
+            </a:r>
+          </a:p>
+          <a:p>
+            <a:r>
+              <a:t>【matrix】{'name': '業務② 獲得人工驗證判定的客戶涵蓋率', 'cells': ['現況為配給制,依購買量與問題嚴重性排序;涵蓋率無紀錄,W6 建立', '本案期內維持 100%(影子模式,機器不對外結案)。移交後開到天花板時會降到約 15% —— 那是本案造成的,不是本案要解的;移交後目標值須與自動結案的放行門…']}</a:t>
+            </a:r>
+          </a:p>
+          <a:p>
+            <a:r>
+              <a:t>【matrix】{'name': '業務③ 可服務的每日事件量上限', 'cells': ['現況撐一個大型車隊約 3,000 筆/天', '支撐全客戶 13,000+ 筆/天〔提案目標;所需人力由 G2 後依實測單位工時重估〕。驅動因子不在我方控制內 —— 由客戶的開通時點決定']}</a:t>
+            </a:r>
+          </a:p>
+          <a:p>
+            <a:r>
+              <a:t>【matrix】{'name': '營運⑤⑥ 兩條工作流的每筆人工工時', 'cells': ['批次複核約 20 秒/筆(全量;營運端實務估計,尚未以計時量測驗證)· 深入判讀約 5.25 分鐘/筆(5 人 × 3.6 個分析日 = 144 人時 ÷ 1,647 筆反推,單一批…', '兩者的正式量測都提前到 W6,與時間拆解同批交出;目標值於 G1 訂定 —— 全客戶人力推算與可避免成本都掛在這兩個單價上']}</a:t>
+            </a:r>
+          </a:p>
+          <a:p>
+            <a:r>
+              <a:t>【matrix】{'name': '營運⑦ ADAS · 行車輔助誤報率', 'cells': ['某小型車隊單月樣本 104 / 1,029 ≈ 10.1%(該樣本全部誤報 124 筆 = ADAS 104 + 駕駛監控約 20;本列只算 ADAS 側)', '降至 7% 以下〔提案目標;以該樣本為基準,G1 後依重新校準的量測重訂〕。只在人機系統軌量,第 12 週判 —— 🚫 不掛在模型本身']}</a:t>
+            </a:r>
+          </a:p>
+          <a:p>
+            <a:r>
+              <a:t>【matrix】{'name': '營運⑧ 客戶回頭標記率(越低越好)', 'cells': ['現況 5–10%;同時是「駕駛端無效警示率」的可觀測代理', '降至 5% 以下〔提案目標〕']}</a:t>
+            </a:r>
+          </a:p>
+          <a:p>
+            <a:r>
+              <a:t>【matrix】{'name': '營運⑨ 尖峰徵調研發人時', 'cells': ['尖峰徵調 7 位研發工程師(離開本職 · 非常態編制 · 非專職)', '期內建立峰值徵調人時的量測基準,目標值於 G2 訂定;歸零列為移交後目標']}</a:t>
+            </a:r>
+          </a:p>
+          <a:p>
+            <a:r>
+              <a:t>【matrix-cell】2 天內;單純案件當天〔提案目標 · 客戶期望,非已簽訂之服務水準協議〕。改善來源有兩項:證據包自動化、誤報量下降;各自佔多少由 W16 量測後給出</a:t>
+            </a:r>
+          </a:p>
+          <a:p>
+            <a:r>
+              <a:t>【matrix-cell】本案期內維持 100%(影子模式,機器不對外結案)。移交後開到天花板時會降到約 15% —— 那是本案造成的,不是本案要解的;移交後目標值須與自動結案的放行門一起訂</a:t>
+            </a:r>
+          </a:p>
+          <a:p>
+            <a:r>
+              <a:t>【matrix-cell】支撐全客戶 13,000+ 筆/天〔提案目標;所需人力由 G2 後依實測單位工時重估〕。驅動因子不在我方控制內 —— 由客戶的開通時點決定</a:t>
+            </a:r>
+          </a:p>
+          <a:p>
+            <a:r>
+              <a:t>【matrix-cell】做本案、移交後開到天花板需 11–12 人(仍須增聘 6–7 人)→ 可避免 5–13 人 ≈ 每年 NT$520–1,521 萬〔以初階工程師公開薪資量級推算,非核定預算〕</a:t>
+            </a:r>
+          </a:p>
+          <a:p>
+            <a:r>
+              <a:t>【matrix-cell】批次複核約 20 秒/筆(全量;營運端實務估計,尚未以計時量測驗證)· 深入判讀約 5.25 分鐘/筆(5 人 × 3.6 個分析日 = 144 人時 ÷ 1,647 筆反推,單一批次的實際節奏,不是長期平均)</a:t>
+            </a:r>
+          </a:p>
+          <a:p>
+            <a:r>
+              <a:t>【matrix-cell】兩者的正式量測都提前到 W6,與時間拆解同批交出;目標值於 G1 訂定 —— 全客戶人力推算與可避免成本都掛在這兩個單價上</a:t>
+            </a:r>
+          </a:p>
+          <a:p>
+            <a:r>
+              <a:t>【matrix-cell】某小型車隊單月樣本 104 / 1,029 ≈ 10.1%(該樣本全部誤報 124 筆 = ADAS 104 + 駕駛監控約 20;本列只算 ADAS 側)</a:t>
+            </a:r>
+          </a:p>
+          <a:p>
+            <a:r>
+              <a:t>【matrix-cell】降至 7% 以下〔提案目標;以該樣本為基準,G1 後依重新校準的量測重訂〕。只在人機系統軌量,第 12 週判 —— 🚫 不掛在模型本身</a:t>
+            </a:r>
+          </a:p>
+          <a:p>
+            <a:r>
+              <a:t>【matrix】{'name': '業務② 獲得人工驗證判定的客戶涵蓋率', 'cells': ['現況為配給制,依購買量與問題嚴重性排序;涵蓋率無紀錄,W6 建立', '本案期內維持 100%(影子模式,機器不對外結案)。移交後開到天花板時會降到約 15% —— 那是本案造成的…']}</a:t>
+            </a:r>
+          </a:p>
+          <a:p>
+            <a:r>
+              <a:t>【matrix】{'name': '業務③ 可服務的每日事件量上限', 'cells': ['現況撐一個大型車隊約 3,000 筆/天', '支撐全客戶 13,000+ 筆/天〔提案目標;所需人力由 G2 後依實測單位工時重估〕。驅動因子不在我方控…']}</a:t>
+            </a:r>
+          </a:p>
+          <a:p>
+            <a:r>
+              <a:t>【matrix】{'name': '營運⑤⑥ 兩條工作流的每筆人工工時', 'cells': ['批次複核約 20 秒/筆(全量;營運端實務估計,尚未以計時量測驗證)· 深入判讀約 5.25 分鐘/筆(5 人 ×…', '兩者的正式量測都提前到 W6,與時間拆解同批交出;目標值於 G1 訂定 —— 全客戶人力推算與可避免成本…']}</a:t>
+            </a:r>
+          </a:p>
+          <a:p>
+            <a:r>
+              <a:t>【matrix】{'name': '營運⑦ ADAS · 行車輔助誤報率', 'cells': ['某小型車隊單月樣本 104 / 1,029 ≈ 10.1%(該樣本全部誤報 124 筆 = ADAS 104 + 駕駛監控約 20…', '降至 7% 以下〔提案目標;以該樣本為基準,G1 後依重新校準的量測重訂〕。只在人機系統軌量,第 12 週…']}</a:t>
+            </a:r>
+          </a:p>
+          <a:p>
+            <a:r>
+              <a:t>【matrix】{'name': '營運⑧ 客戶回頭標記率(越低越好)', 'cells': ['現況 5–10%;同時是「駕駛端無效警示率」的可觀測代理', '降至 5% 以下〔提案目標〕']}</a:t>
+            </a:r>
+          </a:p>
+          <a:p>
+            <a:r>
+              <a:t>【matrix】{'name': '營運⑨ 尖峰徵調研發人時', 'cells': ['尖峰徵調 7 位研發工程師(離開本職 · 非常態編制 · 非專職)', '期內建立峰值徵調人時的量測基準,目標值於 G2 訂定;歸零列為移交後目標']}</a:t>
+            </a:r>
+          </a:p>
+          <a:p>
+            <a:r>
+              <a:t>【matrix-cell】定義:被分到「有把握、可直接結案」桶,但描述錯誤且該錯誤足以改變判定結論的比例。基準不存在 —— 自動結案機制尚未建立</a:t>
+            </a:r>
+          </a:p>
+          <a:p>
+            <a:r>
+              <a:t>【matrix-cell】W12 由影子模式軌交出「自動結案桶與人工桶的漏放率差值」的 95% 信賴區間;非劣性邊際 δ 由委員會於 G1(W6)事前預註冊 —— 資料 W12 才交,判準必須寫在跑實驗之前</a:t>
+            </a:r>
+          </a:p>
+          <a:p>
+            <a:r>
+              <a:t>【matrix-cell】否決自動結案能不能對外生效 —— 沒有它,分流率就等於把那部分風險藏進「機器有把握」那一桶 · 技術負責人</a:t>
+            </a:r>
+          </a:p>
+          <a:p>
+            <a:r>
+              <a:t>【matrix】{'name': '⑪ 複核者一致性', 'cells': ['現況未量測', 'W10 前建立基線,目標值於 G2 訂定', '否決 G2 准不准開放對照重訓 · 複核營運主管']}</a:t>
+            </a:r>
+          </a:p>
+          <a:p>
+            <a:r>
+              <a:t>【matrix】{'name': '⑫ 訓練資料可追溯率', 'cells': ['0%', '100%,無中間值', '未達 100% 不移交(否決型,無中間值)']}</a:t>
+            </a:r>
+          </a:p>
+          <a:p>
+            <a:r>
+              <a:t>【matrix-cell】不存在。唯一量測是一份 39 筆人工觸發測試,獨立樣本,公司自註為下限</a:t>
+            </a:r>
+          </a:p>
+          <a:p>
+            <a:r>
+              <a:t>【matrix-cell】W6 交出帶 95% 信賴區間的點估計;上限值於 G1 由委員會核定</a:t>
+            </a:r>
+          </a:p>
+          <a:p>
+            <a:r>
+              <a:t>【matrix-cell】定義:被分到「有把握、可直接結案」桶,但描述錯誤且該錯誤足以改變判定結論的比例。基準不存在 —— 自動結案機制尚未建立</a:t>
+            </a:r>
+          </a:p>
+          <a:p>
+            <a:r>
+              <a:t>【matrix-cell】W12 由影子模式軌交出「自動結案桶與人工桶的漏放率差值」的 95% 信賴區間;非劣性邊際 δ 由委員會於 G1(W6)事前預註冊 —— 資料 W12 才交,判準必須寫在跑實驗之前</a:t>
+            </a:r>
+          </a:p>
+          <a:p>
+            <a:r>
+              <a:t>【matrix-cell】否決自動結案能不能對外生效 —— 沒有它,分流率就等於把那部分風險藏進「機器有把握」那一桶 · 技術負責人</a:t>
+            </a:r>
+          </a:p>
+          <a:p>
+            <a:r>
+              <a:t>【matrix】{'name': '⑪ 複核者一致性', 'cells': ['現況未量測', 'W10 前建立基線,目標值於 G2 訂定', '否決 G2 准不准開放對照重訓 · 複核營運主管']}</a:t>
+            </a:r>
+          </a:p>
+          <a:p>
+            <a:r>
+              <a:t>【matrix】{'name': '⑫ 訓練資料可追溯率', 'cells': ['0%', '100%,無中間值', '未達 100% 不移交(否決型,無中間值)']}</a:t>
+            </a:r>
+          </a:p>
+          <a:p>
+            <a:r>
+              <a:t>【這一頁的作用】這頁把「衡量」從外掛的合規章節,改寫成 AI 提案本身的兩個問題:怎麼證明它有效、什麼情況下喊停。對委員會的作用有三個:①上兩層告訴他們這筆錢買的是客戶等多久拿到分析(不是準確率),而且業務指標由營運指標支撐、有階序;②護欄層讓他們知道自己手上握著一票否決,尤其⑬漏濾率是自動結案能不能對外生效的唯一否決點 —— 提案人主動把刀柄遞出去;③每一個今天訂不出的目標值都寫明由哪道門、第幾週、誰負責訂,把「訂不出來」變成可稽核的紀律而不是含糊。</a:t>
             </a:r>
           </a:p>
         </p:txBody>
